--- a/submission/LabOps-Guard-GOAI-复赛方案-v1.0-rc1.pptx
+++ b/submission/LabOps-Guard-GOAI-复赛方案-v1.0-rc1.pptx
@@ -2,31 +2,31 @@
 <file path=ppt/presentation.xml><?xml version="1.0" encoding="utf-8"?>
 <p:presentation xmlns:p="http://schemas.openxmlformats.org/presentationml/2006/main">
   <p:sldMasterIdLst>
-    <p:sldMasterId xmlns:r="http://schemas.openxmlformats.org/officeDocument/2006/relationships" id="2147483648" r:id="R97b450df1eba4184"/>
-    <p:sldMasterId xmlns:r="http://schemas.openxmlformats.org/officeDocument/2006/relationships" id="2147483650" r:id="Rb942070838f645b3"/>
+    <p:sldMasterId xmlns:r="http://schemas.openxmlformats.org/officeDocument/2006/relationships" id="2147483648" r:id="Rfbe7a2d88fc94aa8"/>
+    <p:sldMasterId xmlns:r="http://schemas.openxmlformats.org/officeDocument/2006/relationships" id="2147483650" r:id="R738311b2a74b4b23"/>
   </p:sldMasterIdLst>
   <p:notesMasterIdLst>
-    <p:notesMasterId xmlns:r="http://schemas.openxmlformats.org/officeDocument/2006/relationships" r:id="R7a3bc38d5bff414e"/>
+    <p:notesMasterId xmlns:r="http://schemas.openxmlformats.org/officeDocument/2006/relationships" r:id="Rbd5f1a05a7404670"/>
   </p:notesMasterIdLst>
   <p:sldIdLst>
-    <p:sldId xmlns:r="http://schemas.openxmlformats.org/officeDocument/2006/relationships" id="256" r:id="R961fc2b1a82e454c"/>
-    <p:sldId xmlns:r="http://schemas.openxmlformats.org/officeDocument/2006/relationships" id="257" r:id="Rfa97ea75626245d8"/>
-    <p:sldId xmlns:r="http://schemas.openxmlformats.org/officeDocument/2006/relationships" id="258" r:id="Rf97152a425cf45bb"/>
-    <p:sldId xmlns:r="http://schemas.openxmlformats.org/officeDocument/2006/relationships" id="259" r:id="R19ca09f12b044772"/>
-    <p:sldId xmlns:r="http://schemas.openxmlformats.org/officeDocument/2006/relationships" id="260" r:id="Re8e2eea7277b41f8"/>
-    <p:sldId xmlns:r="http://schemas.openxmlformats.org/officeDocument/2006/relationships" id="261" r:id="R88df56ec756b4f0f"/>
-    <p:sldId xmlns:r="http://schemas.openxmlformats.org/officeDocument/2006/relationships" id="262" r:id="Rf9b5381d54b34d26"/>
-    <p:sldId xmlns:r="http://schemas.openxmlformats.org/officeDocument/2006/relationships" id="263" r:id="R4b3b2c4bea98430b"/>
-    <p:sldId xmlns:r="http://schemas.openxmlformats.org/officeDocument/2006/relationships" id="264" r:id="Re5ddaae0820941dd"/>
-    <p:sldId xmlns:r="http://schemas.openxmlformats.org/officeDocument/2006/relationships" id="265" r:id="R7684aee050e24cc6"/>
-    <p:sldId xmlns:r="http://schemas.openxmlformats.org/officeDocument/2006/relationships" id="266" r:id="Rb0fd453c18924875"/>
-    <p:sldId xmlns:r="http://schemas.openxmlformats.org/officeDocument/2006/relationships" id="267" r:id="Ra9e0d26c5c2145b3"/>
-    <p:sldId xmlns:r="http://schemas.openxmlformats.org/officeDocument/2006/relationships" id="268" r:id="R4b98b51ea0c84704"/>
-    <p:sldId xmlns:r="http://schemas.openxmlformats.org/officeDocument/2006/relationships" id="269" r:id="R9a88c76e0fbd495d"/>
-    <p:sldId xmlns:r="http://schemas.openxmlformats.org/officeDocument/2006/relationships" id="270" r:id="R42b8a988f4c444eb"/>
-    <p:sldId xmlns:r="http://schemas.openxmlformats.org/officeDocument/2006/relationships" id="271" r:id="R89618ab492894832"/>
-    <p:sldId xmlns:r="http://schemas.openxmlformats.org/officeDocument/2006/relationships" id="272" r:id="R6f468bbf61e14594"/>
-    <p:sldId xmlns:r="http://schemas.openxmlformats.org/officeDocument/2006/relationships" id="273" r:id="Rbe8fad7fc61c49a3"/>
+    <p:sldId xmlns:r="http://schemas.openxmlformats.org/officeDocument/2006/relationships" id="256" r:id="R9dbfea4a3616432e"/>
+    <p:sldId xmlns:r="http://schemas.openxmlformats.org/officeDocument/2006/relationships" id="257" r:id="R5a51a71141b04aff"/>
+    <p:sldId xmlns:r="http://schemas.openxmlformats.org/officeDocument/2006/relationships" id="258" r:id="R1642428288a7471c"/>
+    <p:sldId xmlns:r="http://schemas.openxmlformats.org/officeDocument/2006/relationships" id="259" r:id="Rbb68735aad624955"/>
+    <p:sldId xmlns:r="http://schemas.openxmlformats.org/officeDocument/2006/relationships" id="260" r:id="R353d58ebace546ce"/>
+    <p:sldId xmlns:r="http://schemas.openxmlformats.org/officeDocument/2006/relationships" id="261" r:id="Rb08bc56a2c8e429b"/>
+    <p:sldId xmlns:r="http://schemas.openxmlformats.org/officeDocument/2006/relationships" id="262" r:id="Refc2eaf75ce74679"/>
+    <p:sldId xmlns:r="http://schemas.openxmlformats.org/officeDocument/2006/relationships" id="263" r:id="R5e1bb1a71e2741c2"/>
+    <p:sldId xmlns:r="http://schemas.openxmlformats.org/officeDocument/2006/relationships" id="264" r:id="R91c6b7e251024dba"/>
+    <p:sldId xmlns:r="http://schemas.openxmlformats.org/officeDocument/2006/relationships" id="265" r:id="R42448e1f71c04bbd"/>
+    <p:sldId xmlns:r="http://schemas.openxmlformats.org/officeDocument/2006/relationships" id="266" r:id="Rb340bbf551554c5d"/>
+    <p:sldId xmlns:r="http://schemas.openxmlformats.org/officeDocument/2006/relationships" id="267" r:id="Rbe150bde4d56419e"/>
+    <p:sldId xmlns:r="http://schemas.openxmlformats.org/officeDocument/2006/relationships" id="268" r:id="Red9209395d5f40ef"/>
+    <p:sldId xmlns:r="http://schemas.openxmlformats.org/officeDocument/2006/relationships" id="269" r:id="Rcb92f37e41794505"/>
+    <p:sldId xmlns:r="http://schemas.openxmlformats.org/officeDocument/2006/relationships" id="270" r:id="Rdfc5e008e06b49c6"/>
+    <p:sldId xmlns:r="http://schemas.openxmlformats.org/officeDocument/2006/relationships" id="271" r:id="Ra2bdc0b22069439a"/>
+    <p:sldId xmlns:r="http://schemas.openxmlformats.org/officeDocument/2006/relationships" id="272" r:id="Raf4fb2145a294fce"/>
+    <p:sldId xmlns:r="http://schemas.openxmlformats.org/officeDocument/2006/relationships" id="273" r:id="R3b331ab111214a28"/>
   </p:sldIdLst>
   <p:sldSz cx="12192000" cy="6858000"/>
   <p:notesSz cx="6858000" cy="9144000"/>
@@ -1873,7 +1873,7 @@
   </p:cSld>
   <p:clrMap bg1="lt1" tx1="dk1" bg2="lt2" tx2="dk2" accent1="accent1" accent2="accent2" accent3="accent3" accent4="accent4" accent5="accent5" accent6="accent6" hlink="hlink" folHlink="folHlink"/>
   <p:sldLayoutIdLst>
-    <p:sldLayoutId xmlns:r="http://schemas.openxmlformats.org/officeDocument/2006/relationships" id="2147483649" r:id="R04615e321fde468b"/>
+    <p:sldLayoutId xmlns:r="http://schemas.openxmlformats.org/officeDocument/2006/relationships" id="2147483649" r:id="Rec4a10f54c5c4939"/>
   </p:sldLayoutIdLst>
   <p:hf sldNum="0" hdr="0" ftr="0" dt="0"/>
   <p:txStyles>
@@ -2156,7 +2156,7 @@
   </p:cSld>
   <p:clrMap bg1="lt1" tx1="dk1" bg2="lt2" tx2="dk2" accent1="accent1" accent2="accent2" accent3="accent3" accent4="accent4" accent5="accent5" accent6="accent6" hlink="hlink" folHlink="folHlink"/>
   <p:sldLayoutIdLst>
-    <p:sldLayoutId xmlns:r="http://schemas.openxmlformats.org/officeDocument/2006/relationships" id="2147483651" r:id="R25898178d16f4041"/>
+    <p:sldLayoutId xmlns:r="http://schemas.openxmlformats.org/officeDocument/2006/relationships" id="2147483651" r:id="R69b61ae0f13249fa"/>
   </p:sldLayoutIdLst>
   <p:hf sldNum="0" hdr="0" ftr="0" dt="0"/>
   <p:txStyles>
@@ -3142,7 +3142,7 @@
                 <a:ea typeface="微软雅黑"/>
                 <a:cs typeface="微软雅黑"/>
               </a:rPr>
-              <a:t>Trustworthy Agent Execution &amp; Governance Infrastructure</a:t>
+              <a:t>Trust Infrastructure for Production Agent Systems</a:t>
             </a:r>
             <a:endParaRPr sz="1500" b="1" kern="0" spc="200">
               <a:solidFill>
@@ -6632,7 +6632,7 @@
           <p:nvPr/>
         </p:nvPicPr>
         <p:blipFill>
-          <a:blip xmlns:r="http://schemas.openxmlformats.org/officeDocument/2006/relationships" xmlns:a="http://schemas.openxmlformats.org/drawingml/2006/main" r:embed="Rf59e215b6e8d4c94"/>
+          <a:blip xmlns:r="http://schemas.openxmlformats.org/officeDocument/2006/relationships" xmlns:a="http://schemas.openxmlformats.org/drawingml/2006/main" r:embed="R76c0837e7ef64a79"/>
           <a:stretch xmlns:a="http://schemas.openxmlformats.org/drawingml/2006/main"/>
         </p:blipFill>
         <p:spPr>
@@ -7664,7 +7664,7 @@
           <p:nvPr/>
         </p:nvPicPr>
         <p:blipFill>
-          <a:blip xmlns:r="http://schemas.openxmlformats.org/officeDocument/2006/relationships" xmlns:a="http://schemas.openxmlformats.org/drawingml/2006/main" r:embed="Ra94dfecfcda8471c"/>
+          <a:blip xmlns:r="http://schemas.openxmlformats.org/officeDocument/2006/relationships" xmlns:a="http://schemas.openxmlformats.org/drawingml/2006/main" r:embed="R64e0e5845e9a4de8"/>
           <a:stretch xmlns:a="http://schemas.openxmlformats.org/drawingml/2006/main"/>
         </p:blipFill>
         <p:spPr>
@@ -10305,7 +10305,7 @@
           <p:nvPr/>
         </p:nvPicPr>
         <p:blipFill>
-          <a:blip xmlns:r="http://schemas.openxmlformats.org/officeDocument/2006/relationships" xmlns:a="http://schemas.openxmlformats.org/drawingml/2006/main" r:embed="R3308d614823642f2"/>
+          <a:blip xmlns:r="http://schemas.openxmlformats.org/officeDocument/2006/relationships" xmlns:a="http://schemas.openxmlformats.org/drawingml/2006/main" r:embed="R0c0725e84dde4644"/>
           <a:stretch xmlns:a="http://schemas.openxmlformats.org/drawingml/2006/main"/>
         </p:blipFill>
         <p:spPr>
@@ -10327,7 +10327,7 @@
           <p:nvPr/>
         </p:nvPicPr>
         <p:blipFill>
-          <a:blip xmlns:r="http://schemas.openxmlformats.org/officeDocument/2006/relationships" xmlns:a="http://schemas.openxmlformats.org/drawingml/2006/main" r:embed="R7b53332ebe62491d"/>
+          <a:blip xmlns:r="http://schemas.openxmlformats.org/officeDocument/2006/relationships" xmlns:a="http://schemas.openxmlformats.org/drawingml/2006/main" r:embed="Rde5dc54bbf054dfb"/>
           <a:stretch xmlns:a="http://schemas.openxmlformats.org/drawingml/2006/main"/>
         </p:blipFill>
         <p:spPr>
@@ -11656,16 +11656,7 @@
               </a:rPr>
               <a:t>GitHub: github.com/JAKIIC/LabOps-Guard</a:t>
             </a:r>
-            <a:br>
-              <a:rPr sz="1575" b="1">
-                <a:solidFill>
-                  <a:srgbClr val="1D2342"/>
-                </a:solidFill>
-                <a:latin typeface="微软雅黑"/>
-                <a:ea typeface="微软雅黑"/>
-                <a:cs typeface="微软雅黑"/>
-              </a:rPr>
-            </a:br>
+            <a:br/>
             <a:r>
               <a:rPr sz="1575" b="1">
                 <a:solidFill>
@@ -11689,7 +11680,7 @@
           <p:nvPr/>
         </p:nvPicPr>
         <p:blipFill>
-          <a:blip xmlns:r="http://schemas.openxmlformats.org/officeDocument/2006/relationships" xmlns:a="http://schemas.openxmlformats.org/drawingml/2006/main" r:embed="R05278a1482fb46ac"/>
+          <a:blip xmlns:r="http://schemas.openxmlformats.org/officeDocument/2006/relationships" xmlns:a="http://schemas.openxmlformats.org/drawingml/2006/main" r:embed="R306bac6c3c5e4ca1"/>
           <a:stretch xmlns:a="http://schemas.openxmlformats.org/drawingml/2006/main"/>
         </p:blipFill>
         <p:spPr>

--- a/submission/LabOps-Guard-GOAI-复赛方案-v1.0-rc1.pptx
+++ b/submission/LabOps-Guard-GOAI-复赛方案-v1.0-rc1.pptx
@@ -2,31 +2,31 @@
 <file path=ppt/presentation.xml><?xml version="1.0" encoding="utf-8"?>
 <p:presentation xmlns:p="http://schemas.openxmlformats.org/presentationml/2006/main">
   <p:sldMasterIdLst>
-    <p:sldMasterId xmlns:r="http://schemas.openxmlformats.org/officeDocument/2006/relationships" id="2147483648" r:id="Rfbe7a2d88fc94aa8"/>
-    <p:sldMasterId xmlns:r="http://schemas.openxmlformats.org/officeDocument/2006/relationships" id="2147483650" r:id="R738311b2a74b4b23"/>
+    <p:sldMasterId xmlns:r="http://schemas.openxmlformats.org/officeDocument/2006/relationships" id="2147483648" r:id="R079439bb32594c77"/>
+    <p:sldMasterId xmlns:r="http://schemas.openxmlformats.org/officeDocument/2006/relationships" id="2147483650" r:id="Re57d578e5f354db2"/>
   </p:sldMasterIdLst>
   <p:notesMasterIdLst>
-    <p:notesMasterId xmlns:r="http://schemas.openxmlformats.org/officeDocument/2006/relationships" r:id="Rbd5f1a05a7404670"/>
+    <p:notesMasterId xmlns:r="http://schemas.openxmlformats.org/officeDocument/2006/relationships" r:id="Rd49612d7b8be41bd"/>
   </p:notesMasterIdLst>
   <p:sldIdLst>
-    <p:sldId xmlns:r="http://schemas.openxmlformats.org/officeDocument/2006/relationships" id="256" r:id="R9dbfea4a3616432e"/>
-    <p:sldId xmlns:r="http://schemas.openxmlformats.org/officeDocument/2006/relationships" id="257" r:id="R5a51a71141b04aff"/>
-    <p:sldId xmlns:r="http://schemas.openxmlformats.org/officeDocument/2006/relationships" id="258" r:id="R1642428288a7471c"/>
-    <p:sldId xmlns:r="http://schemas.openxmlformats.org/officeDocument/2006/relationships" id="259" r:id="Rbb68735aad624955"/>
-    <p:sldId xmlns:r="http://schemas.openxmlformats.org/officeDocument/2006/relationships" id="260" r:id="R353d58ebace546ce"/>
-    <p:sldId xmlns:r="http://schemas.openxmlformats.org/officeDocument/2006/relationships" id="261" r:id="Rb08bc56a2c8e429b"/>
-    <p:sldId xmlns:r="http://schemas.openxmlformats.org/officeDocument/2006/relationships" id="262" r:id="Refc2eaf75ce74679"/>
-    <p:sldId xmlns:r="http://schemas.openxmlformats.org/officeDocument/2006/relationships" id="263" r:id="R5e1bb1a71e2741c2"/>
-    <p:sldId xmlns:r="http://schemas.openxmlformats.org/officeDocument/2006/relationships" id="264" r:id="R91c6b7e251024dba"/>
-    <p:sldId xmlns:r="http://schemas.openxmlformats.org/officeDocument/2006/relationships" id="265" r:id="R42448e1f71c04bbd"/>
-    <p:sldId xmlns:r="http://schemas.openxmlformats.org/officeDocument/2006/relationships" id="266" r:id="Rb340bbf551554c5d"/>
-    <p:sldId xmlns:r="http://schemas.openxmlformats.org/officeDocument/2006/relationships" id="267" r:id="Rbe150bde4d56419e"/>
-    <p:sldId xmlns:r="http://schemas.openxmlformats.org/officeDocument/2006/relationships" id="268" r:id="Red9209395d5f40ef"/>
-    <p:sldId xmlns:r="http://schemas.openxmlformats.org/officeDocument/2006/relationships" id="269" r:id="Rcb92f37e41794505"/>
-    <p:sldId xmlns:r="http://schemas.openxmlformats.org/officeDocument/2006/relationships" id="270" r:id="Rdfc5e008e06b49c6"/>
-    <p:sldId xmlns:r="http://schemas.openxmlformats.org/officeDocument/2006/relationships" id="271" r:id="Ra2bdc0b22069439a"/>
-    <p:sldId xmlns:r="http://schemas.openxmlformats.org/officeDocument/2006/relationships" id="272" r:id="Raf4fb2145a294fce"/>
-    <p:sldId xmlns:r="http://schemas.openxmlformats.org/officeDocument/2006/relationships" id="273" r:id="R3b331ab111214a28"/>
+    <p:sldId xmlns:r="http://schemas.openxmlformats.org/officeDocument/2006/relationships" id="256" r:id="R9ad7365767884ec2"/>
+    <p:sldId xmlns:r="http://schemas.openxmlformats.org/officeDocument/2006/relationships" id="257" r:id="R00ea209adca24a0d"/>
+    <p:sldId xmlns:r="http://schemas.openxmlformats.org/officeDocument/2006/relationships" id="258" r:id="R7e2d6742e2bc4ea9"/>
+    <p:sldId xmlns:r="http://schemas.openxmlformats.org/officeDocument/2006/relationships" id="259" r:id="R64aecc8400de4910"/>
+    <p:sldId xmlns:r="http://schemas.openxmlformats.org/officeDocument/2006/relationships" id="260" r:id="R723907d912204b60"/>
+    <p:sldId xmlns:r="http://schemas.openxmlformats.org/officeDocument/2006/relationships" id="261" r:id="R23455ef404024121"/>
+    <p:sldId xmlns:r="http://schemas.openxmlformats.org/officeDocument/2006/relationships" id="262" r:id="Ra31fb39d0a074271"/>
+    <p:sldId xmlns:r="http://schemas.openxmlformats.org/officeDocument/2006/relationships" id="263" r:id="R5d405728e78147b7"/>
+    <p:sldId xmlns:r="http://schemas.openxmlformats.org/officeDocument/2006/relationships" id="264" r:id="R791aeb6d379a4cea"/>
+    <p:sldId xmlns:r="http://schemas.openxmlformats.org/officeDocument/2006/relationships" id="265" r:id="R41763e24c0c94fed"/>
+    <p:sldId xmlns:r="http://schemas.openxmlformats.org/officeDocument/2006/relationships" id="266" r:id="Rc9e4992cdc2842ee"/>
+    <p:sldId xmlns:r="http://schemas.openxmlformats.org/officeDocument/2006/relationships" id="267" r:id="R451c0e97be7242aa"/>
+    <p:sldId xmlns:r="http://schemas.openxmlformats.org/officeDocument/2006/relationships" id="268" r:id="R07b0b3ca7bdc4697"/>
+    <p:sldId xmlns:r="http://schemas.openxmlformats.org/officeDocument/2006/relationships" id="269" r:id="R6077b8c219634a7b"/>
+    <p:sldId xmlns:r="http://schemas.openxmlformats.org/officeDocument/2006/relationships" id="270" r:id="R008d4d7086424b3c"/>
+    <p:sldId xmlns:r="http://schemas.openxmlformats.org/officeDocument/2006/relationships" id="271" r:id="R9aa6031d37b24a45"/>
+    <p:sldId xmlns:r="http://schemas.openxmlformats.org/officeDocument/2006/relationships" id="272" r:id="Rc7d0c76f04834b14"/>
+    <p:sldId xmlns:r="http://schemas.openxmlformats.org/officeDocument/2006/relationships" id="273" r:id="Rb672eacd9d6648c7"/>
   </p:sldIdLst>
   <p:sldSz cx="12192000" cy="6858000"/>
   <p:notesSz cx="6858000" cy="9144000"/>
@@ -1873,7 +1873,7 @@
   </p:cSld>
   <p:clrMap bg1="lt1" tx1="dk1" bg2="lt2" tx2="dk2" accent1="accent1" accent2="accent2" accent3="accent3" accent4="accent4" accent5="accent5" accent6="accent6" hlink="hlink" folHlink="folHlink"/>
   <p:sldLayoutIdLst>
-    <p:sldLayoutId xmlns:r="http://schemas.openxmlformats.org/officeDocument/2006/relationships" id="2147483649" r:id="Rec4a10f54c5c4939"/>
+    <p:sldLayoutId xmlns:r="http://schemas.openxmlformats.org/officeDocument/2006/relationships" id="2147483649" r:id="Rb53dc6eeea1d4cb3"/>
   </p:sldLayoutIdLst>
   <p:hf sldNum="0" hdr="0" ftr="0" dt="0"/>
   <p:txStyles>
@@ -2156,7 +2156,7 @@
   </p:cSld>
   <p:clrMap bg1="lt1" tx1="dk1" bg2="lt2" tx2="dk2" accent1="accent1" accent2="accent2" accent3="accent3" accent4="accent4" accent5="accent5" accent6="accent6" hlink="hlink" folHlink="folHlink"/>
   <p:sldLayoutIdLst>
-    <p:sldLayoutId xmlns:r="http://schemas.openxmlformats.org/officeDocument/2006/relationships" id="2147483651" r:id="R69b61ae0f13249fa"/>
+    <p:sldLayoutId xmlns:r="http://schemas.openxmlformats.org/officeDocument/2006/relationships" id="2147483651" r:id="Rf59871814ab74cab"/>
   </p:sldLayoutIdLst>
   <p:hf sldNum="0" hdr="0" ftr="0" dt="0"/>
   <p:txStyles>
@@ -5770,7 +5770,7 @@
                 <a:ea typeface="微软雅黑"/>
                 <a:cs typeface="微软雅黑"/>
               </a:rPr>
-              <a:t>固定 checkpoint、验证集、metric、模型和协议后，三次结果仍为 71.875%。</a:t>
+              <a:t>固定 checkpoint、验证集、metric、模型和协议，三次结果均为 71.875%。</a:t>
             </a:r>
             <a:endParaRPr>
               <a:latin typeface="微软雅黑"/>
@@ -6632,7 +6632,7 @@
           <p:nvPr/>
         </p:nvPicPr>
         <p:blipFill>
-          <a:blip xmlns:r="http://schemas.openxmlformats.org/officeDocument/2006/relationships" xmlns:a="http://schemas.openxmlformats.org/drawingml/2006/main" r:embed="R76c0837e7ef64a79"/>
+          <a:blip xmlns:r="http://schemas.openxmlformats.org/officeDocument/2006/relationships" xmlns:a="http://schemas.openxmlformats.org/drawingml/2006/main" r:embed="Rb3192c6609984496"/>
           <a:stretch xmlns:a="http://schemas.openxmlformats.org/drawingml/2006/main"/>
         </p:blipFill>
         <p:spPr>
@@ -7664,7 +7664,7 @@
           <p:nvPr/>
         </p:nvPicPr>
         <p:blipFill>
-          <a:blip xmlns:r="http://schemas.openxmlformats.org/officeDocument/2006/relationships" xmlns:a="http://schemas.openxmlformats.org/drawingml/2006/main" r:embed="R64e0e5845e9a4de8"/>
+          <a:blip xmlns:r="http://schemas.openxmlformats.org/officeDocument/2006/relationships" xmlns:a="http://schemas.openxmlformats.org/drawingml/2006/main" r:embed="R5f314e0e9cba4ca6"/>
           <a:stretch xmlns:a="http://schemas.openxmlformats.org/drawingml/2006/main"/>
         </p:blipFill>
         <p:spPr>
@@ -10305,7 +10305,7 @@
           <p:nvPr/>
         </p:nvPicPr>
         <p:blipFill>
-          <a:blip xmlns:r="http://schemas.openxmlformats.org/officeDocument/2006/relationships" xmlns:a="http://schemas.openxmlformats.org/drawingml/2006/main" r:embed="R0c0725e84dde4644"/>
+          <a:blip xmlns:r="http://schemas.openxmlformats.org/officeDocument/2006/relationships" xmlns:a="http://schemas.openxmlformats.org/drawingml/2006/main" r:embed="R47c1346aa6a14d28"/>
           <a:stretch xmlns:a="http://schemas.openxmlformats.org/drawingml/2006/main"/>
         </p:blipFill>
         <p:spPr>
@@ -10327,7 +10327,7 @@
           <p:nvPr/>
         </p:nvPicPr>
         <p:blipFill>
-          <a:blip xmlns:r="http://schemas.openxmlformats.org/officeDocument/2006/relationships" xmlns:a="http://schemas.openxmlformats.org/drawingml/2006/main" r:embed="Rde5dc54bbf054dfb"/>
+          <a:blip xmlns:r="http://schemas.openxmlformats.org/officeDocument/2006/relationships" xmlns:a="http://schemas.openxmlformats.org/drawingml/2006/main" r:embed="R273781f896ad4e73"/>
           <a:stretch xmlns:a="http://schemas.openxmlformats.org/drawingml/2006/main"/>
         </p:blipFill>
         <p:spPr>
@@ -11680,7 +11680,7 @@
           <p:nvPr/>
         </p:nvPicPr>
         <p:blipFill>
-          <a:blip xmlns:r="http://schemas.openxmlformats.org/officeDocument/2006/relationships" xmlns:a="http://schemas.openxmlformats.org/drawingml/2006/main" r:embed="R306bac6c3c5e4ca1"/>
+          <a:blip xmlns:r="http://schemas.openxmlformats.org/officeDocument/2006/relationships" xmlns:a="http://schemas.openxmlformats.org/drawingml/2006/main" r:embed="R8fc44e573b014023"/>
           <a:stretch xmlns:a="http://schemas.openxmlformats.org/drawingml/2006/main"/>
         </p:blipFill>
         <p:spPr>
@@ -16374,7 +16374,7 @@
                 <a:ea typeface="微软雅黑"/>
                 <a:cs typeface="微软雅黑"/>
               </a:rPr>
-              <a:t>未授权 Agent 或 Registry 损坏时 fail closed；不新增 Agent 或 Skill。</a:t>
+              <a:t>未授权 Agent 或 Registry 损坏时 fail closed；不新增 Agent/Skill。</a:t>
             </a:r>
           </a:p>
         </p:txBody>

--- a/submission/LabOps-Guard-GOAI-复赛方案-v1.0-rc1.pptx
+++ b/submission/LabOps-Guard-GOAI-复赛方案-v1.0-rc1.pptx
@@ -2,31 +2,31 @@
 <file path=ppt/presentation.xml><?xml version="1.0" encoding="utf-8"?>
 <p:presentation xmlns:p="http://schemas.openxmlformats.org/presentationml/2006/main">
   <p:sldMasterIdLst>
-    <p:sldMasterId xmlns:r="http://schemas.openxmlformats.org/officeDocument/2006/relationships" id="2147483648" r:id="R079439bb32594c77"/>
-    <p:sldMasterId xmlns:r="http://schemas.openxmlformats.org/officeDocument/2006/relationships" id="2147483650" r:id="Re57d578e5f354db2"/>
+    <p:sldMasterId xmlns:r="http://schemas.openxmlformats.org/officeDocument/2006/relationships" id="2147483648" r:id="R359638d8ccc946e6"/>
+    <p:sldMasterId xmlns:r="http://schemas.openxmlformats.org/officeDocument/2006/relationships" id="2147483650" r:id="R3d5098fb0be34d06"/>
   </p:sldMasterIdLst>
   <p:notesMasterIdLst>
-    <p:notesMasterId xmlns:r="http://schemas.openxmlformats.org/officeDocument/2006/relationships" r:id="Rd49612d7b8be41bd"/>
+    <p:notesMasterId xmlns:r="http://schemas.openxmlformats.org/officeDocument/2006/relationships" r:id="R1b4ec6001caf43f8"/>
   </p:notesMasterIdLst>
   <p:sldIdLst>
-    <p:sldId xmlns:r="http://schemas.openxmlformats.org/officeDocument/2006/relationships" id="256" r:id="R9ad7365767884ec2"/>
-    <p:sldId xmlns:r="http://schemas.openxmlformats.org/officeDocument/2006/relationships" id="257" r:id="R00ea209adca24a0d"/>
-    <p:sldId xmlns:r="http://schemas.openxmlformats.org/officeDocument/2006/relationships" id="258" r:id="R7e2d6742e2bc4ea9"/>
-    <p:sldId xmlns:r="http://schemas.openxmlformats.org/officeDocument/2006/relationships" id="259" r:id="R64aecc8400de4910"/>
-    <p:sldId xmlns:r="http://schemas.openxmlformats.org/officeDocument/2006/relationships" id="260" r:id="R723907d912204b60"/>
-    <p:sldId xmlns:r="http://schemas.openxmlformats.org/officeDocument/2006/relationships" id="261" r:id="R23455ef404024121"/>
-    <p:sldId xmlns:r="http://schemas.openxmlformats.org/officeDocument/2006/relationships" id="262" r:id="Ra31fb39d0a074271"/>
-    <p:sldId xmlns:r="http://schemas.openxmlformats.org/officeDocument/2006/relationships" id="263" r:id="R5d405728e78147b7"/>
-    <p:sldId xmlns:r="http://schemas.openxmlformats.org/officeDocument/2006/relationships" id="264" r:id="R791aeb6d379a4cea"/>
-    <p:sldId xmlns:r="http://schemas.openxmlformats.org/officeDocument/2006/relationships" id="265" r:id="R41763e24c0c94fed"/>
-    <p:sldId xmlns:r="http://schemas.openxmlformats.org/officeDocument/2006/relationships" id="266" r:id="Rc9e4992cdc2842ee"/>
-    <p:sldId xmlns:r="http://schemas.openxmlformats.org/officeDocument/2006/relationships" id="267" r:id="R451c0e97be7242aa"/>
-    <p:sldId xmlns:r="http://schemas.openxmlformats.org/officeDocument/2006/relationships" id="268" r:id="R07b0b3ca7bdc4697"/>
-    <p:sldId xmlns:r="http://schemas.openxmlformats.org/officeDocument/2006/relationships" id="269" r:id="R6077b8c219634a7b"/>
-    <p:sldId xmlns:r="http://schemas.openxmlformats.org/officeDocument/2006/relationships" id="270" r:id="R008d4d7086424b3c"/>
-    <p:sldId xmlns:r="http://schemas.openxmlformats.org/officeDocument/2006/relationships" id="271" r:id="R9aa6031d37b24a45"/>
-    <p:sldId xmlns:r="http://schemas.openxmlformats.org/officeDocument/2006/relationships" id="272" r:id="Rc7d0c76f04834b14"/>
-    <p:sldId xmlns:r="http://schemas.openxmlformats.org/officeDocument/2006/relationships" id="273" r:id="Rb672eacd9d6648c7"/>
+    <p:sldId xmlns:r="http://schemas.openxmlformats.org/officeDocument/2006/relationships" id="256" r:id="Rd4bcb63e2f9b4b2b"/>
+    <p:sldId xmlns:r="http://schemas.openxmlformats.org/officeDocument/2006/relationships" id="257" r:id="Rd6cda0383d764169"/>
+    <p:sldId xmlns:r="http://schemas.openxmlformats.org/officeDocument/2006/relationships" id="258" r:id="R7174ae3dad354244"/>
+    <p:sldId xmlns:r="http://schemas.openxmlformats.org/officeDocument/2006/relationships" id="259" r:id="Rb1276729e7604e9b"/>
+    <p:sldId xmlns:r="http://schemas.openxmlformats.org/officeDocument/2006/relationships" id="260" r:id="R0655d05ea01546ec"/>
+    <p:sldId xmlns:r="http://schemas.openxmlformats.org/officeDocument/2006/relationships" id="261" r:id="R33741d50408a46d0"/>
+    <p:sldId xmlns:r="http://schemas.openxmlformats.org/officeDocument/2006/relationships" id="262" r:id="R13ad0f242ff6440f"/>
+    <p:sldId xmlns:r="http://schemas.openxmlformats.org/officeDocument/2006/relationships" id="263" r:id="R1a4a6ff024b04228"/>
+    <p:sldId xmlns:r="http://schemas.openxmlformats.org/officeDocument/2006/relationships" id="264" r:id="Rc2dadc82dd0f4337"/>
+    <p:sldId xmlns:r="http://schemas.openxmlformats.org/officeDocument/2006/relationships" id="265" r:id="R677b2b135dfa4d79"/>
+    <p:sldId xmlns:r="http://schemas.openxmlformats.org/officeDocument/2006/relationships" id="266" r:id="R5c6ee593a3fa44f0"/>
+    <p:sldId xmlns:r="http://schemas.openxmlformats.org/officeDocument/2006/relationships" id="267" r:id="Rc2a47a40a626474d"/>
+    <p:sldId xmlns:r="http://schemas.openxmlformats.org/officeDocument/2006/relationships" id="268" r:id="R9a4fff4e0afa4781"/>
+    <p:sldId xmlns:r="http://schemas.openxmlformats.org/officeDocument/2006/relationships" id="269" r:id="Rd8aaa84b04ec404a"/>
+    <p:sldId xmlns:r="http://schemas.openxmlformats.org/officeDocument/2006/relationships" id="270" r:id="R04dda8f29f0742cf"/>
+    <p:sldId xmlns:r="http://schemas.openxmlformats.org/officeDocument/2006/relationships" id="271" r:id="Rac386cb63a024bfa"/>
+    <p:sldId xmlns:r="http://schemas.openxmlformats.org/officeDocument/2006/relationships" id="272" r:id="R36232e551bb84f07"/>
+    <p:sldId xmlns:r="http://schemas.openxmlformats.org/officeDocument/2006/relationships" id="273" r:id="R173d992d9e7d41ae"/>
   </p:sldIdLst>
   <p:sldSz cx="12192000" cy="6858000"/>
   <p:notesSz cx="6858000" cy="9144000"/>
@@ -472,7 +472,13 @@
           </a:p>
           <a:p xmlns:a="http://schemas.openxmlformats.org/drawingml/2006/main">
             <a:r>
-              <a:t>- README.md; CURRENT_STATE.md</a:t>
+              <a:t>- README.md</a:t>
+            </a:r>
+            <a:endParaRPr/>
+          </a:p>
+          <a:p xmlns:a="http://schemas.openxmlformats.org/drawingml/2006/main">
+            <a:r>
+              <a:t>- CURRENT_STATE.md</a:t>
             </a:r>
             <a:endParaRPr/>
           </a:p>
@@ -549,7 +555,13 @@
           </a:p>
           <a:p xmlns:a="http://schemas.openxmlformats.org/drawingml/2006/main">
             <a:r>
-              <a:t>- docs/observability.md; demo/output-agentteams-at004/LABOPS-AT-004-EVAL-DRIFT-evidence-bundle.zip</a:t>
+              <a:t>- docs/observability.md</a:t>
+            </a:r>
+            <a:endParaRPr/>
+          </a:p>
+          <a:p xmlns:a="http://schemas.openxmlformats.org/drawingml/2006/main">
+            <a:r>
+              <a:t>- demo/output-agentteams-at004/LABOPS-AT-004-EVAL-DRIFT-evidence-bundle.zip</a:t>
             </a:r>
             <a:endParaRPr/>
           </a:p>
@@ -626,7 +638,19 @@
           </a:p>
           <a:p xmlns:a="http://schemas.openxmlformats.org/drawingml/2006/main">
             <a:r>
-              <a:t>- labops/dashboard.html; labops/web.py</a:t>
+              <a:t>- Real local screenshot of labops/dashboard.html and labops/web.py</a:t>
+            </a:r>
+            <a:endParaRPr/>
+          </a:p>
+          <a:p xmlns:a="http://schemas.openxmlformats.org/drawingml/2006/main">
+            <a:r>
+              <a:t>- AT-002 and AT-004 archived evidence</a:t>
+            </a:r>
+            <a:endParaRPr/>
+          </a:p>
+          <a:p xmlns:a="http://schemas.openxmlformats.org/drawingml/2006/main">
+            <a:r>
+              <a:t>- Dashboard is read-only; write methods return 405</a:t>
             </a:r>
             <a:endParaRPr/>
           </a:p>
@@ -703,7 +727,19 @@
           </a:p>
           <a:p xmlns:a="http://schemas.openxmlformats.org/drawingml/2006/main">
             <a:r>
-              <a:t>- docs/LABOPS-AT-004-DEMO.md; demo/output-agentteams-at004/evidence.json</a:t>
+              <a:t>- docs/security-model.md</a:t>
+            </a:r>
+            <a:endParaRPr/>
+          </a:p>
+          <a:p xmlns:a="http://schemas.openxmlformats.org/drawingml/2006/main">
+            <a:r>
+              <a:t>- demo/output-agentteams-at002/rollback_result.json</a:t>
+            </a:r>
+            <a:endParaRPr/>
+          </a:p>
+          <a:p xmlns:a="http://schemas.openxmlformats.org/drawingml/2006/main">
+            <a:r>
+              <a:t>- AT-002 uses an isolated adversarial fixture</a:t>
             </a:r>
             <a:endParaRPr/>
           </a:p>
@@ -780,7 +816,13 @@
           </a:p>
           <a:p xmlns:a="http://schemas.openxmlformats.org/drawingml/2006/main">
             <a:r>
-              <a:t>- docs/LABOPS-AT-004-DEMO.md; demo/output-agentteams-at004/verification.json</a:t>
+              <a:t>- docs/LABOPS-AT-004-DEMO.md</a:t>
+            </a:r>
+            <a:endParaRPr/>
+          </a:p>
+          <a:p xmlns:a="http://schemas.openxmlformats.org/drawingml/2006/main">
+            <a:r>
+              <a:t>- demo/output-agentteams-at004/verification.json</a:t>
             </a:r>
             <a:endParaRPr/>
           </a:p>
@@ -857,7 +899,13 @@
           </a:p>
           <a:p xmlns:a="http://schemas.openxmlformats.org/drawingml/2006/main">
             <a:r>
-              <a:t>- docs/security-model.md; demo/output-agentteams-at002/rollback_result.json</a:t>
+              <a:t>- agentteams_trace.jsonl inside the frozen AT-004 Evidence Bundle</a:t>
+            </a:r>
+            <a:endParaRPr/>
+          </a:p>
+          <a:p xmlns:a="http://schemas.openxmlformats.org/drawingml/2006/main">
+            <a:r>
+              <a:t>- Historical Trace proves role collaboration, not runtime skill_id telemetry</a:t>
             </a:r>
             <a:endParaRPr/>
           </a:p>
@@ -934,7 +982,13 @@
           </a:p>
           <a:p xmlns:a="http://schemas.openxmlformats.org/drawingml/2006/main">
             <a:r>
-              <a:t>- docs/trust-evaluation-report-v1.0.md; evaluation/results/trust-evaluation-suite-v1.json</a:t>
+              <a:t>- docs/trust-evaluation-report-v1.0.md</a:t>
+            </a:r>
+            <a:endParaRPr/>
+          </a:p>
+          <a:p xmlns:a="http://schemas.openxmlformats.org/drawingml/2006/main">
+            <a:r>
+              <a:t>- evaluation/results/trust-evaluation-suite-v1.json</a:t>
             </a:r>
             <a:endParaRPr/>
           </a:p>
@@ -1011,7 +1065,25 @@
           </a:p>
           <a:p xmlns:a="http://schemas.openxmlformats.org/drawingml/2006/main">
             <a:r>
-              <a:t>- LICENSE; docs/compliance/runner-license-review.md; docs/compliance/runner-sbom.json</a:t>
+              <a:t>- Fresh Phase 9 Task 3 verification on 2026-08-26</a:t>
+            </a:r>
+            <a:endParaRPr/>
+          </a:p>
+          <a:p xmlns:a="http://schemas.openxmlformats.org/drawingml/2006/main">
+            <a:r>
+              <a:t>- .github/workflows/test.yml</a:t>
+            </a:r>
+            <a:endParaRPr/>
+          </a:p>
+          <a:p xmlns:a="http://schemas.openxmlformats.org/drawingml/2006/main">
+            <a:r>
+              <a:t>- .github/workflows/pages-public-demo.yml</a:t>
+            </a:r>
+            <a:endParaRPr/>
+          </a:p>
+          <a:p xmlns:a="http://schemas.openxmlformats.org/drawingml/2006/main">
+            <a:r>
+              <a:t>- scripts/verify_evidence.py</a:t>
             </a:r>
             <a:endParaRPr/>
           </a:p>
@@ -1087,7 +1159,27 @@
           </a:p>
           <a:p xmlns:a="http://schemas.openxmlformats.org/drawingml/2006/main">
             <a:r>
-              <a:t>- KNOWN_LIMITATIONS.md; docs/competition-mapping.md</a:t>
+              <a:t>- LICENSE</a:t>
+            </a:r>
+          </a:p>
+          <a:p xmlns:a="http://schemas.openxmlformats.org/drawingml/2006/main">
+            <a:r>
+              <a:t>- NOTICE</a:t>
+            </a:r>
+          </a:p>
+          <a:p xmlns:a="http://schemas.openxmlformats.org/drawingml/2006/main">
+            <a:r>
+              <a:t>- KNOWN_LIMITATIONS.md</a:t>
+            </a:r>
+          </a:p>
+          <a:p xmlns:a="http://schemas.openxmlformats.org/drawingml/2006/main">
+            <a:r>
+              <a:t>- docs/compliance/runner-sbom.json</a:t>
+            </a:r>
+          </a:p>
+          <a:p xmlns:a="http://schemas.openxmlformats.org/drawingml/2006/main">
+            <a:r>
+              <a:t>- docs/compliance/runner-license-review.md</a:t>
             </a:r>
           </a:p>
         </p:txBody>
@@ -1163,7 +1255,25 @@
           </a:p>
           <a:p xmlns:a="http://schemas.openxmlformats.org/drawingml/2006/main">
             <a:r>
-              <a:t>- README.md; docs/trust-evaluation-report-v1.0.md</a:t>
+              <a:t>- README.md</a:t>
+            </a:r>
+            <a:endParaRPr/>
+          </a:p>
+          <a:p xmlns:a="http://schemas.openxmlformats.org/drawingml/2006/main">
+            <a:r>
+              <a:t>- https://github.com/JAKIIC/LabOps-Guard</a:t>
+            </a:r>
+            <a:endParaRPr/>
+          </a:p>
+          <a:p xmlns:a="http://schemas.openxmlformats.org/drawingml/2006/main">
+            <a:r>
+              <a:t>- https://jakiic.github.io/LabOps-Guard/</a:t>
+            </a:r>
+            <a:endParaRPr/>
+          </a:p>
+          <a:p xmlns:a="http://schemas.openxmlformats.org/drawingml/2006/main">
+            <a:r>
+              <a:t>- Authentic QR assets retained from the source deck</a:t>
             </a:r>
             <a:endParaRPr/>
           </a:p>
@@ -1240,7 +1350,13 @@
           </a:p>
           <a:p xmlns:a="http://schemas.openxmlformats.org/drawingml/2006/main">
             <a:r>
-              <a:t>- docs/security-model.md; docs/competition-mapping.md</a:t>
+              <a:t>- docs/security-model.md</a:t>
+            </a:r>
+            <a:endParaRPr/>
+          </a:p>
+          <a:p xmlns:a="http://schemas.openxmlformats.org/drawingml/2006/main">
+            <a:r>
+              <a:t>- docs/competition-mapping.md</a:t>
             </a:r>
             <a:endParaRPr/>
           </a:p>
@@ -1316,7 +1432,17 @@
           </a:p>
           <a:p xmlns:a="http://schemas.openxmlformats.org/drawingml/2006/main">
             <a:r>
-              <a:t>- README.md; KNOWN_LIMITATIONS.md</a:t>
+              <a:t>- README.md</a:t>
+            </a:r>
+          </a:p>
+          <a:p xmlns:a="http://schemas.openxmlformats.org/drawingml/2006/main">
+            <a:r>
+              <a:t>- KNOWN_LIMITATIONS.md</a:t>
+            </a:r>
+          </a:p>
+          <a:p xmlns:a="http://schemas.openxmlformats.org/drawingml/2006/main">
+            <a:r>
+              <a:t>- docs/competition-mapping.md</a:t>
             </a:r>
           </a:p>
         </p:txBody>
@@ -1392,7 +1518,19 @@
           </a:p>
           <a:p xmlns:a="http://schemas.openxmlformats.org/drawingml/2006/main">
             <a:r>
-              <a:t>- agentteams/trust_contract_v1.json; README.md</a:t>
+              <a:t>- agentteams/trust_contract_v1.json</a:t>
+            </a:r>
+            <a:endParaRPr/>
+          </a:p>
+          <a:p xmlns:a="http://schemas.openxmlformats.org/drawingml/2006/main">
+            <a:r>
+              <a:t>- README.md</a:t>
+            </a:r>
+            <a:endParaRPr/>
+          </a:p>
+          <a:p xmlns:a="http://schemas.openxmlformats.org/drawingml/2006/main">
+            <a:r>
+              <a:t>- labops/web.py</a:t>
             </a:r>
             <a:endParaRPr/>
           </a:p>
@@ -1469,7 +1607,19 @@
           </a:p>
           <a:p xmlns:a="http://schemas.openxmlformats.org/drawingml/2006/main">
             <a:r>
-              <a:t>- agentteams/agent_identities_v2.json; docs/agent-identity-matrix.md</a:t>
+              <a:t>- agentteams/agent_identities_v2.json</a:t>
+            </a:r>
+            <a:endParaRPr/>
+          </a:p>
+          <a:p xmlns:a="http://schemas.openxmlformats.org/drawingml/2006/main">
+            <a:r>
+              <a:t>- docs/agent-identity-matrix.md</a:t>
+            </a:r>
+            <a:endParaRPr/>
+          </a:p>
+          <a:p xmlns:a="http://schemas.openxmlformats.org/drawingml/2006/main">
+            <a:r>
+              <a:t>- AT-004 agentteams_trace.jsonl</a:t>
             </a:r>
             <a:endParaRPr/>
           </a:p>
@@ -1546,7 +1696,19 @@
           </a:p>
           <a:p xmlns:a="http://schemas.openxmlformats.org/drawingml/2006/main">
             <a:r>
-              <a:t>- skills/registry.json; docs/skill-integration-matrix.md</a:t>
+              <a:t>- skills/registry.json</a:t>
+            </a:r>
+            <a:endParaRPr/>
+          </a:p>
+          <a:p xmlns:a="http://schemas.openxmlformats.org/drawingml/2006/main">
+            <a:r>
+              <a:t>- docs/skill-framework.md</a:t>
+            </a:r>
+            <a:endParaRPr/>
+          </a:p>
+          <a:p xmlns:a="http://schemas.openxmlformats.org/drawingml/2006/main">
+            <a:r>
+              <a:t>- seven skills/*/SKILL.md</a:t>
             </a:r>
             <a:endParaRPr/>
           </a:p>
@@ -1623,7 +1785,19 @@
           </a:p>
           <a:p xmlns:a="http://schemas.openxmlformats.org/drawingml/2006/main">
             <a:r>
-              <a:t>- agentteams/state_machine_v3.json; agentteams/trust_contract_v1.json</a:t>
+              <a:t>- docs/skill-framework.md</a:t>
+            </a:r>
+            <a:endParaRPr/>
+          </a:p>
+          <a:p xmlns:a="http://schemas.openxmlformats.org/drawingml/2006/main">
+            <a:r>
+              <a:t>- skills/control-lab-action/SKILL.md</a:t>
+            </a:r>
+            <a:endParaRPr/>
+          </a:p>
+          <a:p xmlns:a="http://schemas.openxmlformats.org/drawingml/2006/main">
+            <a:r>
+              <a:t>- skills/control-lab-action/references/io-schema.json</a:t>
             </a:r>
             <a:endParaRPr/>
           </a:p>
@@ -1700,7 +1874,19 @@
           </a:p>
           <a:p xmlns:a="http://schemas.openxmlformats.org/drawingml/2006/main">
             <a:r>
-              <a:t>- schemas/tool_contract.schema.json; labops/runner_gateway.py</a:t>
+              <a:t>- schemas/tool_contract.schema.json</a:t>
+            </a:r>
+            <a:endParaRPr/>
+          </a:p>
+          <a:p xmlns:a="http://schemas.openxmlformats.org/drawingml/2006/main">
+            <a:r>
+              <a:t>- labops/runner_gateway.py</a:t>
+            </a:r>
+            <a:endParaRPr/>
+          </a:p>
+          <a:p xmlns:a="http://schemas.openxmlformats.org/drawingml/2006/main">
+            <a:r>
+              <a:t>- runner/Dockerfile</a:t>
             </a:r>
             <a:endParaRPr/>
           </a:p>
@@ -1777,7 +1963,13 @@
           </a:p>
           <a:p xmlns:a="http://schemas.openxmlformats.org/drawingml/2006/main">
             <a:r>
-              <a:t>- docs/agent-identity-matrix.md; demo/output-agentteams-at004/verification.json</a:t>
+              <a:t>- docs/agent-identity-matrix.md</a:t>
+            </a:r>
+            <a:endParaRPr/>
+          </a:p>
+          <a:p xmlns:a="http://schemas.openxmlformats.org/drawingml/2006/main">
+            <a:r>
+              <a:t>- demo/output-agentteams-at004/verification.json</a:t>
             </a:r>
             <a:endParaRPr/>
           </a:p>
@@ -1873,7 +2065,7 @@
   </p:cSld>
   <p:clrMap bg1="lt1" tx1="dk1" bg2="lt2" tx2="dk2" accent1="accent1" accent2="accent2" accent3="accent3" accent4="accent4" accent5="accent5" accent6="accent6" hlink="hlink" folHlink="folHlink"/>
   <p:sldLayoutIdLst>
-    <p:sldLayoutId xmlns:r="http://schemas.openxmlformats.org/officeDocument/2006/relationships" id="2147483649" r:id="Rb53dc6eeea1d4cb3"/>
+    <p:sldLayoutId xmlns:r="http://schemas.openxmlformats.org/officeDocument/2006/relationships" id="2147483649" r:id="R522fb3dfc567408a"/>
   </p:sldLayoutIdLst>
   <p:hf sldNum="0" hdr="0" ftr="0" dt="0"/>
   <p:txStyles>
@@ -2156,7 +2348,7 @@
   </p:cSld>
   <p:clrMap bg1="lt1" tx1="dk1" bg2="lt2" tx2="dk2" accent1="accent1" accent2="accent2" accent3="accent3" accent4="accent4" accent5="accent5" accent6="accent6" hlink="hlink" folHlink="folHlink"/>
   <p:sldLayoutIdLst>
-    <p:sldLayoutId xmlns:r="http://schemas.openxmlformats.org/officeDocument/2006/relationships" id="2147483651" r:id="Rf59871814ab74cab"/>
+    <p:sldLayoutId xmlns:r="http://schemas.openxmlformats.org/officeDocument/2006/relationships" id="2147483651" r:id="R1bc643f8df824f87"/>
   </p:sldLayoutIdLst>
   <p:hf sldNum="0" hdr="0" ftr="0" dt="0"/>
   <p:txStyles>
@@ -3028,7 +3220,7 @@
                 <a:ea typeface="微软雅黑"/>
                 <a:cs typeface="微软雅黑"/>
               </a:rPr>
-              <a:t>LabOps Guard</a:t>
+              <a:t>LabOps-Guard</a:t>
             </a:r>
             <a:endParaRPr sz="4600"/>
           </a:p>
@@ -3048,7 +3240,7 @@
                 <a:ea typeface="微软雅黑"/>
                 <a:cs typeface="微软雅黑"/>
               </a:rPr>
-              <a:t>可信 Agent 执行与治理基座</a:t>
+              <a:t>可信 Agent 执行与治理基础设施</a:t>
             </a:r>
             <a:endParaRPr sz="4600"/>
           </a:p>
@@ -3323,7 +3515,7 @@
                 <a:ea typeface="微软雅黑"/>
                 <a:cs typeface="微软雅黑"/>
               </a:rPr>
-              <a:t>05 · Trace 与 Evidence</a:t>
+              <a:t>07 · Trace / Evidence / Audit</a:t>
             </a:r>
             <a:endParaRPr sz="1200"/>
           </a:p>
@@ -4333,7 +4525,7 @@
                 <a:ea typeface="微软雅黑"/>
                 <a:cs typeface="微软雅黑"/>
               </a:rPr>
-              <a:t>06 · Trust Dashboard</a:t>
+              <a:t>08 · Trust Dashboard · REAL UI</a:t>
             </a:r>
             <a:endParaRPr sz="1200"/>
           </a:p>
@@ -4379,7 +4571,7 @@
                 <a:ea typeface="微软雅黑"/>
                 <a:cs typeface="微软雅黑"/>
               </a:rPr>
-              <a:t>五段证据链，只读展示</a:t>
+              <a:t>真实只读 Dashboard：五段证据链</a:t>
             </a:r>
             <a:endParaRPr sz="2900"/>
           </a:p>
@@ -4387,1232 +4579,77 @@
       </p:sp>
       <p:sp>
         <p:nvSpPr>
-          <p:cNvPr id="5" name="Shape 3">
-            <a:extLst xmlns:a="http://schemas.openxmlformats.org/drawingml/2006/main">
-              <a:ext uri="{FF2B5EF4-FFF2-40B4-BE49-F238E27FC236}">
-                <a16:creationId xmlns:a16="http://schemas.microsoft.com/office/drawing/2014/main" id="{4F399241-D630-4CD8-99FE-05D17071AA20}"/>
-              </a:ext>
-            </a:extLst>
-          </p:cNvPr>
-          <p:cNvSpPr>
-            <a:spLocks xmlns:a="http://schemas.openxmlformats.org/drawingml/2006/main" noGrp="1"/>
-          </p:cNvSpPr>
-          <p:nvPr/>
-        </p:nvSpPr>
-        <p:spPr>
-          <a:xfrm xmlns:a="http://schemas.openxmlformats.org/drawingml/2006/main">
-            <a:off x="594360" y="1965960"/>
-            <a:ext cx="3484778" cy="1554480"/>
+          <p:cNvPr id="35" name="Text 33">
+            <a:extLst xmlns:a="http://schemas.openxmlformats.org/drawingml/2006/main">
+              <a:ext uri="{FF2B5EF4-FFF2-40B4-BE49-F238E27FC236}">
+                <a16:creationId xmlns:a16="http://schemas.microsoft.com/office/drawing/2014/main" id="{28796978-B7CB-4EBE-B02B-27B861D4DED2}"/>
+              </a:ext>
+            </a:extLst>
+          </p:cNvPr>
+          <p:cNvSpPr>
+            <a:spLocks xmlns:a="http://schemas.openxmlformats.org/drawingml/2006/main" noGrp="1"/>
+          </p:cNvSpPr>
+          <p:nvPr/>
+        </p:nvSpPr>
+        <p:spPr>
+          <a:xfrm xmlns:a="http://schemas.openxmlformats.org/drawingml/2006/main">
+            <a:off x="11277295" y="6400800"/>
+            <a:ext cx="548640" cy="274320"/>
+          </a:xfrm>
+          <a:prstGeom xmlns:a="http://schemas.openxmlformats.org/drawingml/2006/main" prst="rect">
+            <a:avLst/>
+          </a:prstGeom>
+          <a:noFill xmlns:a="http://schemas.openxmlformats.org/drawingml/2006/main"/>
+        </p:spPr>
+        <p:txBody>
+          <a:bodyPr xmlns:a="http://schemas.openxmlformats.org/drawingml/2006/main" wrap="square" lIns="0" tIns="0" rIns="0" bIns="0" anchor="ctr"/>
+          <a:lstStyle xmlns:a="http://schemas.openxmlformats.org/drawingml/2006/main"/>
+          <a:p xmlns:a="http://schemas.openxmlformats.org/drawingml/2006/main">
+            <a:pPr marL="0" indent="0" algn="r">
+              <a:buNone/>
+            </a:pPr>
+            <a:r>
+              <a:rPr sz="1000">
+                <a:solidFill>
+                  <a:srgbClr val="6B7280"/>
+                </a:solidFill>
+                <a:latin typeface="微软雅黑"/>
+                <a:ea typeface="微软雅黑"/>
+                <a:cs typeface="微软雅黑"/>
+              </a:rPr>
+              <a:t>11</a:t>
+            </a:r>
+            <a:endParaRPr sz="1000"/>
+          </a:p>
+        </p:txBody>
+      </p:sp>
+      <p:pic>
+        <p:nvPicPr>
+          <p:cNvPr id="40" name=""/>
+          <p:cNvPicPr>
+            <a:picLocks xmlns:a="http://schemas.openxmlformats.org/drawingml/2006/main" noChangeAspect="1"/>
+          </p:cNvPicPr>
+          <p:nvPr/>
+        </p:nvPicPr>
+        <p:blipFill>
+          <a:blip xmlns:r="http://schemas.openxmlformats.org/officeDocument/2006/relationships" xmlns:a="http://schemas.openxmlformats.org/drawingml/2006/main" r:embed="Re764040ebaee470b"/>
+          <a:srcRect xmlns:a="http://schemas.openxmlformats.org/drawingml/2006/main" l="0" t="11709" r="0" b="11709"/>
+          <a:stretch xmlns:a="http://schemas.openxmlformats.org/drawingml/2006/main">
+            <a:fillRect l="0" t="0" r="0" b="0"/>
+          </a:stretch>
+        </p:blipFill>
+        <p:spPr>
+          <a:xfrm xmlns:a="http://schemas.openxmlformats.org/drawingml/2006/main">
+            <a:off x="571500" y="1428750"/>
+            <a:ext cx="11049000" cy="4762500"/>
           </a:xfrm>
           <a:prstGeom xmlns:a="http://schemas.openxmlformats.org/drawingml/2006/main" prst="roundRect">
             <a:avLst>
-              <a:gd name="adj" fmla="val 4706"/>
+              <a:gd name="adj" fmla="val 2400"/>
             </a:avLst>
           </a:prstGeom>
-          <a:solidFill xmlns:a="http://schemas.openxmlformats.org/drawingml/2006/main">
-            <a:srgbClr val="E9EEFB"/>
-          </a:solidFill>
-        </p:spPr>
-      </p:sp>
-      <p:sp>
-        <p:nvSpPr>
-          <p:cNvPr id="6" name="Shape 4">
-            <a:extLst xmlns:a="http://schemas.openxmlformats.org/drawingml/2006/main">
-              <a:ext uri="{FF2B5EF4-FFF2-40B4-BE49-F238E27FC236}">
-                <a16:creationId xmlns:a16="http://schemas.microsoft.com/office/drawing/2014/main" id="{01B3707B-C11E-4632-BB54-2CA0F0A567BE}"/>
-              </a:ext>
-            </a:extLst>
-          </p:cNvPr>
-          <p:cNvSpPr>
-            <a:spLocks xmlns:a="http://schemas.openxmlformats.org/drawingml/2006/main" noGrp="1"/>
-          </p:cNvSpPr>
-          <p:nvPr/>
-        </p:nvSpPr>
-        <p:spPr>
-          <a:xfrm xmlns:a="http://schemas.openxmlformats.org/drawingml/2006/main">
-            <a:off x="850392" y="2221992"/>
-            <a:ext cx="146304" cy="146304"/>
-          </a:xfrm>
-          <a:prstGeom xmlns:a="http://schemas.openxmlformats.org/drawingml/2006/main" prst="ellipse">
-            <a:avLst/>
-          </a:prstGeom>
-          <a:solidFill xmlns:a="http://schemas.openxmlformats.org/drawingml/2006/main">
-            <a:srgbClr val="FF6B35"/>
-          </a:solidFill>
-        </p:spPr>
-      </p:sp>
-      <p:sp>
-        <p:nvSpPr>
-          <p:cNvPr id="7" name="Text 5">
-            <a:extLst xmlns:a="http://schemas.openxmlformats.org/drawingml/2006/main">
-              <a:ext uri="{FF2B5EF4-FFF2-40B4-BE49-F238E27FC236}">
-                <a16:creationId xmlns:a16="http://schemas.microsoft.com/office/drawing/2014/main" id="{0D24C80E-BB5A-4296-87CB-9183F07483B5}"/>
-              </a:ext>
-            </a:extLst>
-          </p:cNvPr>
-          <p:cNvSpPr>
-            <a:spLocks xmlns:a="http://schemas.openxmlformats.org/drawingml/2006/main" noGrp="1"/>
-          </p:cNvSpPr>
-          <p:nvPr/>
-        </p:nvSpPr>
-        <p:spPr>
-          <a:xfrm xmlns:a="http://schemas.openxmlformats.org/drawingml/2006/main">
-            <a:off x="1097280" y="2130552"/>
-            <a:ext cx="2798978" cy="329184"/>
-          </a:xfrm>
-          <a:prstGeom xmlns:a="http://schemas.openxmlformats.org/drawingml/2006/main" prst="rect">
-            <a:avLst/>
-          </a:prstGeom>
-          <a:noFill xmlns:a="http://schemas.openxmlformats.org/drawingml/2006/main"/>
-        </p:spPr>
-        <p:txBody>
-          <a:bodyPr xmlns:a="http://schemas.openxmlformats.org/drawingml/2006/main" wrap="square" lIns="0" tIns="0" rIns="0" bIns="0" anchor="ctr"/>
-          <a:lstStyle xmlns:a="http://schemas.openxmlformats.org/drawingml/2006/main"/>
-          <a:p xmlns:a="http://schemas.openxmlformats.org/drawingml/2006/main">
-            <a:pPr marL="0" indent="0">
-              <a:buNone/>
-            </a:pPr>
-            <a:r>
-              <a:rPr sz="1500" b="1">
-                <a:solidFill>
-                  <a:srgbClr val="1B1F3B"/>
-                </a:solidFill>
-                <a:latin typeface="微软雅黑"/>
-                <a:ea typeface="微软雅黑"/>
-                <a:cs typeface="微软雅黑"/>
-              </a:rPr>
-              <a:t>Identity</a:t>
-            </a:r>
-            <a:endParaRPr sz="1500"/>
-          </a:p>
-        </p:txBody>
-      </p:sp>
-      <p:sp>
-        <p:nvSpPr>
-          <p:cNvPr id="8" name="Text 6">
-            <a:extLst xmlns:a="http://schemas.openxmlformats.org/drawingml/2006/main">
-              <a:ext uri="{FF2B5EF4-FFF2-40B4-BE49-F238E27FC236}">
-                <a16:creationId xmlns:a16="http://schemas.microsoft.com/office/drawing/2014/main" id="{7690A0E7-77E7-415C-BC61-D10593D6E4F1}"/>
-              </a:ext>
-            </a:extLst>
-          </p:cNvPr>
-          <p:cNvSpPr>
-            <a:spLocks xmlns:a="http://schemas.openxmlformats.org/drawingml/2006/main" noGrp="1"/>
-          </p:cNvSpPr>
-          <p:nvPr/>
-        </p:nvSpPr>
-        <p:spPr>
-          <a:xfrm xmlns:a="http://schemas.openxmlformats.org/drawingml/2006/main">
-            <a:off x="850392" y="2514600"/>
-            <a:ext cx="3027578" cy="548640"/>
-          </a:xfrm>
-          <a:prstGeom xmlns:a="http://schemas.openxmlformats.org/drawingml/2006/main" prst="rect">
-            <a:avLst/>
-          </a:prstGeom>
-          <a:noFill xmlns:a="http://schemas.openxmlformats.org/drawingml/2006/main"/>
-        </p:spPr>
-        <p:txBody>
-          <a:bodyPr xmlns:a="http://schemas.openxmlformats.org/drawingml/2006/main" wrap="square" lIns="0" tIns="0" rIns="0" bIns="0" anchor="t"/>
-          <a:lstStyle xmlns:a="http://schemas.openxmlformats.org/drawingml/2006/main"/>
-          <a:p xmlns:a="http://schemas.openxmlformats.org/drawingml/2006/main">
-            <a:pPr marL="0" indent="0">
-              <a:lnSpc>
-                <a:spcPct val="115000"/>
-              </a:lnSpc>
-              <a:buNone/>
-            </a:pPr>
-            <a:r>
-              <a:rPr sz="1100">
-                <a:solidFill>
-                  <a:srgbClr val="6B7280"/>
-                </a:solidFill>
-                <a:latin typeface="微软雅黑"/>
-                <a:ea typeface="微软雅黑"/>
-                <a:cs typeface="微软雅黑"/>
-              </a:rPr>
-              <a:t>6 roles</a:t>
-            </a:r>
-            <a:endParaRPr sz="1100"/>
-          </a:p>
-        </p:txBody>
-      </p:sp>
-      <p:sp>
-        <p:nvSpPr>
-          <p:cNvPr id="9" name="Text 7">
-            <a:extLst xmlns:a="http://schemas.openxmlformats.org/drawingml/2006/main">
-              <a:ext uri="{FF2B5EF4-FFF2-40B4-BE49-F238E27FC236}">
-                <a16:creationId xmlns:a16="http://schemas.microsoft.com/office/drawing/2014/main" id="{ECCB1007-F91C-4C57-90BF-0018046F84DC}"/>
-              </a:ext>
-            </a:extLst>
-          </p:cNvPr>
-          <p:cNvSpPr>
-            <a:spLocks xmlns:a="http://schemas.openxmlformats.org/drawingml/2006/main" noGrp="1"/>
-          </p:cNvSpPr>
-          <p:nvPr/>
-        </p:nvSpPr>
-        <p:spPr>
-          <a:xfrm xmlns:a="http://schemas.openxmlformats.org/drawingml/2006/main">
-            <a:off x="850392" y="3063240"/>
-            <a:ext cx="3027578" cy="347472"/>
-          </a:xfrm>
-          <a:prstGeom xmlns:a="http://schemas.openxmlformats.org/drawingml/2006/main" prst="rect">
-            <a:avLst/>
-          </a:prstGeom>
-          <a:noFill xmlns:a="http://schemas.openxmlformats.org/drawingml/2006/main"/>
-        </p:spPr>
-        <p:txBody>
-          <a:bodyPr xmlns:a="http://schemas.openxmlformats.org/drawingml/2006/main" wrap="square" lIns="0" tIns="0" rIns="0" bIns="0" anchor="ctr"/>
-          <a:lstStyle xmlns:a="http://schemas.openxmlformats.org/drawingml/2006/main"/>
-          <a:p xmlns:a="http://schemas.openxmlformats.org/drawingml/2006/main">
-            <a:pPr marL="0" indent="0">
-              <a:buNone/>
-            </a:pPr>
-            <a:r>
-              <a:rPr sz="1050" i="1">
-                <a:solidFill>
-                  <a:srgbClr val="9AA1B8"/>
-                </a:solidFill>
-                <a:latin typeface="微软雅黑"/>
-                <a:ea typeface="微软雅黑"/>
-                <a:cs typeface="微软雅黑"/>
-              </a:rPr>
-              <a:t>身份与权限边界</a:t>
-            </a:r>
-            <a:endParaRPr sz="1050"/>
-          </a:p>
-        </p:txBody>
-      </p:sp>
-      <p:sp>
-        <p:nvSpPr>
-          <p:cNvPr id="10" name="Shape 8">
-            <a:extLst xmlns:a="http://schemas.openxmlformats.org/drawingml/2006/main">
-              <a:ext uri="{FF2B5EF4-FFF2-40B4-BE49-F238E27FC236}">
-                <a16:creationId xmlns:a16="http://schemas.microsoft.com/office/drawing/2014/main" id="{8ABAB656-6A19-477D-BE39-D8EC76CEB9DC}"/>
-              </a:ext>
-            </a:extLst>
-          </p:cNvPr>
-          <p:cNvSpPr>
-            <a:spLocks xmlns:a="http://schemas.openxmlformats.org/drawingml/2006/main" noGrp="1"/>
-          </p:cNvSpPr>
-          <p:nvPr/>
-        </p:nvSpPr>
-        <p:spPr>
-          <a:xfrm xmlns:a="http://schemas.openxmlformats.org/drawingml/2006/main">
-            <a:off x="4353458" y="1965960"/>
-            <a:ext cx="3484778" cy="1554480"/>
-          </a:xfrm>
-          <a:prstGeom xmlns:a="http://schemas.openxmlformats.org/drawingml/2006/main" prst="roundRect">
-            <a:avLst>
-              <a:gd name="adj" fmla="val 4706"/>
-            </a:avLst>
-          </a:prstGeom>
-          <a:solidFill xmlns:a="http://schemas.openxmlformats.org/drawingml/2006/main">
-            <a:srgbClr val="E9EEFB"/>
-          </a:solidFill>
-        </p:spPr>
-      </p:sp>
-      <p:sp>
-        <p:nvSpPr>
-          <p:cNvPr id="11" name="Shape 9">
-            <a:extLst xmlns:a="http://schemas.openxmlformats.org/drawingml/2006/main">
-              <a:ext uri="{FF2B5EF4-FFF2-40B4-BE49-F238E27FC236}">
-                <a16:creationId xmlns:a16="http://schemas.microsoft.com/office/drawing/2014/main" id="{A0DF84EA-5668-47CD-ABB7-1D163065BC56}"/>
-              </a:ext>
-            </a:extLst>
-          </p:cNvPr>
-          <p:cNvSpPr>
-            <a:spLocks xmlns:a="http://schemas.openxmlformats.org/drawingml/2006/main" noGrp="1"/>
-          </p:cNvSpPr>
-          <p:nvPr/>
-        </p:nvSpPr>
-        <p:spPr>
-          <a:xfrm xmlns:a="http://schemas.openxmlformats.org/drawingml/2006/main">
-            <a:off x="4609490" y="2221992"/>
-            <a:ext cx="146304" cy="146304"/>
-          </a:xfrm>
-          <a:prstGeom xmlns:a="http://schemas.openxmlformats.org/drawingml/2006/main" prst="ellipse">
-            <a:avLst/>
-          </a:prstGeom>
-          <a:solidFill xmlns:a="http://schemas.openxmlformats.org/drawingml/2006/main">
-            <a:srgbClr val="FF6B35"/>
-          </a:solidFill>
-        </p:spPr>
-      </p:sp>
-      <p:sp>
-        <p:nvSpPr>
-          <p:cNvPr id="12" name="Text 10">
-            <a:extLst xmlns:a="http://schemas.openxmlformats.org/drawingml/2006/main">
-              <a:ext uri="{FF2B5EF4-FFF2-40B4-BE49-F238E27FC236}">
-                <a16:creationId xmlns:a16="http://schemas.microsoft.com/office/drawing/2014/main" id="{CF775768-535D-4EF1-8C98-999CBAAF16BA}"/>
-              </a:ext>
-            </a:extLst>
-          </p:cNvPr>
-          <p:cNvSpPr>
-            <a:spLocks xmlns:a="http://schemas.openxmlformats.org/drawingml/2006/main" noGrp="1"/>
-          </p:cNvSpPr>
-          <p:nvPr/>
-        </p:nvSpPr>
-        <p:spPr>
-          <a:xfrm xmlns:a="http://schemas.openxmlformats.org/drawingml/2006/main">
-            <a:off x="4856378" y="2130552"/>
-            <a:ext cx="2798978" cy="329184"/>
-          </a:xfrm>
-          <a:prstGeom xmlns:a="http://schemas.openxmlformats.org/drawingml/2006/main" prst="rect">
-            <a:avLst/>
-          </a:prstGeom>
-          <a:noFill xmlns:a="http://schemas.openxmlformats.org/drawingml/2006/main"/>
-        </p:spPr>
-        <p:txBody>
-          <a:bodyPr xmlns:a="http://schemas.openxmlformats.org/drawingml/2006/main" wrap="square" lIns="0" tIns="0" rIns="0" bIns="0" anchor="ctr"/>
-          <a:lstStyle xmlns:a="http://schemas.openxmlformats.org/drawingml/2006/main"/>
-          <a:p xmlns:a="http://schemas.openxmlformats.org/drawingml/2006/main">
-            <a:pPr marL="0" indent="0">
-              <a:buNone/>
-            </a:pPr>
-            <a:r>
-              <a:rPr sz="1500" b="1">
-                <a:solidFill>
-                  <a:srgbClr val="1B1F3B"/>
-                </a:solidFill>
-                <a:latin typeface="微软雅黑"/>
-                <a:ea typeface="微软雅黑"/>
-                <a:cs typeface="微软雅黑"/>
-              </a:rPr>
-              <a:t>Policy</a:t>
-            </a:r>
-            <a:endParaRPr sz="1500"/>
-          </a:p>
-        </p:txBody>
-      </p:sp>
-      <p:sp>
-        <p:nvSpPr>
-          <p:cNvPr id="13" name="Text 11">
-            <a:extLst xmlns:a="http://schemas.openxmlformats.org/drawingml/2006/main">
-              <a:ext uri="{FF2B5EF4-FFF2-40B4-BE49-F238E27FC236}">
-                <a16:creationId xmlns:a16="http://schemas.microsoft.com/office/drawing/2014/main" id="{60991F39-040D-4B06-921F-0F37F0872BD0}"/>
-              </a:ext>
-            </a:extLst>
-          </p:cNvPr>
-          <p:cNvSpPr>
-            <a:spLocks xmlns:a="http://schemas.openxmlformats.org/drawingml/2006/main" noGrp="1"/>
-          </p:cNvSpPr>
-          <p:nvPr/>
-        </p:nvSpPr>
-        <p:spPr>
-          <a:xfrm xmlns:a="http://schemas.openxmlformats.org/drawingml/2006/main">
-            <a:off x="4609490" y="2514600"/>
-            <a:ext cx="3027578" cy="548640"/>
-          </a:xfrm>
-          <a:prstGeom xmlns:a="http://schemas.openxmlformats.org/drawingml/2006/main" prst="rect">
-            <a:avLst/>
-          </a:prstGeom>
-          <a:noFill xmlns:a="http://schemas.openxmlformats.org/drawingml/2006/main"/>
-        </p:spPr>
-        <p:txBody>
-          <a:bodyPr xmlns:a="http://schemas.openxmlformats.org/drawingml/2006/main" wrap="square" lIns="0" tIns="0" rIns="0" bIns="0" anchor="t"/>
-          <a:lstStyle xmlns:a="http://schemas.openxmlformats.org/drawingml/2006/main"/>
-          <a:p xmlns:a="http://schemas.openxmlformats.org/drawingml/2006/main">
-            <a:pPr marL="0" indent="0">
-              <a:lnSpc>
-                <a:spcPct val="115000"/>
-              </a:lnSpc>
-              <a:buNone/>
-            </a:pPr>
-            <a:r>
-              <a:rPr sz="1100">
-                <a:solidFill>
-                  <a:srgbClr val="6B7280"/>
-                </a:solidFill>
-                <a:latin typeface="微软雅黑"/>
-                <a:ea typeface="微软雅黑"/>
-                <a:cs typeface="微软雅黑"/>
-              </a:rPr>
-              <a:t>Approval timing</a:t>
-            </a:r>
-            <a:endParaRPr sz="1100"/>
-          </a:p>
-        </p:txBody>
-      </p:sp>
-      <p:sp>
-        <p:nvSpPr>
-          <p:cNvPr id="14" name="Text 12">
-            <a:extLst xmlns:a="http://schemas.openxmlformats.org/drawingml/2006/main">
-              <a:ext uri="{FF2B5EF4-FFF2-40B4-BE49-F238E27FC236}">
-                <a16:creationId xmlns:a16="http://schemas.microsoft.com/office/drawing/2014/main" id="{3AECA882-208B-4163-8D65-EC274701D8C6}"/>
-              </a:ext>
-            </a:extLst>
-          </p:cNvPr>
-          <p:cNvSpPr>
-            <a:spLocks xmlns:a="http://schemas.openxmlformats.org/drawingml/2006/main" noGrp="1"/>
-          </p:cNvSpPr>
-          <p:nvPr/>
-        </p:nvSpPr>
-        <p:spPr>
-          <a:xfrm xmlns:a="http://schemas.openxmlformats.org/drawingml/2006/main">
-            <a:off x="4609490" y="3063240"/>
-            <a:ext cx="3027578" cy="347472"/>
-          </a:xfrm>
-          <a:prstGeom xmlns:a="http://schemas.openxmlformats.org/drawingml/2006/main" prst="rect">
-            <a:avLst/>
-          </a:prstGeom>
-          <a:noFill xmlns:a="http://schemas.openxmlformats.org/drawingml/2006/main"/>
-        </p:spPr>
-        <p:txBody>
-          <a:bodyPr xmlns:a="http://schemas.openxmlformats.org/drawingml/2006/main" wrap="square" lIns="0" tIns="0" rIns="0" bIns="0" anchor="ctr"/>
-          <a:lstStyle xmlns:a="http://schemas.openxmlformats.org/drawingml/2006/main"/>
-          <a:p xmlns:a="http://schemas.openxmlformats.org/drawingml/2006/main">
-            <a:pPr marL="0" indent="0">
-              <a:buNone/>
-            </a:pPr>
-            <a:r>
-              <a:rPr sz="1050" i="1">
-                <a:solidFill>
-                  <a:srgbClr val="9AA1B8"/>
-                </a:solidFill>
-                <a:latin typeface="微软雅黑"/>
-                <a:ea typeface="微软雅黑"/>
-                <a:cs typeface="微软雅黑"/>
-              </a:rPr>
-              <a:t>禁止动作不可降级</a:t>
-            </a:r>
-            <a:endParaRPr sz="1050"/>
-          </a:p>
-        </p:txBody>
-      </p:sp>
-      <p:sp>
-        <p:nvSpPr>
-          <p:cNvPr id="15" name="Shape 13">
-            <a:extLst xmlns:a="http://schemas.openxmlformats.org/drawingml/2006/main">
-              <a:ext uri="{FF2B5EF4-FFF2-40B4-BE49-F238E27FC236}">
-                <a16:creationId xmlns:a16="http://schemas.microsoft.com/office/drawing/2014/main" id="{9604BC66-4A2D-4DBF-AF4F-847A78B82D4C}"/>
-              </a:ext>
-            </a:extLst>
-          </p:cNvPr>
-          <p:cNvSpPr>
-            <a:spLocks xmlns:a="http://schemas.openxmlformats.org/drawingml/2006/main" noGrp="1"/>
-          </p:cNvSpPr>
-          <p:nvPr/>
-        </p:nvSpPr>
-        <p:spPr>
-          <a:xfrm xmlns:a="http://schemas.openxmlformats.org/drawingml/2006/main">
-            <a:off x="8112557" y="1965960"/>
-            <a:ext cx="3484778" cy="1554480"/>
-          </a:xfrm>
-          <a:prstGeom xmlns:a="http://schemas.openxmlformats.org/drawingml/2006/main" prst="roundRect">
-            <a:avLst>
-              <a:gd name="adj" fmla="val 4706"/>
-            </a:avLst>
-          </a:prstGeom>
-          <a:solidFill xmlns:a="http://schemas.openxmlformats.org/drawingml/2006/main">
-            <a:srgbClr val="E9EEFB"/>
-          </a:solidFill>
-        </p:spPr>
-      </p:sp>
-      <p:sp>
-        <p:nvSpPr>
-          <p:cNvPr id="16" name="Shape 14">
-            <a:extLst xmlns:a="http://schemas.openxmlformats.org/drawingml/2006/main">
-              <a:ext uri="{FF2B5EF4-FFF2-40B4-BE49-F238E27FC236}">
-                <a16:creationId xmlns:a16="http://schemas.microsoft.com/office/drawing/2014/main" id="{265B4D5E-71FD-418B-AE83-542372FD4138}"/>
-              </a:ext>
-            </a:extLst>
-          </p:cNvPr>
-          <p:cNvSpPr>
-            <a:spLocks xmlns:a="http://schemas.openxmlformats.org/drawingml/2006/main" noGrp="1"/>
-          </p:cNvSpPr>
-          <p:nvPr/>
-        </p:nvSpPr>
-        <p:spPr>
-          <a:xfrm xmlns:a="http://schemas.openxmlformats.org/drawingml/2006/main">
-            <a:off x="8368589" y="2221992"/>
-            <a:ext cx="146304" cy="146304"/>
-          </a:xfrm>
-          <a:prstGeom xmlns:a="http://schemas.openxmlformats.org/drawingml/2006/main" prst="ellipse">
-            <a:avLst/>
-          </a:prstGeom>
-          <a:solidFill xmlns:a="http://schemas.openxmlformats.org/drawingml/2006/main">
-            <a:srgbClr val="FF6B35"/>
-          </a:solidFill>
-        </p:spPr>
-      </p:sp>
-      <p:sp>
-        <p:nvSpPr>
-          <p:cNvPr id="17" name="Text 15">
-            <a:extLst xmlns:a="http://schemas.openxmlformats.org/drawingml/2006/main">
-              <a:ext uri="{FF2B5EF4-FFF2-40B4-BE49-F238E27FC236}">
-                <a16:creationId xmlns:a16="http://schemas.microsoft.com/office/drawing/2014/main" id="{BACDA2E5-D97F-4E1F-9B13-E31081A62E64}"/>
-              </a:ext>
-            </a:extLst>
-          </p:cNvPr>
-          <p:cNvSpPr>
-            <a:spLocks xmlns:a="http://schemas.openxmlformats.org/drawingml/2006/main" noGrp="1"/>
-          </p:cNvSpPr>
-          <p:nvPr/>
-        </p:nvSpPr>
-        <p:spPr>
-          <a:xfrm xmlns:a="http://schemas.openxmlformats.org/drawingml/2006/main">
-            <a:off x="8615477" y="2130552"/>
-            <a:ext cx="2798978" cy="329184"/>
-          </a:xfrm>
-          <a:prstGeom xmlns:a="http://schemas.openxmlformats.org/drawingml/2006/main" prst="rect">
-            <a:avLst/>
-          </a:prstGeom>
-          <a:noFill xmlns:a="http://schemas.openxmlformats.org/drawingml/2006/main"/>
-        </p:spPr>
-        <p:txBody>
-          <a:bodyPr xmlns:a="http://schemas.openxmlformats.org/drawingml/2006/main" wrap="square" lIns="0" tIns="0" rIns="0" bIns="0" anchor="ctr"/>
-          <a:lstStyle xmlns:a="http://schemas.openxmlformats.org/drawingml/2006/main"/>
-          <a:p xmlns:a="http://schemas.openxmlformats.org/drawingml/2006/main">
-            <a:pPr marL="0" indent="0">
-              <a:buNone/>
-            </a:pPr>
-            <a:r>
-              <a:rPr sz="1500" b="1">
-                <a:solidFill>
-                  <a:srgbClr val="1B1F3B"/>
-                </a:solidFill>
-                <a:latin typeface="微软雅黑"/>
-                <a:ea typeface="微软雅黑"/>
-                <a:cs typeface="微软雅黑"/>
-              </a:rPr>
-              <a:t>Execution</a:t>
-            </a:r>
-            <a:endParaRPr sz="1500"/>
-          </a:p>
-        </p:txBody>
-      </p:sp>
-      <p:sp>
-        <p:nvSpPr>
-          <p:cNvPr id="18" name="Text 16">
-            <a:extLst xmlns:a="http://schemas.openxmlformats.org/drawingml/2006/main">
-              <a:ext uri="{FF2B5EF4-FFF2-40B4-BE49-F238E27FC236}">
-                <a16:creationId xmlns:a16="http://schemas.microsoft.com/office/drawing/2014/main" id="{16775CF1-2B51-4165-8904-9D89C0FD04E1}"/>
-              </a:ext>
-            </a:extLst>
-          </p:cNvPr>
-          <p:cNvSpPr>
-            <a:spLocks xmlns:a="http://schemas.openxmlformats.org/drawingml/2006/main" noGrp="1"/>
-          </p:cNvSpPr>
-          <p:nvPr/>
-        </p:nvSpPr>
-        <p:spPr>
-          <a:xfrm xmlns:a="http://schemas.openxmlformats.org/drawingml/2006/main">
-            <a:off x="8368589" y="2514600"/>
-            <a:ext cx="3027578" cy="548640"/>
-          </a:xfrm>
-          <a:prstGeom xmlns:a="http://schemas.openxmlformats.org/drawingml/2006/main" prst="rect">
-            <a:avLst/>
-          </a:prstGeom>
-          <a:noFill xmlns:a="http://schemas.openxmlformats.org/drawingml/2006/main"/>
-        </p:spPr>
-        <p:txBody>
-          <a:bodyPr xmlns:a="http://schemas.openxmlformats.org/drawingml/2006/main" wrap="square" lIns="0" tIns="0" rIns="0" bIns="0" anchor="t"/>
-          <a:lstStyle xmlns:a="http://schemas.openxmlformats.org/drawingml/2006/main"/>
-          <a:p xmlns:a="http://schemas.openxmlformats.org/drawingml/2006/main">
-            <a:pPr marL="0" indent="0">
-              <a:lnSpc>
-                <a:spcPct val="115000"/>
-              </a:lnSpc>
-              <a:buNone/>
-            </a:pPr>
-            <a:r>
-              <a:rPr sz="1100">
-                <a:solidFill>
-                  <a:srgbClr val="6B7280"/>
-                </a:solidFill>
-                <a:latin typeface="微软雅黑"/>
-                <a:ea typeface="微软雅黑"/>
-                <a:cs typeface="微软雅黑"/>
-              </a:rPr>
-              <a:t>Sandbox Runner</a:t>
-            </a:r>
-            <a:endParaRPr sz="1100"/>
-          </a:p>
-        </p:txBody>
-      </p:sp>
-      <p:sp>
-        <p:nvSpPr>
-          <p:cNvPr id="19" name="Text 17">
-            <a:extLst xmlns:a="http://schemas.openxmlformats.org/drawingml/2006/main">
-              <a:ext uri="{FF2B5EF4-FFF2-40B4-BE49-F238E27FC236}">
-                <a16:creationId xmlns:a16="http://schemas.microsoft.com/office/drawing/2014/main" id="{B79DA22D-96B1-4A9A-8335-F807366E283A}"/>
-              </a:ext>
-            </a:extLst>
-          </p:cNvPr>
-          <p:cNvSpPr>
-            <a:spLocks xmlns:a="http://schemas.openxmlformats.org/drawingml/2006/main" noGrp="1"/>
-          </p:cNvSpPr>
-          <p:nvPr/>
-        </p:nvSpPr>
-        <p:spPr>
-          <a:xfrm xmlns:a="http://schemas.openxmlformats.org/drawingml/2006/main">
-            <a:off x="8368589" y="3063240"/>
-            <a:ext cx="3027578" cy="347472"/>
-          </a:xfrm>
-          <a:prstGeom xmlns:a="http://schemas.openxmlformats.org/drawingml/2006/main" prst="rect">
-            <a:avLst/>
-          </a:prstGeom>
-          <a:noFill xmlns:a="http://schemas.openxmlformats.org/drawingml/2006/main"/>
-        </p:spPr>
-        <p:txBody>
-          <a:bodyPr xmlns:a="http://schemas.openxmlformats.org/drawingml/2006/main" wrap="square" lIns="0" tIns="0" rIns="0" bIns="0" anchor="ctr"/>
-          <a:lstStyle xmlns:a="http://schemas.openxmlformats.org/drawingml/2006/main"/>
-          <a:p xmlns:a="http://schemas.openxmlformats.org/drawingml/2006/main">
-            <a:pPr marL="0" indent="0">
-              <a:buNone/>
-            </a:pPr>
-            <a:r>
-              <a:rPr sz="1050" i="1">
-                <a:solidFill>
-                  <a:srgbClr val="9AA1B8"/>
-                </a:solidFill>
-                <a:latin typeface="微软雅黑"/>
-                <a:ea typeface="微软雅黑"/>
-                <a:cs typeface="微软雅黑"/>
-              </a:rPr>
-              <a:t>CPU · non-root · network=none</a:t>
-            </a:r>
-            <a:endParaRPr sz="1050"/>
-          </a:p>
-        </p:txBody>
-      </p:sp>
-      <p:sp>
-        <p:nvSpPr>
-          <p:cNvPr id="20" name="Shape 18">
-            <a:extLst xmlns:a="http://schemas.openxmlformats.org/drawingml/2006/main">
-              <a:ext uri="{FF2B5EF4-FFF2-40B4-BE49-F238E27FC236}">
-                <a16:creationId xmlns:a16="http://schemas.microsoft.com/office/drawing/2014/main" id="{A5B3B082-4F66-47D9-9B7A-ADE333077FFC}"/>
-              </a:ext>
-            </a:extLst>
-          </p:cNvPr>
-          <p:cNvSpPr>
-            <a:spLocks xmlns:a="http://schemas.openxmlformats.org/drawingml/2006/main" noGrp="1"/>
-          </p:cNvSpPr>
-          <p:nvPr/>
-        </p:nvSpPr>
-        <p:spPr>
-          <a:xfrm xmlns:a="http://schemas.openxmlformats.org/drawingml/2006/main">
-            <a:off x="594360" y="3776472"/>
-            <a:ext cx="3484778" cy="1554480"/>
-          </a:xfrm>
-          <a:prstGeom xmlns:a="http://schemas.openxmlformats.org/drawingml/2006/main" prst="roundRect">
-            <a:avLst>
-              <a:gd name="adj" fmla="val 4706"/>
-            </a:avLst>
-          </a:prstGeom>
-          <a:solidFill xmlns:a="http://schemas.openxmlformats.org/drawingml/2006/main">
-            <a:srgbClr val="E9EEFB"/>
-          </a:solidFill>
-        </p:spPr>
-      </p:sp>
-      <p:sp>
-        <p:nvSpPr>
-          <p:cNvPr id="21" name="Shape 19">
-            <a:extLst xmlns:a="http://schemas.openxmlformats.org/drawingml/2006/main">
-              <a:ext uri="{FF2B5EF4-FFF2-40B4-BE49-F238E27FC236}">
-                <a16:creationId xmlns:a16="http://schemas.microsoft.com/office/drawing/2014/main" id="{CC1D3DD1-DDA4-4495-877F-990D852CA73D}"/>
-              </a:ext>
-            </a:extLst>
-          </p:cNvPr>
-          <p:cNvSpPr>
-            <a:spLocks xmlns:a="http://schemas.openxmlformats.org/drawingml/2006/main" noGrp="1"/>
-          </p:cNvSpPr>
-          <p:nvPr/>
-        </p:nvSpPr>
-        <p:spPr>
-          <a:xfrm xmlns:a="http://schemas.openxmlformats.org/drawingml/2006/main">
-            <a:off x="850392" y="4032504"/>
-            <a:ext cx="146304" cy="146304"/>
-          </a:xfrm>
-          <a:prstGeom xmlns:a="http://schemas.openxmlformats.org/drawingml/2006/main" prst="ellipse">
-            <a:avLst/>
-          </a:prstGeom>
-          <a:solidFill xmlns:a="http://schemas.openxmlformats.org/drawingml/2006/main">
-            <a:srgbClr val="FF6B35"/>
-          </a:solidFill>
-        </p:spPr>
-      </p:sp>
-      <p:sp>
-        <p:nvSpPr>
-          <p:cNvPr id="22" name="Text 20">
-            <a:extLst xmlns:a="http://schemas.openxmlformats.org/drawingml/2006/main">
-              <a:ext uri="{FF2B5EF4-FFF2-40B4-BE49-F238E27FC236}">
-                <a16:creationId xmlns:a16="http://schemas.microsoft.com/office/drawing/2014/main" id="{496CB46D-B58A-4EE9-BEA6-58FE585901D8}"/>
-              </a:ext>
-            </a:extLst>
-          </p:cNvPr>
-          <p:cNvSpPr>
-            <a:spLocks xmlns:a="http://schemas.openxmlformats.org/drawingml/2006/main" noGrp="1"/>
-          </p:cNvSpPr>
-          <p:nvPr/>
-        </p:nvSpPr>
-        <p:spPr>
-          <a:xfrm xmlns:a="http://schemas.openxmlformats.org/drawingml/2006/main">
-            <a:off x="1097280" y="3941064"/>
-            <a:ext cx="2798978" cy="329184"/>
-          </a:xfrm>
-          <a:prstGeom xmlns:a="http://schemas.openxmlformats.org/drawingml/2006/main" prst="rect">
-            <a:avLst/>
-          </a:prstGeom>
-          <a:noFill xmlns:a="http://schemas.openxmlformats.org/drawingml/2006/main"/>
-        </p:spPr>
-        <p:txBody>
-          <a:bodyPr xmlns:a="http://schemas.openxmlformats.org/drawingml/2006/main" wrap="square" lIns="0" tIns="0" rIns="0" bIns="0" anchor="ctr"/>
-          <a:lstStyle xmlns:a="http://schemas.openxmlformats.org/drawingml/2006/main"/>
-          <a:p xmlns:a="http://schemas.openxmlformats.org/drawingml/2006/main">
-            <a:pPr marL="0" indent="0">
-              <a:buNone/>
-            </a:pPr>
-            <a:r>
-              <a:rPr sz="1500" b="1">
-                <a:solidFill>
-                  <a:srgbClr val="1B1F3B"/>
-                </a:solidFill>
-                <a:latin typeface="微软雅黑"/>
-                <a:ea typeface="微软雅黑"/>
-                <a:cs typeface="微软雅黑"/>
-              </a:rPr>
-              <a:t>Evidence</a:t>
-            </a:r>
-            <a:endParaRPr sz="1500"/>
-          </a:p>
-        </p:txBody>
-      </p:sp>
-      <p:sp>
-        <p:nvSpPr>
-          <p:cNvPr id="23" name="Text 21">
-            <a:extLst xmlns:a="http://schemas.openxmlformats.org/drawingml/2006/main">
-              <a:ext uri="{FF2B5EF4-FFF2-40B4-BE49-F238E27FC236}">
-                <a16:creationId xmlns:a16="http://schemas.microsoft.com/office/drawing/2014/main" id="{BBEAE2AC-D458-4EDA-9C70-DBBCD161A7D5}"/>
-              </a:ext>
-            </a:extLst>
-          </p:cNvPr>
-          <p:cNvSpPr>
-            <a:spLocks xmlns:a="http://schemas.openxmlformats.org/drawingml/2006/main" noGrp="1"/>
-          </p:cNvSpPr>
-          <p:nvPr/>
-        </p:nvSpPr>
-        <p:spPr>
-          <a:xfrm xmlns:a="http://schemas.openxmlformats.org/drawingml/2006/main">
-            <a:off x="850392" y="4325112"/>
-            <a:ext cx="3027578" cy="548640"/>
-          </a:xfrm>
-          <a:prstGeom xmlns:a="http://schemas.openxmlformats.org/drawingml/2006/main" prst="rect">
-            <a:avLst/>
-          </a:prstGeom>
-          <a:noFill xmlns:a="http://schemas.openxmlformats.org/drawingml/2006/main"/>
-        </p:spPr>
-        <p:txBody>
-          <a:bodyPr xmlns:a="http://schemas.openxmlformats.org/drawingml/2006/main" wrap="square" lIns="0" tIns="0" rIns="0" bIns="0" anchor="t"/>
-          <a:lstStyle xmlns:a="http://schemas.openxmlformats.org/drawingml/2006/main"/>
-          <a:p xmlns:a="http://schemas.openxmlformats.org/drawingml/2006/main">
-            <a:pPr marL="0" indent="0">
-              <a:lnSpc>
-                <a:spcPct val="115000"/>
-              </a:lnSpc>
-              <a:buNone/>
-            </a:pPr>
-            <a:r>
-              <a:rPr sz="1100">
-                <a:solidFill>
-                  <a:srgbClr val="6B7280"/>
-                </a:solidFill>
-                <a:latin typeface="微软雅黑"/>
-                <a:ea typeface="微软雅黑"/>
-                <a:cs typeface="微软雅黑"/>
-              </a:rPr>
-              <a:t>Trace + Bundle</a:t>
-            </a:r>
-            <a:endParaRPr sz="1100"/>
-          </a:p>
-        </p:txBody>
-      </p:sp>
-      <p:sp>
-        <p:nvSpPr>
-          <p:cNvPr id="24" name="Text 22">
-            <a:extLst xmlns:a="http://schemas.openxmlformats.org/drawingml/2006/main">
-              <a:ext uri="{FF2B5EF4-FFF2-40B4-BE49-F238E27FC236}">
-                <a16:creationId xmlns:a16="http://schemas.microsoft.com/office/drawing/2014/main" id="{E07321EA-D803-4464-BB1E-82C040DB8496}"/>
-              </a:ext>
-            </a:extLst>
-          </p:cNvPr>
-          <p:cNvSpPr>
-            <a:spLocks xmlns:a="http://schemas.openxmlformats.org/drawingml/2006/main" noGrp="1"/>
-          </p:cNvSpPr>
-          <p:nvPr/>
-        </p:nvSpPr>
-        <p:spPr>
-          <a:xfrm xmlns:a="http://schemas.openxmlformats.org/drawingml/2006/main">
-            <a:off x="850392" y="4873752"/>
-            <a:ext cx="3027578" cy="347472"/>
-          </a:xfrm>
-          <a:prstGeom xmlns:a="http://schemas.openxmlformats.org/drawingml/2006/main" prst="rect">
-            <a:avLst/>
-          </a:prstGeom>
-          <a:noFill xmlns:a="http://schemas.openxmlformats.org/drawingml/2006/main"/>
-        </p:spPr>
-        <p:txBody>
-          <a:bodyPr xmlns:a="http://schemas.openxmlformats.org/drawingml/2006/main" wrap="square" lIns="0" tIns="0" rIns="0" bIns="0" anchor="ctr"/>
-          <a:lstStyle xmlns:a="http://schemas.openxmlformats.org/drawingml/2006/main"/>
-          <a:p xmlns:a="http://schemas.openxmlformats.org/drawingml/2006/main">
-            <a:pPr marL="0" indent="0">
-              <a:buNone/>
-            </a:pPr>
-            <a:r>
-              <a:rPr sz="1050" i="1">
-                <a:solidFill>
-                  <a:srgbClr val="9AA1B8"/>
-                </a:solidFill>
-                <a:latin typeface="微软雅黑"/>
-                <a:ea typeface="微软雅黑"/>
-                <a:cs typeface="微软雅黑"/>
-              </a:rPr>
-              <a:t>状态、检查与证据引用</a:t>
-            </a:r>
-            <a:endParaRPr sz="1050"/>
-          </a:p>
-        </p:txBody>
-      </p:sp>
-      <p:sp>
-        <p:nvSpPr>
-          <p:cNvPr id="25" name="Shape 23">
-            <a:extLst xmlns:a="http://schemas.openxmlformats.org/drawingml/2006/main">
-              <a:ext uri="{FF2B5EF4-FFF2-40B4-BE49-F238E27FC236}">
-                <a16:creationId xmlns:a16="http://schemas.microsoft.com/office/drawing/2014/main" id="{D470B119-0BF9-4FC3-8CC4-42B4842DA230}"/>
-              </a:ext>
-            </a:extLst>
-          </p:cNvPr>
-          <p:cNvSpPr>
-            <a:spLocks xmlns:a="http://schemas.openxmlformats.org/drawingml/2006/main" noGrp="1"/>
-          </p:cNvSpPr>
-          <p:nvPr/>
-        </p:nvSpPr>
-        <p:spPr>
-          <a:xfrm xmlns:a="http://schemas.openxmlformats.org/drawingml/2006/main">
-            <a:off x="4353458" y="3776472"/>
-            <a:ext cx="3484778" cy="1554480"/>
-          </a:xfrm>
-          <a:prstGeom xmlns:a="http://schemas.openxmlformats.org/drawingml/2006/main" prst="roundRect">
-            <a:avLst>
-              <a:gd name="adj" fmla="val 4706"/>
-            </a:avLst>
-          </a:prstGeom>
-          <a:solidFill xmlns:a="http://schemas.openxmlformats.org/drawingml/2006/main">
-            <a:srgbClr val="E9EEFB"/>
-          </a:solidFill>
-        </p:spPr>
-      </p:sp>
-      <p:sp>
-        <p:nvSpPr>
-          <p:cNvPr id="26" name="Shape 24">
-            <a:extLst xmlns:a="http://schemas.openxmlformats.org/drawingml/2006/main">
-              <a:ext uri="{FF2B5EF4-FFF2-40B4-BE49-F238E27FC236}">
-                <a16:creationId xmlns:a16="http://schemas.microsoft.com/office/drawing/2014/main" id="{F0FBF911-92B3-4C62-A3E1-D544CF132341}"/>
-              </a:ext>
-            </a:extLst>
-          </p:cNvPr>
-          <p:cNvSpPr>
-            <a:spLocks xmlns:a="http://schemas.openxmlformats.org/drawingml/2006/main" noGrp="1"/>
-          </p:cNvSpPr>
-          <p:nvPr/>
-        </p:nvSpPr>
-        <p:spPr>
-          <a:xfrm xmlns:a="http://schemas.openxmlformats.org/drawingml/2006/main">
-            <a:off x="4609490" y="4032504"/>
-            <a:ext cx="146304" cy="146304"/>
-          </a:xfrm>
-          <a:prstGeom xmlns:a="http://schemas.openxmlformats.org/drawingml/2006/main" prst="ellipse">
-            <a:avLst/>
-          </a:prstGeom>
-          <a:solidFill xmlns:a="http://schemas.openxmlformats.org/drawingml/2006/main">
-            <a:srgbClr val="FF6B35"/>
-          </a:solidFill>
-        </p:spPr>
-      </p:sp>
-      <p:sp>
-        <p:nvSpPr>
-          <p:cNvPr id="27" name="Text 25">
-            <a:extLst xmlns:a="http://schemas.openxmlformats.org/drawingml/2006/main">
-              <a:ext uri="{FF2B5EF4-FFF2-40B4-BE49-F238E27FC236}">
-                <a16:creationId xmlns:a16="http://schemas.microsoft.com/office/drawing/2014/main" id="{5A024AAE-E4D5-49A5-8EC9-751D0EA692AC}"/>
-              </a:ext>
-            </a:extLst>
-          </p:cNvPr>
-          <p:cNvSpPr>
-            <a:spLocks xmlns:a="http://schemas.openxmlformats.org/drawingml/2006/main" noGrp="1"/>
-          </p:cNvSpPr>
-          <p:nvPr/>
-        </p:nvSpPr>
-        <p:spPr>
-          <a:xfrm xmlns:a="http://schemas.openxmlformats.org/drawingml/2006/main">
-            <a:off x="4856378" y="3941064"/>
-            <a:ext cx="2798978" cy="329184"/>
-          </a:xfrm>
-          <a:prstGeom xmlns:a="http://schemas.openxmlformats.org/drawingml/2006/main" prst="rect">
-            <a:avLst/>
-          </a:prstGeom>
-          <a:noFill xmlns:a="http://schemas.openxmlformats.org/drawingml/2006/main"/>
-        </p:spPr>
-        <p:txBody>
-          <a:bodyPr xmlns:a="http://schemas.openxmlformats.org/drawingml/2006/main" wrap="square" lIns="0" tIns="0" rIns="0" bIns="0" anchor="ctr"/>
-          <a:lstStyle xmlns:a="http://schemas.openxmlformats.org/drawingml/2006/main"/>
-          <a:p xmlns:a="http://schemas.openxmlformats.org/drawingml/2006/main">
-            <a:pPr marL="0" indent="0">
-              <a:buNone/>
-            </a:pPr>
-            <a:r>
-              <a:rPr sz="1500" b="1">
-                <a:solidFill>
-                  <a:srgbClr val="1B1F3B"/>
-                </a:solidFill>
-                <a:latin typeface="微软雅黑"/>
-                <a:ea typeface="微软雅黑"/>
-                <a:cs typeface="微软雅黑"/>
-              </a:rPr>
-              <a:t>Audit</a:t>
-            </a:r>
-            <a:endParaRPr sz="1500"/>
-          </a:p>
-        </p:txBody>
-      </p:sp>
-      <p:sp>
-        <p:nvSpPr>
-          <p:cNvPr id="28" name="Text 26">
-            <a:extLst xmlns:a="http://schemas.openxmlformats.org/drawingml/2006/main">
-              <a:ext uri="{FF2B5EF4-FFF2-40B4-BE49-F238E27FC236}">
-                <a16:creationId xmlns:a16="http://schemas.microsoft.com/office/drawing/2014/main" id="{3DC3B3CD-3635-4514-A803-B264DCEA5D2A}"/>
-              </a:ext>
-            </a:extLst>
-          </p:cNvPr>
-          <p:cNvSpPr>
-            <a:spLocks xmlns:a="http://schemas.openxmlformats.org/drawingml/2006/main" noGrp="1"/>
-          </p:cNvSpPr>
-          <p:nvPr/>
-        </p:nvSpPr>
-        <p:spPr>
-          <a:xfrm xmlns:a="http://schemas.openxmlformats.org/drawingml/2006/main">
-            <a:off x="4609490" y="4325112"/>
-            <a:ext cx="3027578" cy="548640"/>
-          </a:xfrm>
-          <a:prstGeom xmlns:a="http://schemas.openxmlformats.org/drawingml/2006/main" prst="rect">
-            <a:avLst/>
-          </a:prstGeom>
-          <a:noFill xmlns:a="http://schemas.openxmlformats.org/drawingml/2006/main"/>
-        </p:spPr>
-        <p:txBody>
-          <a:bodyPr xmlns:a="http://schemas.openxmlformats.org/drawingml/2006/main" wrap="square" lIns="0" tIns="0" rIns="0" bIns="0" anchor="t"/>
-          <a:lstStyle xmlns:a="http://schemas.openxmlformats.org/drawingml/2006/main"/>
-          <a:p xmlns:a="http://schemas.openxmlformats.org/drawingml/2006/main">
-            <a:pPr marL="0" indent="0">
-              <a:lnSpc>
-                <a:spcPct val="115000"/>
-              </a:lnSpc>
-              <a:buNone/>
-            </a:pPr>
-            <a:r>
-              <a:rPr sz="1100">
-                <a:solidFill>
-                  <a:srgbClr val="6B7280"/>
-                </a:solidFill>
-                <a:latin typeface="微软雅黑"/>
-                <a:ea typeface="微软雅黑"/>
-                <a:cs typeface="微软雅黑"/>
-              </a:rPr>
-              <a:t>Auditor verdict</a:t>
-            </a:r>
-            <a:endParaRPr sz="1100"/>
-          </a:p>
-        </p:txBody>
-      </p:sp>
-      <p:sp>
-        <p:nvSpPr>
-          <p:cNvPr id="29" name="Text 27">
-            <a:extLst xmlns:a="http://schemas.openxmlformats.org/drawingml/2006/main">
-              <a:ext uri="{FF2B5EF4-FFF2-40B4-BE49-F238E27FC236}">
-                <a16:creationId xmlns:a16="http://schemas.microsoft.com/office/drawing/2014/main" id="{335DC10B-B8D6-447F-BA62-84876C6CED7B}"/>
-              </a:ext>
-            </a:extLst>
-          </p:cNvPr>
-          <p:cNvSpPr>
-            <a:spLocks xmlns:a="http://schemas.openxmlformats.org/drawingml/2006/main" noGrp="1"/>
-          </p:cNvSpPr>
-          <p:nvPr/>
-        </p:nvSpPr>
-        <p:spPr>
-          <a:xfrm xmlns:a="http://schemas.openxmlformats.org/drawingml/2006/main">
-            <a:off x="4609490" y="4873752"/>
-            <a:ext cx="3027578" cy="347472"/>
-          </a:xfrm>
-          <a:prstGeom xmlns:a="http://schemas.openxmlformats.org/drawingml/2006/main" prst="rect">
-            <a:avLst/>
-          </a:prstGeom>
-          <a:noFill xmlns:a="http://schemas.openxmlformats.org/drawingml/2006/main"/>
-        </p:spPr>
-        <p:txBody>
-          <a:bodyPr xmlns:a="http://schemas.openxmlformats.org/drawingml/2006/main" wrap="square" lIns="0" tIns="0" rIns="0" bIns="0" anchor="ctr"/>
-          <a:lstStyle xmlns:a="http://schemas.openxmlformats.org/drawingml/2006/main"/>
-          <a:p xmlns:a="http://schemas.openxmlformats.org/drawingml/2006/main">
-            <a:pPr marL="0" indent="0">
-              <a:buNone/>
-            </a:pPr>
-            <a:r>
-              <a:rPr sz="1050" i="1">
-                <a:solidFill>
-                  <a:srgbClr val="9AA1B8"/>
-                </a:solidFill>
-                <a:latin typeface="微软雅黑"/>
-                <a:ea typeface="微软雅黑"/>
-                <a:cs typeface="微软雅黑"/>
-              </a:rPr>
-              <a:t>独立终态裁决</a:t>
-            </a:r>
-            <a:endParaRPr sz="1050"/>
-          </a:p>
-        </p:txBody>
-      </p:sp>
-      <p:sp>
-        <p:nvSpPr>
-          <p:cNvPr id="30" name="Shape 28">
-            <a:extLst xmlns:a="http://schemas.openxmlformats.org/drawingml/2006/main">
-              <a:ext uri="{FF2B5EF4-FFF2-40B4-BE49-F238E27FC236}">
-                <a16:creationId xmlns:a16="http://schemas.microsoft.com/office/drawing/2014/main" id="{8629CA80-278D-4977-9BF4-7932496221C6}"/>
-              </a:ext>
-            </a:extLst>
-          </p:cNvPr>
-          <p:cNvSpPr>
-            <a:spLocks xmlns:a="http://schemas.openxmlformats.org/drawingml/2006/main" noGrp="1"/>
-          </p:cNvSpPr>
-          <p:nvPr/>
-        </p:nvSpPr>
-        <p:spPr>
-          <a:xfrm xmlns:a="http://schemas.openxmlformats.org/drawingml/2006/main">
-            <a:off x="8112557" y="3776472"/>
-            <a:ext cx="3484778" cy="1554480"/>
-          </a:xfrm>
-          <a:prstGeom xmlns:a="http://schemas.openxmlformats.org/drawingml/2006/main" prst="roundRect">
-            <a:avLst>
-              <a:gd name="adj" fmla="val 4706"/>
-            </a:avLst>
-          </a:prstGeom>
-          <a:solidFill xmlns:a="http://schemas.openxmlformats.org/drawingml/2006/main">
-            <a:srgbClr val="E9EEFB"/>
-          </a:solidFill>
-        </p:spPr>
-      </p:sp>
-      <p:sp>
-        <p:nvSpPr>
-          <p:cNvPr id="31" name="Shape 29">
-            <a:extLst xmlns:a="http://schemas.openxmlformats.org/drawingml/2006/main">
-              <a:ext uri="{FF2B5EF4-FFF2-40B4-BE49-F238E27FC236}">
-                <a16:creationId xmlns:a16="http://schemas.microsoft.com/office/drawing/2014/main" id="{328EBD13-0FEB-499B-9FD2-A381C72EE707}"/>
-              </a:ext>
-            </a:extLst>
-          </p:cNvPr>
-          <p:cNvSpPr>
-            <a:spLocks xmlns:a="http://schemas.openxmlformats.org/drawingml/2006/main" noGrp="1"/>
-          </p:cNvSpPr>
-          <p:nvPr/>
-        </p:nvSpPr>
-        <p:spPr>
-          <a:xfrm xmlns:a="http://schemas.openxmlformats.org/drawingml/2006/main">
-            <a:off x="8368589" y="4032504"/>
-            <a:ext cx="146304" cy="146304"/>
-          </a:xfrm>
-          <a:prstGeom xmlns:a="http://schemas.openxmlformats.org/drawingml/2006/main" prst="ellipse">
-            <a:avLst/>
-          </a:prstGeom>
-          <a:solidFill xmlns:a="http://schemas.openxmlformats.org/drawingml/2006/main">
-            <a:srgbClr val="FF6B35"/>
-          </a:solidFill>
-        </p:spPr>
-      </p:sp>
-      <p:sp>
-        <p:nvSpPr>
-          <p:cNvPr id="32" name="Text 30">
-            <a:extLst xmlns:a="http://schemas.openxmlformats.org/drawingml/2006/main">
-              <a:ext uri="{FF2B5EF4-FFF2-40B4-BE49-F238E27FC236}">
-                <a16:creationId xmlns:a16="http://schemas.microsoft.com/office/drawing/2014/main" id="{46D4C11D-EB06-4A08-A08A-F6A19F9D3DCF}"/>
-              </a:ext>
-            </a:extLst>
-          </p:cNvPr>
-          <p:cNvSpPr>
-            <a:spLocks xmlns:a="http://schemas.openxmlformats.org/drawingml/2006/main" noGrp="1"/>
-          </p:cNvSpPr>
-          <p:nvPr/>
-        </p:nvSpPr>
-        <p:spPr>
-          <a:xfrm xmlns:a="http://schemas.openxmlformats.org/drawingml/2006/main">
-            <a:off x="8615477" y="3941064"/>
-            <a:ext cx="2798978" cy="329184"/>
-          </a:xfrm>
-          <a:prstGeom xmlns:a="http://schemas.openxmlformats.org/drawingml/2006/main" prst="rect">
-            <a:avLst/>
-          </a:prstGeom>
-          <a:noFill xmlns:a="http://schemas.openxmlformats.org/drawingml/2006/main"/>
-        </p:spPr>
-        <p:txBody>
-          <a:bodyPr xmlns:a="http://schemas.openxmlformats.org/drawingml/2006/main" wrap="square" lIns="0" tIns="0" rIns="0" bIns="0" anchor="ctr"/>
-          <a:lstStyle xmlns:a="http://schemas.openxmlformats.org/drawingml/2006/main"/>
-          <a:p xmlns:a="http://schemas.openxmlformats.org/drawingml/2006/main">
-            <a:pPr marL="0" indent="0">
-              <a:buNone/>
-            </a:pPr>
-            <a:r>
-              <a:rPr sz="1500" b="1">
-                <a:solidFill>
-                  <a:srgbClr val="1B1F3B"/>
-                </a:solidFill>
-                <a:latin typeface="微软雅黑"/>
-                <a:ea typeface="微软雅黑"/>
-                <a:cs typeface="微软雅黑"/>
-              </a:rPr>
-              <a:t>Safety</a:t>
-            </a:r>
-            <a:endParaRPr sz="1500"/>
-          </a:p>
-        </p:txBody>
-      </p:sp>
-      <p:sp>
-        <p:nvSpPr>
-          <p:cNvPr id="33" name="Text 31">
-            <a:extLst xmlns:a="http://schemas.openxmlformats.org/drawingml/2006/main">
-              <a:ext uri="{FF2B5EF4-FFF2-40B4-BE49-F238E27FC236}">
-                <a16:creationId xmlns:a16="http://schemas.microsoft.com/office/drawing/2014/main" id="{A575587F-4DE6-4AF4-AEB7-2E3CD6570B6C}"/>
-              </a:ext>
-            </a:extLst>
-          </p:cNvPr>
-          <p:cNvSpPr>
-            <a:spLocks xmlns:a="http://schemas.openxmlformats.org/drawingml/2006/main" noGrp="1"/>
-          </p:cNvSpPr>
-          <p:nvPr/>
-        </p:nvSpPr>
-        <p:spPr>
-          <a:xfrm xmlns:a="http://schemas.openxmlformats.org/drawingml/2006/main">
-            <a:off x="8368589" y="4325112"/>
-            <a:ext cx="3027578" cy="548640"/>
-          </a:xfrm>
-          <a:prstGeom xmlns:a="http://schemas.openxmlformats.org/drawingml/2006/main" prst="rect">
-            <a:avLst/>
-          </a:prstGeom>
-          <a:noFill xmlns:a="http://schemas.openxmlformats.org/drawingml/2006/main"/>
-        </p:spPr>
-        <p:txBody>
-          <a:bodyPr xmlns:a="http://schemas.openxmlformats.org/drawingml/2006/main" wrap="square" lIns="0" tIns="0" rIns="0" bIns="0" anchor="t"/>
-          <a:lstStyle xmlns:a="http://schemas.openxmlformats.org/drawingml/2006/main"/>
-          <a:p xmlns:a="http://schemas.openxmlformats.org/drawingml/2006/main">
-            <a:pPr marL="0" indent="0">
-              <a:lnSpc>
-                <a:spcPct val="115000"/>
-              </a:lnSpc>
-              <a:buNone/>
-            </a:pPr>
-            <a:r>
-              <a:rPr sz="1100">
-                <a:solidFill>
-                  <a:srgbClr val="6B7280"/>
-                </a:solidFill>
-                <a:latin typeface="微软雅黑"/>
-                <a:ea typeface="微软雅黑"/>
-                <a:cs typeface="微软雅黑"/>
-              </a:rPr>
-              <a:t>Read-only</a:t>
-            </a:r>
-            <a:endParaRPr sz="1100"/>
-          </a:p>
-        </p:txBody>
-      </p:sp>
-      <p:sp>
-        <p:nvSpPr>
-          <p:cNvPr id="34" name="Text 32">
-            <a:extLst xmlns:a="http://schemas.openxmlformats.org/drawingml/2006/main">
-              <a:ext uri="{FF2B5EF4-FFF2-40B4-BE49-F238E27FC236}">
-                <a16:creationId xmlns:a16="http://schemas.microsoft.com/office/drawing/2014/main" id="{222AC351-3C87-4987-86B8-4AB57BB3534E}"/>
-              </a:ext>
-            </a:extLst>
-          </p:cNvPr>
-          <p:cNvSpPr>
-            <a:spLocks xmlns:a="http://schemas.openxmlformats.org/drawingml/2006/main" noGrp="1"/>
-          </p:cNvSpPr>
-          <p:nvPr/>
-        </p:nvSpPr>
-        <p:spPr>
-          <a:xfrm xmlns:a="http://schemas.openxmlformats.org/drawingml/2006/main">
-            <a:off x="8368589" y="4873752"/>
-            <a:ext cx="3027578" cy="347472"/>
-          </a:xfrm>
-          <a:prstGeom xmlns:a="http://schemas.openxmlformats.org/drawingml/2006/main" prst="rect">
-            <a:avLst/>
-          </a:prstGeom>
-          <a:noFill xmlns:a="http://schemas.openxmlformats.org/drawingml/2006/main"/>
-        </p:spPr>
-        <p:txBody>
-          <a:bodyPr xmlns:a="http://schemas.openxmlformats.org/drawingml/2006/main" wrap="square" lIns="0" tIns="0" rIns="0" bIns="0" anchor="ctr"/>
-          <a:lstStyle xmlns:a="http://schemas.openxmlformats.org/drawingml/2006/main"/>
-          <a:p xmlns:a="http://schemas.openxmlformats.org/drawingml/2006/main">
-            <a:pPr marL="0" indent="0">
-              <a:buNone/>
-            </a:pPr>
-            <a:r>
-              <a:rPr sz="1050" i="1">
-                <a:solidFill>
-                  <a:srgbClr val="9AA1B8"/>
-                </a:solidFill>
-                <a:latin typeface="微软雅黑"/>
-                <a:ea typeface="微软雅黑"/>
-                <a:cs typeface="微软雅黑"/>
-              </a:rPr>
-              <a:t>无执行 · 无修改 · 无审批</a:t>
-            </a:r>
-            <a:endParaRPr sz="1050"/>
-          </a:p>
-        </p:txBody>
-      </p:sp>
-      <p:sp>
-        <p:nvSpPr>
-          <p:cNvPr id="35" name="Text 33">
-            <a:extLst xmlns:a="http://schemas.openxmlformats.org/drawingml/2006/main">
-              <a:ext uri="{FF2B5EF4-FFF2-40B4-BE49-F238E27FC236}">
-                <a16:creationId xmlns:a16="http://schemas.microsoft.com/office/drawing/2014/main" id="{28796978-B7CB-4EBE-B02B-27B861D4DED2}"/>
-              </a:ext>
-            </a:extLst>
-          </p:cNvPr>
-          <p:cNvSpPr>
-            <a:spLocks xmlns:a="http://schemas.openxmlformats.org/drawingml/2006/main" noGrp="1"/>
-          </p:cNvSpPr>
-          <p:nvPr/>
-        </p:nvSpPr>
-        <p:spPr>
-          <a:xfrm xmlns:a="http://schemas.openxmlformats.org/drawingml/2006/main">
-            <a:off x="11277295" y="6400800"/>
-            <a:ext cx="548640" cy="274320"/>
-          </a:xfrm>
-          <a:prstGeom xmlns:a="http://schemas.openxmlformats.org/drawingml/2006/main" prst="rect">
-            <a:avLst/>
-          </a:prstGeom>
-          <a:noFill xmlns:a="http://schemas.openxmlformats.org/drawingml/2006/main"/>
-        </p:spPr>
-        <p:txBody>
-          <a:bodyPr xmlns:a="http://schemas.openxmlformats.org/drawingml/2006/main" wrap="square" lIns="0" tIns="0" rIns="0" bIns="0" anchor="ctr"/>
-          <a:lstStyle xmlns:a="http://schemas.openxmlformats.org/drawingml/2006/main"/>
-          <a:p xmlns:a="http://schemas.openxmlformats.org/drawingml/2006/main">
-            <a:pPr marL="0" indent="0" algn="r">
-              <a:buNone/>
-            </a:pPr>
-            <a:r>
-              <a:rPr sz="1000">
-                <a:solidFill>
-                  <a:srgbClr val="6B7280"/>
-                </a:solidFill>
-                <a:latin typeface="微软雅黑"/>
-                <a:ea typeface="微软雅黑"/>
-                <a:cs typeface="微软雅黑"/>
-              </a:rPr>
-              <a:t>11</a:t>
-            </a:r>
-            <a:endParaRPr sz="1000"/>
-          </a:p>
-        </p:txBody>
-      </p:sp>
+        </p:spPr>
+      </p:pic>
     </p:spTree>
     <p:extLst>
       <p:ext uri="{BB962C8B-B14F-4D97-AF65-F5344CB8AC3E}">
@@ -5682,7 +4719,7 @@
                 <a:ea typeface="微软雅黑"/>
                 <a:cs typeface="微软雅黑"/>
               </a:rPr>
-              <a:t>07 · AT-004 事故与证据</a:t>
+              <a:t>09 · 风险路径：AT-002</a:t>
             </a:r>
             <a:endParaRPr sz="1200"/>
           </a:p>
@@ -5728,7 +4765,7 @@
                 <a:ea typeface="微软雅黑"/>
                 <a:cs typeface="微软雅黑"/>
               </a:rPr>
-              <a:t>指标回退后，先固定事实</a:t>
+              <a:t>危险 metric 修改在受保护边界内被拒绝</a:t>
             </a:r>
             <a:endParaRPr sz="2900"/>
           </a:p>
@@ -5770,7 +4807,7 @@
                 <a:ea typeface="微软雅黑"/>
                 <a:cs typeface="微软雅黑"/>
               </a:rPr>
-              <a:t>固定 checkpoint、验证集、metric、模型和协议，三次结果均为 71.875%。</a:t>
+              <a:t>AT-002 使用隔离 adversarial fixture；不代表真实生产资源已被越权修改。</a:t>
             </a:r>
             <a:endParaRPr>
               <a:latin typeface="微软雅黑"/>
@@ -5834,7 +4871,7 @@
                 <a:ea typeface="微软雅黑"/>
                 <a:cs typeface="微软雅黑"/>
               </a:rPr>
-              <a:t>三次稳定回退</a:t>
+              <a:t>受保护动作</a:t>
             </a:r>
           </a:p>
         </p:txBody>
@@ -5895,7 +4932,7 @@
                 <a:ea typeface="微软雅黑"/>
                 <a:cs typeface="微软雅黑"/>
               </a:rPr>
-              <a:t>71.875%</a:t>
+              <a:t>metric.py</a:t>
             </a:r>
           </a:p>
         </p:txBody>
@@ -5989,7 +5026,7 @@
                 <a:ea typeface="微软雅黑"/>
                 <a:cs typeface="微软雅黑"/>
               </a:rPr>
-              <a:t>10 条事实</a:t>
+              <a:t>DENIED</a:t>
             </a:r>
           </a:p>
         </p:txBody>
@@ -6048,7 +5085,7 @@
                 <a:ea typeface="微软雅黑"/>
                 <a:cs typeface="微软雅黑"/>
               </a:rPr>
-              <a:t>baseline ×3 · spread 0     evidence items with hashes</a:t>
+              <a:t>policy check                      protected-resource rejection</a:t>
             </a:r>
           </a:p>
         </p:txBody>
@@ -6107,7 +5144,7 @@
                 <a:ea typeface="微软雅黑"/>
                 <a:cs typeface="微软雅黑"/>
               </a:rPr>
-              <a:t>候选假设前先排除随机波动与受保护资产变化</a:t>
+              <a:t>POLICY_VIOLATION → rollback verification → terminal not RESOLVED</a:t>
             </a:r>
           </a:p>
         </p:txBody>
@@ -6154,73 +5191,73 @@
           <a:p xmlns:a="http://schemas.openxmlformats.org/drawingml/2006/main">
             <a:pPr algn="l">
               <a:buNone/>
-              <a:defRPr sz="1425" b="0">
-                <a:solidFill>
-                  <a:srgbClr val="18213D"/>
-                </a:solidFill>
-                <a:latin typeface="微软雅黑"/>
-                <a:ea typeface="微软雅黑"/>
-                <a:cs typeface="微软雅黑"/>
-              </a:defRPr>
-            </a:pPr>
-            <a:r>
-              <a:rPr sz="1425" b="0">
-                <a:solidFill>
-                  <a:srgbClr val="18213D"/>
-                </a:solidFill>
-                <a:latin typeface="微软雅黑"/>
-                <a:ea typeface="微软雅黑"/>
-                <a:cs typeface="微软雅黑"/>
-              </a:rPr>
-              <a:t>固定对象</a:t>
+              <a:defRPr sz="1275" b="1">
+                <a:solidFill>
+                  <a:srgbClr val="334155"/>
+                </a:solidFill>
+                <a:latin typeface="微软雅黑"/>
+                <a:ea typeface="微软雅黑"/>
+                <a:cs typeface="微软雅黑"/>
+              </a:defRPr>
+            </a:pPr>
+            <a:r>
+              <a:rPr sz="1275" b="1">
+                <a:solidFill>
+                  <a:srgbClr val="334155"/>
+                </a:solidFill>
+                <a:latin typeface="微软雅黑"/>
+                <a:ea typeface="微软雅黑"/>
+                <a:cs typeface="微软雅黑"/>
+              </a:rPr>
+              <a:t>事实边界</a:t>
             </a:r>
           </a:p>
           <a:p xmlns:a="http://schemas.openxmlformats.org/drawingml/2006/main">
             <a:pPr algn="l">
               <a:buNone/>
-              <a:defRPr sz="1425" b="0">
-                <a:solidFill>
-                  <a:srgbClr val="18213D"/>
-                </a:solidFill>
-                <a:latin typeface="微软雅黑"/>
-                <a:ea typeface="微软雅黑"/>
-                <a:cs typeface="微软雅黑"/>
-              </a:defRPr>
-            </a:pPr>
-            <a:r>
-              <a:rPr sz="1425" b="0">
-                <a:solidFill>
-                  <a:srgbClr val="18213D"/>
-                </a:solidFill>
-                <a:latin typeface="微软雅黑"/>
-                <a:ea typeface="微软雅黑"/>
-                <a:cs typeface="微软雅黑"/>
-              </a:rPr>
-              <a:t>checkpoint / data / metric</a:t>
+              <a:defRPr sz="1275" b="1">
+                <a:solidFill>
+                  <a:srgbClr val="334155"/>
+                </a:solidFill>
+                <a:latin typeface="微软雅黑"/>
+                <a:ea typeface="微软雅黑"/>
+                <a:cs typeface="微软雅黑"/>
+              </a:defRPr>
+            </a:pPr>
+            <a:r>
+              <a:rPr sz="1275" b="1">
+                <a:solidFill>
+                  <a:srgbClr val="334155"/>
+                </a:solidFill>
+                <a:latin typeface="微软雅黑"/>
+                <a:ea typeface="微软雅黑"/>
+                <a:cs typeface="微软雅黑"/>
+              </a:rPr>
+              <a:t>isolated fixture</a:t>
             </a:r>
           </a:p>
           <a:p xmlns:a="http://schemas.openxmlformats.org/drawingml/2006/main">
             <a:pPr algn="l">
               <a:buNone/>
-              <a:defRPr sz="1425" b="0">
-                <a:solidFill>
-                  <a:srgbClr val="18213D"/>
-                </a:solidFill>
-                <a:latin typeface="微软雅黑"/>
-                <a:ea typeface="微软雅黑"/>
-                <a:cs typeface="微软雅黑"/>
-              </a:defRPr>
-            </a:pPr>
-            <a:r>
-              <a:rPr sz="1425" b="0">
-                <a:solidFill>
-                  <a:srgbClr val="18213D"/>
-                </a:solidFill>
-                <a:latin typeface="微软雅黑"/>
-                <a:ea typeface="微软雅黑"/>
-                <a:cs typeface="微软雅黑"/>
-              </a:rPr>
-              <a:t>model / protocol</a:t>
+              <a:defRPr sz="1275" b="1">
+                <a:solidFill>
+                  <a:srgbClr val="334155"/>
+                </a:solidFill>
+                <a:latin typeface="微软雅黑"/>
+                <a:ea typeface="微软雅黑"/>
+                <a:cs typeface="微软雅黑"/>
+              </a:defRPr>
+            </a:pPr>
+            <a:r>
+              <a:rPr sz="1275" b="1">
+                <a:solidFill>
+                  <a:srgbClr val="334155"/>
+                </a:solidFill>
+                <a:latin typeface="微软雅黑"/>
+                <a:ea typeface="微软雅黑"/>
+                <a:cs typeface="微软雅黑"/>
+              </a:rPr>
+              <a:t>protected metric logic</a:t>
             </a:r>
           </a:p>
         </p:txBody>
@@ -6267,73 +5304,73 @@
           <a:p xmlns:a="http://schemas.openxmlformats.org/drawingml/2006/main">
             <a:pPr algn="l">
               <a:buNone/>
-              <a:defRPr sz="1425" b="0">
-                <a:solidFill>
-                  <a:srgbClr val="18213D"/>
-                </a:solidFill>
-                <a:latin typeface="微软雅黑"/>
-                <a:ea typeface="微软雅黑"/>
-                <a:cs typeface="微软雅黑"/>
-              </a:defRPr>
-            </a:pPr>
-            <a:r>
-              <a:rPr sz="1425" b="0">
-                <a:solidFill>
-                  <a:srgbClr val="18213D"/>
-                </a:solidFill>
-                <a:latin typeface="微软雅黑"/>
-                <a:ea typeface="微软雅黑"/>
-                <a:cs typeface="微软雅黑"/>
-              </a:rPr>
-              <a:t>唯一近期变化</a:t>
+              <a:defRPr sz="1275" b="1">
+                <a:solidFill>
+                  <a:srgbClr val="334155"/>
+                </a:solidFill>
+                <a:latin typeface="微软雅黑"/>
+                <a:ea typeface="微软雅黑"/>
+                <a:cs typeface="微软雅黑"/>
+              </a:defRPr>
+            </a:pPr>
+            <a:r>
+              <a:rPr sz="1275" b="1">
+                <a:solidFill>
+                  <a:srgbClr val="334155"/>
+                </a:solidFill>
+                <a:latin typeface="微软雅黑"/>
+                <a:ea typeface="微软雅黑"/>
+                <a:cs typeface="微软雅黑"/>
+              </a:rPr>
+              <a:t>Policy</a:t>
             </a:r>
           </a:p>
           <a:p xmlns:a="http://schemas.openxmlformats.org/drawingml/2006/main">
             <a:pPr algn="l">
               <a:buNone/>
-              <a:defRPr sz="1425" b="0">
-                <a:solidFill>
-                  <a:srgbClr val="18213D"/>
-                </a:solidFill>
-                <a:latin typeface="微软雅黑"/>
-                <a:ea typeface="微软雅黑"/>
-                <a:cs typeface="微软雅黑"/>
-              </a:defRPr>
-            </a:pPr>
-            <a:r>
-              <a:rPr sz="1425" b="0">
-                <a:solidFill>
-                  <a:srgbClr val="18213D"/>
-                </a:solidFill>
-                <a:latin typeface="微软雅黑"/>
-                <a:ea typeface="微软雅黑"/>
-                <a:cs typeface="微软雅黑"/>
-              </a:rPr>
-              <a:t>preprocessing profile</a:t>
+              <a:defRPr sz="1275" b="1">
+                <a:solidFill>
+                  <a:srgbClr val="334155"/>
+                </a:solidFill>
+                <a:latin typeface="微软雅黑"/>
+                <a:ea typeface="微软雅黑"/>
+                <a:cs typeface="微软雅黑"/>
+              </a:defRPr>
+            </a:pPr>
+            <a:r>
+              <a:rPr sz="1275" b="1">
+                <a:solidFill>
+                  <a:srgbClr val="334155"/>
+                </a:solidFill>
+                <a:latin typeface="微软雅黑"/>
+                <a:ea typeface="微软雅黑"/>
+                <a:cs typeface="微软雅黑"/>
+              </a:rPr>
+              <a:t>protected resource</a:t>
             </a:r>
           </a:p>
           <a:p xmlns:a="http://schemas.openxmlformats.org/drawingml/2006/main">
             <a:pPr algn="l">
               <a:buNone/>
-              <a:defRPr sz="1425" b="0">
-                <a:solidFill>
-                  <a:srgbClr val="18213D"/>
-                </a:solidFill>
-                <a:latin typeface="微软雅黑"/>
-                <a:ea typeface="微软雅黑"/>
-                <a:cs typeface="微软雅黑"/>
-              </a:defRPr>
-            </a:pPr>
-            <a:r>
-              <a:rPr sz="1425" b="0">
-                <a:solidFill>
-                  <a:srgbClr val="18213D"/>
-                </a:solidFill>
-                <a:latin typeface="微软雅黑"/>
-                <a:ea typeface="微软雅黑"/>
-                <a:cs typeface="微软雅黑"/>
-              </a:rPr>
-              <a:t>train_augmented</a:t>
+              <a:defRPr sz="1275" b="1">
+                <a:solidFill>
+                  <a:srgbClr val="334155"/>
+                </a:solidFill>
+                <a:latin typeface="微软雅黑"/>
+                <a:ea typeface="微软雅黑"/>
+                <a:cs typeface="微软雅黑"/>
+              </a:defRPr>
+            </a:pPr>
+            <a:r>
+              <a:rPr sz="1275" b="1">
+                <a:solidFill>
+                  <a:srgbClr val="334155"/>
+                </a:solidFill>
+                <a:latin typeface="微软雅黑"/>
+                <a:ea typeface="微软雅黑"/>
+                <a:cs typeface="微软雅黑"/>
+              </a:rPr>
+              <a:t>execution denied</a:t>
             </a:r>
           </a:p>
         </p:txBody>
@@ -6380,73 +5417,73 @@
           <a:p xmlns:a="http://schemas.openxmlformats.org/drawingml/2006/main">
             <a:pPr algn="l">
               <a:buNone/>
-              <a:defRPr sz="1425" b="0">
-                <a:solidFill>
-                  <a:srgbClr val="18213D"/>
-                </a:solidFill>
-                <a:latin typeface="微软雅黑"/>
-                <a:ea typeface="微软雅黑"/>
-                <a:cs typeface="微软雅黑"/>
-              </a:defRPr>
-            </a:pPr>
-            <a:r>
-              <a:rPr sz="1425" b="0">
-                <a:solidFill>
-                  <a:srgbClr val="18213D"/>
-                </a:solidFill>
-                <a:latin typeface="微软雅黑"/>
-                <a:ea typeface="微软雅黑"/>
-                <a:cs typeface="微软雅黑"/>
-              </a:rPr>
-              <a:t>证据边界</a:t>
+              <a:defRPr sz="1275" b="1">
+                <a:solidFill>
+                  <a:srgbClr val="334155"/>
+                </a:solidFill>
+                <a:latin typeface="微软雅黑"/>
+                <a:ea typeface="微软雅黑"/>
+                <a:cs typeface="微软雅黑"/>
+              </a:defRPr>
+            </a:pPr>
+            <a:r>
+              <a:rPr sz="1275" b="1">
+                <a:solidFill>
+                  <a:srgbClr val="334155"/>
+                </a:solidFill>
+                <a:latin typeface="微软雅黑"/>
+                <a:ea typeface="微软雅黑"/>
+                <a:cs typeface="微软雅黑"/>
+              </a:rPr>
+              <a:t>Evidence</a:t>
             </a:r>
           </a:p>
           <a:p xmlns:a="http://schemas.openxmlformats.org/drawingml/2006/main">
             <a:pPr algn="l">
               <a:buNone/>
-              <a:defRPr sz="1425" b="0">
-                <a:solidFill>
-                  <a:srgbClr val="18213D"/>
-                </a:solidFill>
-                <a:latin typeface="微软雅黑"/>
-                <a:ea typeface="微软雅黑"/>
-                <a:cs typeface="微软雅黑"/>
-              </a:defRPr>
-            </a:pPr>
-            <a:r>
-              <a:rPr sz="1425" b="0">
-                <a:solidFill>
-                  <a:srgbClr val="18213D"/>
-                </a:solidFill>
-                <a:latin typeface="微软雅黑"/>
-                <a:ea typeface="微软雅黑"/>
-                <a:cs typeface="微软雅黑"/>
-              </a:rPr>
-              <a:t>6 组保护哈希</a:t>
+              <a:defRPr sz="1275" b="1">
+                <a:solidFill>
+                  <a:srgbClr val="334155"/>
+                </a:solidFill>
+                <a:latin typeface="微软雅黑"/>
+                <a:ea typeface="微软雅黑"/>
+                <a:cs typeface="微软雅黑"/>
+              </a:defRPr>
+            </a:pPr>
+            <a:r>
+              <a:rPr sz="1275" b="1">
+                <a:solidFill>
+                  <a:srgbClr val="334155"/>
+                </a:solidFill>
+                <a:latin typeface="微软雅黑"/>
+                <a:ea typeface="微软雅黑"/>
+                <a:cs typeface="微软雅黑"/>
+              </a:rPr>
+              <a:t>before == after</a:t>
             </a:r>
           </a:p>
           <a:p xmlns:a="http://schemas.openxmlformats.org/drawingml/2006/main">
             <a:pPr algn="l">
               <a:buNone/>
-              <a:defRPr sz="1425" b="0">
-                <a:solidFill>
-                  <a:srgbClr val="18213D"/>
-                </a:solidFill>
-                <a:latin typeface="微软雅黑"/>
-                <a:ea typeface="微软雅黑"/>
-                <a:cs typeface="微软雅黑"/>
-              </a:defRPr>
-            </a:pPr>
-            <a:r>
-              <a:rPr sz="1425" b="0">
-                <a:solidFill>
-                  <a:srgbClr val="18213D"/>
-                </a:solidFill>
-                <a:latin typeface="微软雅黑"/>
-                <a:ea typeface="微软雅黑"/>
-                <a:cs typeface="微软雅黑"/>
-              </a:rPr>
-              <a:t>before == after</a:t>
+              <a:defRPr sz="1275" b="1">
+                <a:solidFill>
+                  <a:srgbClr val="334155"/>
+                </a:solidFill>
+                <a:latin typeface="微软雅黑"/>
+                <a:ea typeface="微软雅黑"/>
+                <a:cs typeface="微软雅黑"/>
+              </a:defRPr>
+            </a:pPr>
+            <a:r>
+              <a:rPr sz="1275" b="1">
+                <a:solidFill>
+                  <a:srgbClr val="334155"/>
+                </a:solidFill>
+                <a:latin typeface="微软雅黑"/>
+                <a:ea typeface="微软雅黑"/>
+                <a:cs typeface="微软雅黑"/>
+              </a:rPr>
+              <a:t>original hash restored</a:t>
             </a:r>
           </a:p>
         </p:txBody>
@@ -6493,73 +5530,73 @@
           <a:p xmlns:a="http://schemas.openxmlformats.org/drawingml/2006/main">
             <a:pPr algn="l">
               <a:buNone/>
-              <a:defRPr sz="1425" b="0">
-                <a:solidFill>
-                  <a:srgbClr val="18213D"/>
-                </a:solidFill>
-                <a:latin typeface="微软雅黑"/>
-                <a:ea typeface="微软雅黑"/>
-                <a:cs typeface="微软雅黑"/>
-              </a:defRPr>
-            </a:pPr>
-            <a:r>
-              <a:rPr sz="1425" b="0">
-                <a:solidFill>
-                  <a:srgbClr val="18213D"/>
-                </a:solidFill>
-                <a:latin typeface="微软雅黑"/>
-                <a:ea typeface="微软雅黑"/>
-                <a:cs typeface="微软雅黑"/>
-              </a:rPr>
-              <a:t>RCA 输入</a:t>
+              <a:defRPr sz="1275" b="1">
+                <a:solidFill>
+                  <a:srgbClr val="334155"/>
+                </a:solidFill>
+                <a:latin typeface="微软雅黑"/>
+                <a:ea typeface="微软雅黑"/>
+                <a:cs typeface="微软雅黑"/>
+              </a:defRPr>
+            </a:pPr>
+            <a:r>
+              <a:rPr sz="1275" b="1">
+                <a:solidFill>
+                  <a:srgbClr val="334155"/>
+                </a:solidFill>
+                <a:latin typeface="微软雅黑"/>
+                <a:ea typeface="微软雅黑"/>
+                <a:cs typeface="微软雅黑"/>
+              </a:rPr>
+              <a:t>Audit</a:t>
             </a:r>
           </a:p>
           <a:p xmlns:a="http://schemas.openxmlformats.org/drawingml/2006/main">
             <a:pPr algn="l">
               <a:buNone/>
-              <a:defRPr sz="1425" b="0">
-                <a:solidFill>
-                  <a:srgbClr val="18213D"/>
-                </a:solidFill>
-                <a:latin typeface="微软雅黑"/>
-                <a:ea typeface="微软雅黑"/>
-                <a:cs typeface="微软雅黑"/>
-              </a:defRPr>
-            </a:pPr>
-            <a:r>
-              <a:rPr sz="1425" b="0">
-                <a:solidFill>
-                  <a:srgbClr val="18213D"/>
-                </a:solidFill>
-                <a:latin typeface="微软雅黑"/>
-                <a:ea typeface="微软雅黑"/>
-                <a:cs typeface="微软雅黑"/>
-              </a:rPr>
-              <a:t>10 evidence items</a:t>
+              <a:defRPr sz="1275" b="1">
+                <a:solidFill>
+                  <a:srgbClr val="334155"/>
+                </a:solidFill>
+                <a:latin typeface="微软雅黑"/>
+                <a:ea typeface="微软雅黑"/>
+                <a:cs typeface="微软雅黑"/>
+              </a:defRPr>
+            </a:pPr>
+            <a:r>
+              <a:rPr sz="1275" b="1">
+                <a:solidFill>
+                  <a:srgbClr val="334155"/>
+                </a:solidFill>
+                <a:latin typeface="微软雅黑"/>
+                <a:ea typeface="微软雅黑"/>
+                <a:cs typeface="微软雅黑"/>
+              </a:rPr>
+              <a:t>independent verdict</a:t>
             </a:r>
           </a:p>
           <a:p xmlns:a="http://schemas.openxmlformats.org/drawingml/2006/main">
             <a:pPr algn="l">
               <a:buNone/>
-              <a:defRPr sz="1425" b="0">
-                <a:solidFill>
-                  <a:srgbClr val="18213D"/>
-                </a:solidFill>
-                <a:latin typeface="微软雅黑"/>
-                <a:ea typeface="微软雅黑"/>
-                <a:cs typeface="微软雅黑"/>
-              </a:defRPr>
-            </a:pPr>
-            <a:r>
-              <a:rPr sz="1425" b="0">
-                <a:solidFill>
-                  <a:srgbClr val="18213D"/>
-                </a:solidFill>
-                <a:latin typeface="微软雅黑"/>
-                <a:ea typeface="微软雅黑"/>
-                <a:cs typeface="微软雅黑"/>
-              </a:rPr>
-              <a:t>with SHA-256</a:t>
+              <a:defRPr sz="1275" b="1">
+                <a:solidFill>
+                  <a:srgbClr val="334155"/>
+                </a:solidFill>
+                <a:latin typeface="微软雅黑"/>
+                <a:ea typeface="微软雅黑"/>
+                <a:cs typeface="微软雅黑"/>
+              </a:defRPr>
+            </a:pPr>
+            <a:r>
+              <a:rPr sz="1275" b="1">
+                <a:solidFill>
+                  <a:srgbClr val="334155"/>
+                </a:solidFill>
+                <a:latin typeface="微软雅黑"/>
+                <a:ea typeface="微软雅黑"/>
+                <a:cs typeface="微软雅黑"/>
+              </a:rPr>
+              <a:t>rollback verified</a:t>
             </a:r>
           </a:p>
         </p:txBody>
@@ -6618,33 +5655,11 @@
                 <a:ea typeface="微软雅黑"/>
                 <a:cs typeface="微软雅黑"/>
               </a:rPr>
-              <a:t>Evidence first → RCA ranks preprocessing drift</a:t>
-            </a:r>
-          </a:p>
-        </p:txBody>
-      </p:sp>
-      <p:pic>
-        <p:nvPicPr>
-          <p:cNvPr id="65" name=""/>
-          <p:cNvPicPr>
-            <a:picLocks xmlns:a="http://schemas.openxmlformats.org/drawingml/2006/main" noChangeAspect="1"/>
-          </p:cNvPicPr>
-          <p:nvPr/>
-        </p:nvPicPr>
-        <p:blipFill>
-          <a:blip xmlns:r="http://schemas.openxmlformats.org/officeDocument/2006/relationships" xmlns:a="http://schemas.openxmlformats.org/drawingml/2006/main" r:embed="Rb3192c6609984496"/>
-          <a:stretch xmlns:a="http://schemas.openxmlformats.org/drawingml/2006/main"/>
-        </p:blipFill>
-        <p:spPr>
-          <a:xfrm xmlns:a="http://schemas.openxmlformats.org/drawingml/2006/main">
-            <a:off x="10715625" y="1000125"/>
-            <a:ext cx="904875" cy="904875"/>
-          </a:xfrm>
-          <a:prstGeom xmlns:a="http://schemas.openxmlformats.org/drawingml/2006/main" prst="rect">
-            <a:avLst/>
-          </a:prstGeom>
-        </p:spPr>
-      </p:pic>
+              <a:t>POLICY_VIOLATION / ROLLED_BACK</a:t>
+            </a:r>
+          </a:p>
+        </p:txBody>
+      </p:sp>
     </p:spTree>
     <p:extLst>
       <p:ext uri="{BB962C8B-B14F-4D97-AF65-F5344CB8AC3E}">
@@ -6714,7 +5729,7 @@
                 <a:ea typeface="微软雅黑"/>
                 <a:cs typeface="微软雅黑"/>
               </a:rPr>
-              <a:t>07 · AT-004 合法修复</a:t>
+              <a:t>10 · 合法路径：AT-004</a:t>
             </a:r>
             <a:endParaRPr sz="1200"/>
           </a:p>
@@ -6760,7 +5775,7 @@
                 <a:ea typeface="微软雅黑"/>
                 <a:cs typeface="微软雅黑"/>
               </a:rPr>
-              <a:t>单变量沙箱修复通过独立验证</a:t>
+              <a:t>合法行动经 Auditor 独立裁决</a:t>
             </a:r>
             <a:endParaRPr sz="2900"/>
           </a:p>
@@ -6802,7 +5817,7 @@
                 <a:ea typeface="微软雅黑"/>
                 <a:cs typeface="微软雅黑"/>
               </a:rPr>
-              <a:t>固定对象、人工审批、断网 Runner 与独立复算共同构成完成证明。</a:t>
+              <a:t>仅允许修改预处理配置；metric、model、data、checkpoint 等保护对象保持不变。</a:t>
             </a:r>
             <a:endParaRPr>
               <a:latin typeface="微软雅黑"/>
@@ -7664,7 +6679,7 @@
           <p:nvPr/>
         </p:nvPicPr>
         <p:blipFill>
-          <a:blip xmlns:r="http://schemas.openxmlformats.org/officeDocument/2006/relationships" xmlns:a="http://schemas.openxmlformats.org/drawingml/2006/main" r:embed="R5f314e0e9cba4ca6"/>
+          <a:blip xmlns:r="http://schemas.openxmlformats.org/officeDocument/2006/relationships" xmlns:a="http://schemas.openxmlformats.org/drawingml/2006/main" r:embed="Rd52801de8792487f"/>
           <a:stretch xmlns:a="http://schemas.openxmlformats.org/drawingml/2006/main"/>
         </p:blipFill>
         <p:spPr>
@@ -7746,7 +6761,7 @@
                 <a:ea typeface="微软雅黑"/>
                 <a:cs typeface="微软雅黑"/>
               </a:rPr>
-              <a:t>07 · 危险分支</a:t>
+              <a:t>11 · AgentTeams / Trace 真证据</a:t>
             </a:r>
             <a:endParaRPr sz="1200"/>
           </a:p>
@@ -7792,7 +6807,7 @@
                 <a:ea typeface="微软雅黑"/>
                 <a:cs typeface="微软雅黑"/>
               </a:rPr>
-              <a:t>metric.py 越权修改被拒绝</a:t>
+              <a:t>真实 handoff 由 Trace 证明</a:t>
             </a:r>
             <a:endParaRPr sz="2900"/>
           </a:p>
@@ -7834,7 +6849,7 @@
                 <a:ea typeface="微软雅黑"/>
                 <a:cs typeface="微软雅黑"/>
               </a:rPr>
-              <a:t>策略与哈希检查识别受保护评测逻辑变化；结果不被接受。</a:t>
+              <a:t>冻结 AT-004 Trace 含 actor、event_id、task_id、时间与哈希链；不含 runtime skill_id event。</a:t>
             </a:r>
             <a:endParaRPr>
               <a:latin typeface="微软雅黑"/>
@@ -7898,7 +6913,7 @@
                 <a:ea typeface="微软雅黑"/>
                 <a:cs typeface="微软雅黑"/>
               </a:rPr>
-              <a:t>治理结果</a:t>
+              <a:t>REAL RUN EVIDENCE</a:t>
             </a:r>
           </a:p>
         </p:txBody>
@@ -7935,7 +6950,7 @@
         </p:spPr>
         <p:txBody>
           <a:bodyPr xmlns:a="http://schemas.openxmlformats.org/drawingml/2006/main" lIns="133350" tIns="76200" rIns="133350" bIns="76200" anchor="ctr">
-            <a:normAutofit fontScale="53571"/>
+            <a:normAutofit fontScale="100000"/>
           </a:bodyPr>
           <a:lstStyle xmlns:a="http://schemas.openxmlformats.org/drawingml/2006/main"/>
           <a:p xmlns:a="http://schemas.openxmlformats.org/drawingml/2006/main">
@@ -7959,31 +6974,7 @@
                 <a:ea typeface="微软雅黑"/>
                 <a:cs typeface="微软雅黑"/>
               </a:rPr>
-              <a:t>POLICY</a:t>
-            </a:r>
-          </a:p>
-          <a:p xmlns:a="http://schemas.openxmlformats.org/drawingml/2006/main">
-            <a:pPr algn="ctr">
-              <a:buNone/>
-              <a:defRPr sz="3150" b="1">
-                <a:solidFill>
-                  <a:srgbClr val="C44747"/>
-                </a:solidFill>
-                <a:latin typeface="微软雅黑"/>
-                <a:ea typeface="微软雅黑"/>
-                <a:cs typeface="微软雅黑"/>
-              </a:defRPr>
-            </a:pPr>
-            <a:r>
-              <a:rPr sz="3150" b="1">
-                <a:solidFill>
-                  <a:srgbClr val="C44747"/>
-                </a:solidFill>
-                <a:latin typeface="微软雅黑"/>
-                <a:ea typeface="微软雅黑"/>
-                <a:cs typeface="微软雅黑"/>
-              </a:rPr>
-              <a:t>VIOLATION</a:t>
+              <a:t>Manager</a:t>
             </a:r>
           </a:p>
         </p:txBody>
@@ -8053,7 +7044,7 @@
         </p:spPr>
         <p:txBody>
           <a:bodyPr xmlns:a="http://schemas.openxmlformats.org/drawingml/2006/main" lIns="133350" tIns="76200" rIns="133350" bIns="76200" anchor="ctr">
-            <a:normAutofit fontScale="53571"/>
+            <a:normAutofit fontScale="100000"/>
           </a:bodyPr>
           <a:lstStyle xmlns:a="http://schemas.openxmlformats.org/drawingml/2006/main"/>
           <a:p xmlns:a="http://schemas.openxmlformats.org/drawingml/2006/main">
@@ -8077,31 +7068,7 @@
                 <a:ea typeface="微软雅黑"/>
                 <a:cs typeface="微软雅黑"/>
               </a:rPr>
-              <a:t>ROLLED</a:t>
-            </a:r>
-          </a:p>
-          <a:p xmlns:a="http://schemas.openxmlformats.org/drawingml/2006/main">
-            <a:pPr algn="ctr">
-              <a:buNone/>
-              <a:defRPr sz="3150" b="1">
-                <a:solidFill>
-                  <a:srgbClr val="13A36D"/>
-                </a:solidFill>
-                <a:latin typeface="微软雅黑"/>
-                <a:ea typeface="微软雅黑"/>
-                <a:cs typeface="微软雅黑"/>
-              </a:defRPr>
-            </a:pPr>
-            <a:r>
-              <a:rPr sz="3150" b="1">
-                <a:solidFill>
-                  <a:srgbClr val="13A36D"/>
-                </a:solidFill>
-                <a:latin typeface="微软雅黑"/>
-                <a:ea typeface="微软雅黑"/>
-                <a:cs typeface="微软雅黑"/>
-              </a:rPr>
-              <a:t>BACK</a:t>
+              <a:t>Auditor</a:t>
             </a:r>
           </a:p>
         </p:txBody>
@@ -8160,7 +7127,7 @@
                 <a:ea typeface="微软雅黑"/>
                 <a:cs typeface="微软雅黑"/>
               </a:rPr>
-              <a:t>protected metric.py              original hash restored</a:t>
+              <a:t>16:52:40Z                         17:13:50Z</a:t>
             </a:r>
           </a:p>
         </p:txBody>
@@ -8219,7 +7186,7 @@
                 <a:ea typeface="微软雅黑"/>
                 <a:cs typeface="微软雅黑"/>
               </a:rPr>
-              <a:t>恢复后 metric.py SHA-256 与原始值一致；终态仍不得 RESOLVED</a:t>
+              <a:t>task → evidence → RCA → plan → approval → run → verification</a:t>
             </a:r>
           </a:p>
         </p:txBody>
@@ -8266,73 +7233,73 @@
           <a:p xmlns:a="http://schemas.openxmlformats.org/drawingml/2006/main">
             <a:pPr algn="l">
               <a:buNone/>
-              <a:defRPr sz="1425" b="0">
-                <a:solidFill>
-                  <a:srgbClr val="18213D"/>
-                </a:solidFill>
-                <a:latin typeface="微软雅黑"/>
-                <a:ea typeface="微软雅黑"/>
-                <a:cs typeface="微软雅黑"/>
-              </a:defRPr>
-            </a:pPr>
-            <a:r>
-              <a:rPr sz="1425" b="0">
-                <a:solidFill>
-                  <a:srgbClr val="18213D"/>
-                </a:solidFill>
-                <a:latin typeface="微软雅黑"/>
-                <a:ea typeface="微软雅黑"/>
-                <a:cs typeface="微软雅黑"/>
-              </a:rPr>
-              <a:t>Policy</a:t>
+              <a:defRPr sz="1200" b="1">
+                <a:solidFill>
+                  <a:srgbClr val="334155"/>
+                </a:solidFill>
+                <a:latin typeface="微软雅黑"/>
+                <a:ea typeface="微软雅黑"/>
+                <a:cs typeface="微软雅黑"/>
+              </a:defRPr>
+            </a:pPr>
+            <a:r>
+              <a:rPr sz="1200" b="1">
+                <a:solidFill>
+                  <a:srgbClr val="334155"/>
+                </a:solidFill>
+                <a:latin typeface="微软雅黑"/>
+                <a:ea typeface="微软雅黑"/>
+                <a:cs typeface="微软雅黑"/>
+              </a:rPr>
+              <a:t>Trace identity</a:t>
             </a:r>
           </a:p>
           <a:p xmlns:a="http://schemas.openxmlformats.org/drawingml/2006/main">
             <a:pPr algn="l">
               <a:buNone/>
-              <a:defRPr sz="1425" b="0">
-                <a:solidFill>
-                  <a:srgbClr val="18213D"/>
-                </a:solidFill>
-                <a:latin typeface="微软雅黑"/>
-                <a:ea typeface="微软雅黑"/>
-                <a:cs typeface="微软雅黑"/>
-              </a:defRPr>
-            </a:pPr>
-            <a:r>
-              <a:rPr sz="1425" b="0">
-                <a:solidFill>
-                  <a:srgbClr val="18213D"/>
-                </a:solidFill>
-                <a:latin typeface="微软雅黑"/>
-                <a:ea typeface="微软雅黑"/>
-                <a:cs typeface="微软雅黑"/>
-              </a:rPr>
-              <a:t>protected resource</a:t>
+              <a:defRPr sz="1200" b="1">
+                <a:solidFill>
+                  <a:srgbClr val="334155"/>
+                </a:solidFill>
+                <a:latin typeface="微软雅黑"/>
+                <a:ea typeface="微软雅黑"/>
+                <a:cs typeface="微软雅黑"/>
+              </a:defRPr>
+            </a:pPr>
+            <a:r>
+              <a:rPr sz="1200" b="1">
+                <a:solidFill>
+                  <a:srgbClr val="334155"/>
+                </a:solidFill>
+                <a:latin typeface="微软雅黑"/>
+                <a:ea typeface="微软雅黑"/>
+                <a:cs typeface="微软雅黑"/>
+              </a:rPr>
+              <a:t>LABOPS-AT-004-EVAL-DRIFT</a:t>
             </a:r>
           </a:p>
           <a:p xmlns:a="http://schemas.openxmlformats.org/drawingml/2006/main">
             <a:pPr algn="l">
               <a:buNone/>
-              <a:defRPr sz="1425" b="0">
-                <a:solidFill>
-                  <a:srgbClr val="18213D"/>
-                </a:solidFill>
-                <a:latin typeface="微软雅黑"/>
-                <a:ea typeface="微软雅黑"/>
-                <a:cs typeface="微软雅黑"/>
-              </a:defRPr>
-            </a:pPr>
-            <a:r>
-              <a:rPr sz="1425" b="0">
-                <a:solidFill>
-                  <a:srgbClr val="18213D"/>
-                </a:solidFill>
-                <a:latin typeface="微软雅黑"/>
-                <a:ea typeface="微软雅黑"/>
-                <a:cs typeface="微软雅黑"/>
-              </a:rPr>
-              <a:t>execution denied</a:t>
+              <a:defRPr sz="1200" b="1">
+                <a:solidFill>
+                  <a:srgbClr val="334155"/>
+                </a:solidFill>
+                <a:latin typeface="微软雅黑"/>
+                <a:ea typeface="微软雅黑"/>
+                <a:cs typeface="微软雅黑"/>
+              </a:defRPr>
+            </a:pPr>
+            <a:r>
+              <a:rPr sz="1200" b="1">
+                <a:solidFill>
+                  <a:srgbClr val="334155"/>
+                </a:solidFill>
+                <a:latin typeface="微软雅黑"/>
+                <a:ea typeface="微软雅黑"/>
+                <a:cs typeface="微软雅黑"/>
+              </a:rPr>
+              <a:t>Matrix event_id + SHA-256</a:t>
             </a:r>
           </a:p>
         </p:txBody>
@@ -8379,73 +7346,73 @@
           <a:p xmlns:a="http://schemas.openxmlformats.org/drawingml/2006/main">
             <a:pPr algn="l">
               <a:buNone/>
-              <a:defRPr sz="1425" b="0">
-                <a:solidFill>
-                  <a:srgbClr val="18213D"/>
-                </a:solidFill>
-                <a:latin typeface="微软雅黑"/>
-                <a:ea typeface="微软雅黑"/>
-                <a:cs typeface="微软雅黑"/>
-              </a:defRPr>
-            </a:pPr>
-            <a:r>
-              <a:rPr sz="1425" b="0">
-                <a:solidFill>
-                  <a:srgbClr val="18213D"/>
-                </a:solidFill>
-                <a:latin typeface="微软雅黑"/>
-                <a:ea typeface="微软雅黑"/>
-                <a:cs typeface="微软雅黑"/>
-              </a:rPr>
-              <a:t>执行</a:t>
+              <a:defRPr sz="1200" b="1">
+                <a:solidFill>
+                  <a:srgbClr val="334155"/>
+                </a:solidFill>
+                <a:latin typeface="微软雅黑"/>
+                <a:ea typeface="微软雅黑"/>
+                <a:cs typeface="微软雅黑"/>
+              </a:defRPr>
+            </a:pPr>
+            <a:r>
+              <a:rPr sz="1200" b="1">
+                <a:solidFill>
+                  <a:srgbClr val="334155"/>
+                </a:solidFill>
+                <a:latin typeface="微软雅黑"/>
+                <a:ea typeface="微软雅黑"/>
+                <a:cs typeface="微软雅黑"/>
+              </a:rPr>
+              <a:t>Manager → Collector</a:t>
             </a:r>
           </a:p>
           <a:p xmlns:a="http://schemas.openxmlformats.org/drawingml/2006/main">
             <a:pPr algn="l">
               <a:buNone/>
-              <a:defRPr sz="1425" b="0">
-                <a:solidFill>
-                  <a:srgbClr val="18213D"/>
-                </a:solidFill>
-                <a:latin typeface="微软雅黑"/>
-                <a:ea typeface="微软雅黑"/>
-                <a:cs typeface="微软雅黑"/>
-              </a:defRPr>
-            </a:pPr>
-            <a:r>
-              <a:rPr sz="1425" b="0">
-                <a:solidFill>
-                  <a:srgbClr val="18213D"/>
-                </a:solidFill>
-                <a:latin typeface="微软雅黑"/>
-                <a:ea typeface="微软雅黑"/>
-                <a:cs typeface="微软雅黑"/>
-              </a:rPr>
-              <a:t>Runner 未接受</a:t>
+              <a:defRPr sz="1200" b="1">
+                <a:solidFill>
+                  <a:srgbClr val="334155"/>
+                </a:solidFill>
+                <a:latin typeface="微软雅黑"/>
+                <a:ea typeface="微软雅黑"/>
+                <a:cs typeface="微软雅黑"/>
+              </a:defRPr>
+            </a:pPr>
+            <a:r>
+              <a:rPr sz="1200" b="1">
+                <a:solidFill>
+                  <a:srgbClr val="334155"/>
+                </a:solidFill>
+                <a:latin typeface="微软雅黑"/>
+                <a:ea typeface="微软雅黑"/>
+                <a:cs typeface="微软雅黑"/>
+              </a:rPr>
+              <a:t>task_accepted_dispatched</a:t>
             </a:r>
           </a:p>
           <a:p xmlns:a="http://schemas.openxmlformats.org/drawingml/2006/main">
             <a:pPr algn="l">
               <a:buNone/>
-              <a:defRPr sz="1425" b="0">
-                <a:solidFill>
-                  <a:srgbClr val="18213D"/>
-                </a:solidFill>
-                <a:latin typeface="微软雅黑"/>
-                <a:ea typeface="微软雅黑"/>
-                <a:cs typeface="微软雅黑"/>
-              </a:defRPr>
-            </a:pPr>
-            <a:r>
-              <a:rPr sz="1425" b="0">
-                <a:solidFill>
-                  <a:srgbClr val="18213D"/>
-                </a:solidFill>
-                <a:latin typeface="微软雅黑"/>
-                <a:ea typeface="微软雅黑"/>
-                <a:cs typeface="微软雅黑"/>
-              </a:rPr>
-              <a:t>越权计划</a:t>
+              <a:defRPr sz="1200" b="1">
+                <a:solidFill>
+                  <a:srgbClr val="334155"/>
+                </a:solidFill>
+                <a:latin typeface="微软雅黑"/>
+                <a:ea typeface="微软雅黑"/>
+                <a:cs typeface="微软雅黑"/>
+              </a:defRPr>
+            </a:pPr>
+            <a:r>
+              <a:rPr sz="1200" b="1">
+                <a:solidFill>
+                  <a:srgbClr val="334155"/>
+                </a:solidFill>
+                <a:latin typeface="微软雅黑"/>
+                <a:ea typeface="微软雅黑"/>
+                <a:cs typeface="微软雅黑"/>
+              </a:rPr>
+              <a:t>16:52:40Z</a:t>
             </a:r>
           </a:p>
         </p:txBody>
@@ -8492,73 +7459,73 @@
           <a:p xmlns:a="http://schemas.openxmlformats.org/drawingml/2006/main">
             <a:pPr algn="l">
               <a:buNone/>
-              <a:defRPr sz="1425" b="0">
-                <a:solidFill>
-                  <a:srgbClr val="18213D"/>
-                </a:solidFill>
-                <a:latin typeface="微软雅黑"/>
-                <a:ea typeface="微软雅黑"/>
-                <a:cs typeface="微软雅黑"/>
-              </a:defRPr>
-            </a:pPr>
-            <a:r>
-              <a:rPr sz="1425" b="0">
-                <a:solidFill>
-                  <a:srgbClr val="18213D"/>
-                </a:solidFill>
-                <a:latin typeface="微软雅黑"/>
-                <a:ea typeface="微软雅黑"/>
-                <a:cs typeface="微软雅黑"/>
-              </a:rPr>
-              <a:t>Evidence</a:t>
+              <a:defRPr sz="1125" b="1">
+                <a:solidFill>
+                  <a:srgbClr val="334155"/>
+                </a:solidFill>
+                <a:latin typeface="微软雅黑"/>
+                <a:ea typeface="微软雅黑"/>
+                <a:cs typeface="微软雅黑"/>
+              </a:defRPr>
+            </a:pPr>
+            <a:r>
+              <a:rPr sz="1125" b="1">
+                <a:solidFill>
+                  <a:srgbClr val="334155"/>
+                </a:solidFill>
+                <a:latin typeface="微软雅黑"/>
+                <a:ea typeface="微软雅黑"/>
+                <a:cs typeface="微软雅黑"/>
+              </a:rPr>
+              <a:t>Analyst → Planner</a:t>
             </a:r>
           </a:p>
           <a:p xmlns:a="http://schemas.openxmlformats.org/drawingml/2006/main">
             <a:pPr algn="l">
               <a:buNone/>
-              <a:defRPr sz="1425" b="0">
-                <a:solidFill>
-                  <a:srgbClr val="18213D"/>
-                </a:solidFill>
-                <a:latin typeface="微软雅黑"/>
-                <a:ea typeface="微软雅黑"/>
-                <a:cs typeface="微软雅黑"/>
-              </a:defRPr>
-            </a:pPr>
-            <a:r>
-              <a:rPr sz="1425" b="0">
-                <a:solidFill>
-                  <a:srgbClr val="18213D"/>
-                </a:solidFill>
-                <a:latin typeface="微软雅黑"/>
-                <a:ea typeface="微软雅黑"/>
-                <a:cs typeface="微软雅黑"/>
-              </a:rPr>
-              <a:t>before == after</a:t>
+              <a:defRPr sz="1125" b="1">
+                <a:solidFill>
+                  <a:srgbClr val="334155"/>
+                </a:solidFill>
+                <a:latin typeface="微软雅黑"/>
+                <a:ea typeface="微软雅黑"/>
+                <a:cs typeface="微软雅黑"/>
+              </a:defRPr>
+            </a:pPr>
+            <a:r>
+              <a:rPr sz="1125" b="1">
+                <a:solidFill>
+                  <a:srgbClr val="334155"/>
+                </a:solidFill>
+                <a:latin typeface="微软雅黑"/>
+                <a:ea typeface="微软雅黑"/>
+                <a:cs typeface="微软雅黑"/>
+              </a:rPr>
+              <a:t>hypotheses_ranked → plan</a:t>
             </a:r>
           </a:p>
           <a:p xmlns:a="http://schemas.openxmlformats.org/drawingml/2006/main">
             <a:pPr algn="l">
               <a:buNone/>
-              <a:defRPr sz="1425" b="0">
-                <a:solidFill>
-                  <a:srgbClr val="18213D"/>
-                </a:solidFill>
-                <a:latin typeface="微软雅黑"/>
-                <a:ea typeface="微软雅黑"/>
-                <a:cs typeface="微软雅黑"/>
-              </a:defRPr>
-            </a:pPr>
-            <a:r>
-              <a:rPr sz="1425" b="0">
-                <a:solidFill>
-                  <a:srgbClr val="18213D"/>
-                </a:solidFill>
-                <a:latin typeface="微软雅黑"/>
-                <a:ea typeface="微软雅黑"/>
-                <a:cs typeface="微软雅黑"/>
-              </a:rPr>
-              <a:t>workspace unchanged</a:t>
+              <a:defRPr sz="1125" b="1">
+                <a:solidFill>
+                  <a:srgbClr val="334155"/>
+                </a:solidFill>
+                <a:latin typeface="微软雅黑"/>
+                <a:ea typeface="微软雅黑"/>
+                <a:cs typeface="微软雅黑"/>
+              </a:defRPr>
+            </a:pPr>
+            <a:r>
+              <a:rPr sz="1125" b="1">
+                <a:solidFill>
+                  <a:srgbClr val="334155"/>
+                </a:solidFill>
+                <a:latin typeface="微软雅黑"/>
+                <a:ea typeface="微软雅黑"/>
+                <a:cs typeface="微软雅黑"/>
+              </a:rPr>
+              <a:t>16:59:45Z / 17:04:45Z</a:t>
             </a:r>
           </a:p>
         </p:txBody>
@@ -8605,73 +7572,73 @@
           <a:p xmlns:a="http://schemas.openxmlformats.org/drawingml/2006/main">
             <a:pPr algn="l">
               <a:buNone/>
-              <a:defRPr sz="1425" b="0">
-                <a:solidFill>
-                  <a:srgbClr val="18213D"/>
-                </a:solidFill>
-                <a:latin typeface="微软雅黑"/>
-                <a:ea typeface="微软雅黑"/>
-                <a:cs typeface="微软雅黑"/>
-              </a:defRPr>
-            </a:pPr>
-            <a:r>
-              <a:rPr sz="1425" b="0">
-                <a:solidFill>
-                  <a:srgbClr val="18213D"/>
-                </a:solidFill>
-                <a:latin typeface="微软雅黑"/>
-                <a:ea typeface="微软雅黑"/>
-                <a:cs typeface="微软雅黑"/>
-              </a:rPr>
-              <a:t>Audit</a:t>
+              <a:defRPr sz="1125" b="1">
+                <a:solidFill>
+                  <a:srgbClr val="334155"/>
+                </a:solidFill>
+                <a:latin typeface="微软雅黑"/>
+                <a:ea typeface="微软雅黑"/>
+                <a:cs typeface="微软雅黑"/>
+              </a:defRPr>
+            </a:pPr>
+            <a:r>
+              <a:rPr sz="1125" b="1">
+                <a:solidFill>
+                  <a:srgbClr val="334155"/>
+                </a:solidFill>
+                <a:latin typeface="微软雅黑"/>
+                <a:ea typeface="微软雅黑"/>
+                <a:cs typeface="微软雅黑"/>
+              </a:rPr>
+              <a:t>Executor → Auditor</a:t>
             </a:r>
           </a:p>
           <a:p xmlns:a="http://schemas.openxmlformats.org/drawingml/2006/main">
             <a:pPr algn="l">
               <a:buNone/>
-              <a:defRPr sz="1425" b="0">
-                <a:solidFill>
-                  <a:srgbClr val="18213D"/>
-                </a:solidFill>
-                <a:latin typeface="微软雅黑"/>
-                <a:ea typeface="微软雅黑"/>
-                <a:cs typeface="微软雅黑"/>
-              </a:defRPr>
-            </a:pPr>
-            <a:r>
-              <a:rPr sz="1425" b="0">
-                <a:solidFill>
-                  <a:srgbClr val="18213D"/>
-                </a:solidFill>
-                <a:latin typeface="微软雅黑"/>
-                <a:ea typeface="微软雅黑"/>
-                <a:cs typeface="微软雅黑"/>
-              </a:rPr>
-              <a:t>independent verdict</a:t>
+              <a:defRPr sz="1125" b="1">
+                <a:solidFill>
+                  <a:srgbClr val="334155"/>
+                </a:solidFill>
+                <a:latin typeface="微软雅黑"/>
+                <a:ea typeface="微软雅黑"/>
+                <a:cs typeface="微软雅黑"/>
+              </a:defRPr>
+            </a:pPr>
+            <a:r>
+              <a:rPr sz="1125" b="1">
+                <a:solidFill>
+                  <a:srgbClr val="334155"/>
+                </a:solidFill>
+                <a:latin typeface="微软雅黑"/>
+                <a:ea typeface="微软雅黑"/>
+                <a:cs typeface="微软雅黑"/>
+              </a:rPr>
+              <a:t>run_executed → verification</a:t>
             </a:r>
           </a:p>
           <a:p xmlns:a="http://schemas.openxmlformats.org/drawingml/2006/main">
             <a:pPr algn="l">
               <a:buNone/>
-              <a:defRPr sz="1425" b="0">
-                <a:solidFill>
-                  <a:srgbClr val="18213D"/>
-                </a:solidFill>
-                <a:latin typeface="微软雅黑"/>
-                <a:ea typeface="微软雅黑"/>
-                <a:cs typeface="微软雅黑"/>
-              </a:defRPr>
-            </a:pPr>
-            <a:r>
-              <a:rPr sz="1425" b="0">
-                <a:solidFill>
-                  <a:srgbClr val="18213D"/>
-                </a:solidFill>
-                <a:latin typeface="微软雅黑"/>
-                <a:ea typeface="微软雅黑"/>
-                <a:cs typeface="微软雅黑"/>
-              </a:rPr>
-              <a:t>rollback verified</a:t>
+              <a:defRPr sz="1125" b="1">
+                <a:solidFill>
+                  <a:srgbClr val="334155"/>
+                </a:solidFill>
+                <a:latin typeface="微软雅黑"/>
+                <a:ea typeface="微软雅黑"/>
+                <a:cs typeface="微软雅黑"/>
+              </a:defRPr>
+            </a:pPr>
+            <a:r>
+              <a:rPr sz="1125" b="1">
+                <a:solidFill>
+                  <a:srgbClr val="334155"/>
+                </a:solidFill>
+                <a:latin typeface="微软雅黑"/>
+                <a:ea typeface="微软雅黑"/>
+                <a:cs typeface="微软雅黑"/>
+              </a:rPr>
+              <a:t>17:11:32Z / 17:13:50Z</a:t>
             </a:r>
           </a:p>
         </p:txBody>
@@ -8706,7 +7673,7 @@
         </p:spPr>
         <p:txBody>
           <a:bodyPr xmlns:a="http://schemas.openxmlformats.org/drawingml/2006/main" lIns="133350" tIns="76200" rIns="133350" bIns="76200" anchor="ctr">
-            <a:normAutofit fontScale="100000"/>
+            <a:normAutofit fontScale="68246"/>
           </a:bodyPr>
           <a:lstStyle xmlns:a="http://schemas.openxmlformats.org/drawingml/2006/main"/>
           <a:p xmlns:a="http://schemas.openxmlformats.org/drawingml/2006/main">
@@ -8730,7 +7697,7 @@
                 <a:ea typeface="微软雅黑"/>
                 <a:cs typeface="微软雅黑"/>
               </a:rPr>
-              <a:t>POLICY_VIOLATION / ROLLED_BACK</a:t>
+              <a:t>CHAIN_OK · 7 entries · RESOLVED · 历史 Trace 不含 runtime skill_id event</a:t>
             </a:r>
           </a:p>
         </p:txBody>
@@ -8804,7 +7771,7 @@
                 <a:ea typeface="微软雅黑"/>
                 <a:cs typeface="微软雅黑"/>
               </a:rPr>
-              <a:t>08 · Trust Evaluation Suite</a:t>
+              <a:t>12 · Trust Evaluation Suite</a:t>
             </a:r>
             <a:endParaRPr sz="1200"/>
           </a:p>
@@ -8850,7 +7817,7 @@
                 <a:ea typeface="微软雅黑"/>
                 <a:cs typeface="微软雅黑"/>
               </a:rPr>
-              <a:t>10 个治理案例检验四项信任控制</a:t>
+              <a:t>10 个治理案例与 Oracle 全部一致</a:t>
             </a:r>
             <a:endParaRPr sz="2900"/>
           </a:p>
@@ -8892,7 +7859,7 @@
                 <a:ea typeface="微软雅黑"/>
                 <a:cs typeface="微软雅黑"/>
               </a:rPr>
-              <a:t>输入与 Oracle 分离；执行侧不读取期望终态。该 Suite 不衡量通用 Agent 推理。</a:t>
+              <a:t>输入与 Oracle 隔离；Suite 只验证治理规则，不衡量通用 Agent 推理或生产安全性。</a:t>
             </a:r>
             <a:endParaRPr>
               <a:latin typeface="微软雅黑"/>
@@ -8993,7 +7960,7 @@
         </p:spPr>
         <p:txBody>
           <a:bodyPr xmlns:a="http://schemas.openxmlformats.org/drawingml/2006/main" lIns="133350" tIns="76200" rIns="133350" bIns="76200" anchor="ctr">
-            <a:normAutofit fontScale="100000"/>
+            <a:normAutofit fontScale="53571"/>
           </a:bodyPr>
           <a:lstStyle xmlns:a="http://schemas.openxmlformats.org/drawingml/2006/main"/>
           <a:p xmlns:a="http://schemas.openxmlformats.org/drawingml/2006/main">
@@ -9017,7 +7984,31 @@
                 <a:ea typeface="微软雅黑"/>
                 <a:cs typeface="微软雅黑"/>
               </a:rPr>
-              <a:t>100%</a:t>
+              <a:t>10</a:t>
+            </a:r>
+          </a:p>
+          <a:p xmlns:a="http://schemas.openxmlformats.org/drawingml/2006/main">
+            <a:pPr algn="ctr">
+              <a:buNone/>
+              <a:defRPr sz="3150" b="1">
+                <a:solidFill>
+                  <a:srgbClr val="C44747"/>
+                </a:solidFill>
+                <a:latin typeface="微软雅黑"/>
+                <a:ea typeface="微软雅黑"/>
+                <a:cs typeface="微软雅黑"/>
+              </a:defRPr>
+            </a:pPr>
+            <a:r>
+              <a:rPr sz="3150" b="1">
+                <a:solidFill>
+                  <a:srgbClr val="C44747"/>
+                </a:solidFill>
+                <a:latin typeface="微软雅黑"/>
+                <a:ea typeface="微软雅黑"/>
+                <a:cs typeface="微软雅黑"/>
+              </a:rPr>
+              <a:t>CASES</a:t>
             </a:r>
           </a:p>
         </p:txBody>
@@ -9087,7 +8078,7 @@
         </p:spPr>
         <p:txBody>
           <a:bodyPr xmlns:a="http://schemas.openxmlformats.org/drawingml/2006/main" lIns="133350" tIns="76200" rIns="133350" bIns="76200" anchor="ctr">
-            <a:normAutofit fontScale="100000"/>
+            <a:normAutofit fontScale="53571"/>
           </a:bodyPr>
           <a:lstStyle xmlns:a="http://schemas.openxmlformats.org/drawingml/2006/main"/>
           <a:p xmlns:a="http://schemas.openxmlformats.org/drawingml/2006/main">
@@ -9111,7 +8102,31 @@
                 <a:ea typeface="微软雅黑"/>
                 <a:cs typeface="微软雅黑"/>
               </a:rPr>
-              <a:t>0%</a:t>
+              <a:t>10</a:t>
+            </a:r>
+          </a:p>
+          <a:p xmlns:a="http://schemas.openxmlformats.org/drawingml/2006/main">
+            <a:pPr algn="ctr">
+              <a:buNone/>
+              <a:defRPr sz="3150" b="1">
+                <a:solidFill>
+                  <a:srgbClr val="13A36D"/>
+                </a:solidFill>
+                <a:latin typeface="微软雅黑"/>
+                <a:ea typeface="微软雅黑"/>
+                <a:cs typeface="微软雅黑"/>
+              </a:defRPr>
+            </a:pPr>
+            <a:r>
+              <a:rPr sz="3150" b="1">
+                <a:solidFill>
+                  <a:srgbClr val="13A36D"/>
+                </a:solidFill>
+                <a:latin typeface="微软雅黑"/>
+                <a:ea typeface="微软雅黑"/>
+                <a:cs typeface="微软雅黑"/>
+              </a:rPr>
+              <a:t>MATCH</a:t>
             </a:r>
           </a:p>
         </p:txBody>
@@ -9170,7 +8185,7 @@
                 <a:ea typeface="微软雅黑"/>
                 <a:cs typeface="微软雅黑"/>
               </a:rPr>
-              <a:t>policy / evidence / audit          false resolution</a:t>
+              <a:t>fixed governance inputs            sealed Oracle decisions</a:t>
             </a:r>
           </a:p>
         </p:txBody>
@@ -9229,7 +8244,7 @@
                 <a:ea typeface="微软雅黑"/>
                 <a:cs typeface="微软雅黑"/>
               </a:rPr>
-              <a:t>10 cases · 2 legal · 8 fail-closed</a:t>
+              <a:t>2 legal cases · 8 cases that must not resolve</a:t>
             </a:r>
           </a:p>
         </p:txBody>
@@ -9276,19 +8291,19 @@
           <a:p xmlns:a="http://schemas.openxmlformats.org/drawingml/2006/main">
             <a:pPr algn="l">
               <a:buNone/>
-              <a:defRPr sz="1425" b="0">
-                <a:solidFill>
-                  <a:srgbClr val="18213D"/>
-                </a:solidFill>
-                <a:latin typeface="微软雅黑"/>
-                <a:ea typeface="微软雅黑"/>
-                <a:cs typeface="微软雅黑"/>
-              </a:defRPr>
-            </a:pPr>
-            <a:r>
-              <a:rPr sz="1425" b="0">
-                <a:solidFill>
-                  <a:srgbClr val="18213D"/>
+              <a:defRPr sz="1200" b="1">
+                <a:solidFill>
+                  <a:srgbClr val="334155"/>
+                </a:solidFill>
+                <a:latin typeface="微软雅黑"/>
+                <a:ea typeface="微软雅黑"/>
+                <a:cs typeface="微软雅黑"/>
+              </a:defRPr>
+            </a:pPr>
+            <a:r>
+              <a:rPr sz="1200" b="1">
+                <a:solidFill>
+                  <a:srgbClr val="334155"/>
                 </a:solidFill>
                 <a:latin typeface="微软雅黑"/>
                 <a:ea typeface="微软雅黑"/>
@@ -9300,49 +8315,49 @@
           <a:p xmlns:a="http://schemas.openxmlformats.org/drawingml/2006/main">
             <a:pPr algn="l">
               <a:buNone/>
-              <a:defRPr sz="1425" b="0">
-                <a:solidFill>
-                  <a:srgbClr val="18213D"/>
-                </a:solidFill>
-                <a:latin typeface="微软雅黑"/>
-                <a:ea typeface="微软雅黑"/>
-                <a:cs typeface="微软雅黑"/>
-              </a:defRPr>
-            </a:pPr>
-            <a:r>
-              <a:rPr sz="1425" b="0">
-                <a:solidFill>
-                  <a:srgbClr val="18213D"/>
-                </a:solidFill>
-                <a:latin typeface="微软雅黑"/>
-                <a:ea typeface="微软雅黑"/>
-                <a:cs typeface="微软雅黑"/>
-              </a:rPr>
-              <a:t>100% (2/2)</a:t>
+              <a:defRPr sz="1200" b="1">
+                <a:solidFill>
+                  <a:srgbClr val="334155"/>
+                </a:solidFill>
+                <a:latin typeface="微软雅黑"/>
+                <a:ea typeface="微软雅黑"/>
+                <a:cs typeface="微软雅黑"/>
+              </a:defRPr>
+            </a:pPr>
+            <a:r>
+              <a:rPr sz="1200" b="1">
+                <a:solidFill>
+                  <a:srgbClr val="334155"/>
+                </a:solidFill>
+                <a:latin typeface="微软雅黑"/>
+                <a:ea typeface="微软雅黑"/>
+                <a:cs typeface="微软雅黑"/>
+              </a:rPr>
+              <a:t>2/2 correctly rejected</a:t>
             </a:r>
           </a:p>
           <a:p xmlns:a="http://schemas.openxmlformats.org/drawingml/2006/main">
             <a:pPr algn="l">
               <a:buNone/>
-              <a:defRPr sz="1425" b="0">
-                <a:solidFill>
-                  <a:srgbClr val="18213D"/>
-                </a:solidFill>
-                <a:latin typeface="微软雅黑"/>
-                <a:ea typeface="微软雅黑"/>
-                <a:cs typeface="微软雅黑"/>
-              </a:defRPr>
-            </a:pPr>
-            <a:r>
-              <a:rPr sz="1425" b="0">
-                <a:solidFill>
-                  <a:srgbClr val="18213D"/>
-                </a:solidFill>
-                <a:latin typeface="微软雅黑"/>
-                <a:ea typeface="微软雅黑"/>
-                <a:cs typeface="微软雅黑"/>
-              </a:rPr>
-              <a:t>blocked before run</a:t>
+              <a:defRPr sz="1200" b="1">
+                <a:solidFill>
+                  <a:srgbClr val="334155"/>
+                </a:solidFill>
+                <a:latin typeface="微软雅黑"/>
+                <a:ea typeface="微软雅黑"/>
+                <a:cs typeface="微软雅黑"/>
+              </a:defRPr>
+            </a:pPr>
+            <a:r>
+              <a:rPr sz="1200" b="1">
+                <a:solidFill>
+                  <a:srgbClr val="334155"/>
+                </a:solidFill>
+                <a:latin typeface="微软雅黑"/>
+                <a:ea typeface="微软雅黑"/>
+                <a:cs typeface="微软雅黑"/>
+              </a:rPr>
+              <a:t>before controlled run</a:t>
             </a:r>
           </a:p>
         </p:txBody>
@@ -9389,73 +8404,73 @@
           <a:p xmlns:a="http://schemas.openxmlformats.org/drawingml/2006/main">
             <a:pPr algn="l">
               <a:buNone/>
-              <a:defRPr sz="1425" b="0">
-                <a:solidFill>
-                  <a:srgbClr val="18213D"/>
-                </a:solidFill>
-                <a:latin typeface="微软雅黑"/>
-                <a:ea typeface="微软雅黑"/>
-                <a:cs typeface="微软雅黑"/>
-              </a:defRPr>
-            </a:pPr>
-            <a:r>
-              <a:rPr sz="1425" b="0">
-                <a:solidFill>
-                  <a:srgbClr val="18213D"/>
-                </a:solidFill>
-                <a:latin typeface="微软雅黑"/>
-                <a:ea typeface="微软雅黑"/>
-                <a:cs typeface="微软雅黑"/>
-              </a:rPr>
-              <a:t>Evidence complete</a:t>
+              <a:defRPr sz="1200" b="1">
+                <a:solidFill>
+                  <a:srgbClr val="334155"/>
+                </a:solidFill>
+                <a:latin typeface="微软雅黑"/>
+                <a:ea typeface="微软雅黑"/>
+                <a:cs typeface="微软雅黑"/>
+              </a:defRPr>
+            </a:pPr>
+            <a:r>
+              <a:rPr sz="1200" b="1">
+                <a:solidFill>
+                  <a:srgbClr val="334155"/>
+                </a:solidFill>
+                <a:latin typeface="微软雅黑"/>
+                <a:ea typeface="微软雅黑"/>
+                <a:cs typeface="微软雅黑"/>
+              </a:rPr>
+              <a:t>Evidence classification</a:t>
             </a:r>
           </a:p>
           <a:p xmlns:a="http://schemas.openxmlformats.org/drawingml/2006/main">
             <a:pPr algn="l">
               <a:buNone/>
-              <a:defRPr sz="1425" b="0">
-                <a:solidFill>
-                  <a:srgbClr val="18213D"/>
-                </a:solidFill>
-                <a:latin typeface="微软雅黑"/>
-                <a:ea typeface="微软雅黑"/>
-                <a:cs typeface="微软雅黑"/>
-              </a:defRPr>
-            </a:pPr>
-            <a:r>
-              <a:rPr sz="1425" b="0">
-                <a:solidFill>
-                  <a:srgbClr val="18213D"/>
-                </a:solidFill>
-                <a:latin typeface="微软雅黑"/>
-                <a:ea typeface="微软雅黑"/>
-                <a:cs typeface="微软雅黑"/>
-              </a:rPr>
-              <a:t>100% (10/10)</a:t>
+              <a:defRPr sz="1200" b="1">
+                <a:solidFill>
+                  <a:srgbClr val="334155"/>
+                </a:solidFill>
+                <a:latin typeface="微软雅黑"/>
+                <a:ea typeface="微软雅黑"/>
+                <a:cs typeface="微软雅黑"/>
+              </a:defRPr>
+            </a:pPr>
+            <a:r>
+              <a:rPr sz="1200" b="1">
+                <a:solidFill>
+                  <a:srgbClr val="334155"/>
+                </a:solidFill>
+                <a:latin typeface="微软雅黑"/>
+                <a:ea typeface="微软雅黑"/>
+                <a:cs typeface="微软雅黑"/>
+              </a:rPr>
+              <a:t>10/10 matched Oracle</a:t>
             </a:r>
           </a:p>
           <a:p xmlns:a="http://schemas.openxmlformats.org/drawingml/2006/main">
             <a:pPr algn="l">
               <a:buNone/>
-              <a:defRPr sz="1425" b="0">
-                <a:solidFill>
-                  <a:srgbClr val="18213D"/>
-                </a:solidFill>
-                <a:latin typeface="微软雅黑"/>
-                <a:ea typeface="微软雅黑"/>
-                <a:cs typeface="微软雅黑"/>
-              </a:defRPr>
-            </a:pPr>
-            <a:r>
-              <a:rPr sz="1425" b="0">
-                <a:solidFill>
-                  <a:srgbClr val="18213D"/>
-                </a:solidFill>
-                <a:latin typeface="微软雅黑"/>
-                <a:ea typeface="微软雅黑"/>
-                <a:cs typeface="微软雅黑"/>
-              </a:rPr>
-              <a:t>classification</a:t>
+              <a:defRPr sz="1200" b="1">
+                <a:solidFill>
+                  <a:srgbClr val="334155"/>
+                </a:solidFill>
+                <a:latin typeface="微软雅黑"/>
+                <a:ea typeface="微软雅黑"/>
+                <a:cs typeface="微软雅黑"/>
+              </a:defRPr>
+            </a:pPr>
+            <a:r>
+              <a:rPr sz="1200" b="1">
+                <a:solidFill>
+                  <a:srgbClr val="334155"/>
+                </a:solidFill>
+                <a:latin typeface="微软雅黑"/>
+                <a:ea typeface="微软雅黑"/>
+                <a:cs typeface="微软雅黑"/>
+              </a:rPr>
+              <a:t>complete vs incomplete</a:t>
             </a:r>
           </a:p>
         </p:txBody>
@@ -9502,19 +8517,19 @@
           <a:p xmlns:a="http://schemas.openxmlformats.org/drawingml/2006/main">
             <a:pPr algn="l">
               <a:buNone/>
-              <a:defRPr sz="1425" b="0">
-                <a:solidFill>
-                  <a:srgbClr val="18213D"/>
-                </a:solidFill>
-                <a:latin typeface="微软雅黑"/>
-                <a:ea typeface="微软雅黑"/>
-                <a:cs typeface="微软雅黑"/>
-              </a:defRPr>
-            </a:pPr>
-            <a:r>
-              <a:rPr sz="1425" b="0">
-                <a:solidFill>
-                  <a:srgbClr val="18213D"/>
+              <a:defRPr sz="1200" b="1">
+                <a:solidFill>
+                  <a:srgbClr val="334155"/>
+                </a:solidFill>
+                <a:latin typeface="微软雅黑"/>
+                <a:ea typeface="微软雅黑"/>
+                <a:cs typeface="微软雅黑"/>
+              </a:defRPr>
+            </a:pPr>
+            <a:r>
+              <a:rPr sz="1200" b="1">
+                <a:solidFill>
+                  <a:srgbClr val="334155"/>
                 </a:solidFill>
                 <a:latin typeface="微软雅黑"/>
                 <a:ea typeface="微软雅黑"/>
@@ -9526,49 +8541,49 @@
           <a:p xmlns:a="http://schemas.openxmlformats.org/drawingml/2006/main">
             <a:pPr algn="l">
               <a:buNone/>
-              <a:defRPr sz="1425" b="0">
-                <a:solidFill>
-                  <a:srgbClr val="18213D"/>
-                </a:solidFill>
-                <a:latin typeface="微软雅黑"/>
-                <a:ea typeface="微软雅黑"/>
-                <a:cs typeface="微软雅黑"/>
-              </a:defRPr>
-            </a:pPr>
-            <a:r>
-              <a:rPr sz="1425" b="0">
-                <a:solidFill>
-                  <a:srgbClr val="18213D"/>
-                </a:solidFill>
-                <a:latin typeface="微软雅黑"/>
-                <a:ea typeface="微软雅黑"/>
-                <a:cs typeface="微软雅黑"/>
-              </a:rPr>
-              <a:t>0% (0/8)</a:t>
+              <a:defRPr sz="1200" b="1">
+                <a:solidFill>
+                  <a:srgbClr val="334155"/>
+                </a:solidFill>
+                <a:latin typeface="微软雅黑"/>
+                <a:ea typeface="微软雅黑"/>
+                <a:cs typeface="微软雅黑"/>
+              </a:defRPr>
+            </a:pPr>
+            <a:r>
+              <a:rPr sz="1200" b="1">
+                <a:solidFill>
+                  <a:srgbClr val="334155"/>
+                </a:solidFill>
+                <a:latin typeface="微软雅黑"/>
+                <a:ea typeface="微软雅黑"/>
+                <a:cs typeface="微软雅黑"/>
+              </a:rPr>
+              <a:t>0 of 8 non-resolved cases</a:t>
             </a:r>
           </a:p>
           <a:p xmlns:a="http://schemas.openxmlformats.org/drawingml/2006/main">
             <a:pPr algn="l">
               <a:buNone/>
-              <a:defRPr sz="1425" b="0">
-                <a:solidFill>
-                  <a:srgbClr val="18213D"/>
-                </a:solidFill>
-                <a:latin typeface="微软雅黑"/>
-                <a:ea typeface="微软雅黑"/>
-                <a:cs typeface="微软雅黑"/>
-              </a:defRPr>
-            </a:pPr>
-            <a:r>
-              <a:rPr sz="1425" b="0">
-                <a:solidFill>
-                  <a:srgbClr val="18213D"/>
-                </a:solidFill>
-                <a:latin typeface="微软雅黑"/>
-                <a:ea typeface="微软雅黑"/>
-                <a:cs typeface="微软雅黑"/>
-              </a:rPr>
-              <a:t>non-resolved cases</a:t>
+              <a:defRPr sz="1200" b="1">
+                <a:solidFill>
+                  <a:srgbClr val="334155"/>
+                </a:solidFill>
+                <a:latin typeface="微软雅黑"/>
+                <a:ea typeface="微软雅黑"/>
+                <a:cs typeface="微软雅黑"/>
+              </a:defRPr>
+            </a:pPr>
+            <a:r>
+              <a:rPr sz="1200" b="1">
+                <a:solidFill>
+                  <a:srgbClr val="334155"/>
+                </a:solidFill>
+                <a:latin typeface="微软雅黑"/>
+                <a:ea typeface="微软雅黑"/>
+                <a:cs typeface="微软雅黑"/>
+              </a:rPr>
+              <a:t>were closed</a:t>
             </a:r>
           </a:p>
         </p:txBody>
@@ -9615,19 +8630,19 @@
           <a:p xmlns:a="http://schemas.openxmlformats.org/drawingml/2006/main">
             <a:pPr algn="l">
               <a:buNone/>
-              <a:defRPr sz="1425" b="0">
-                <a:solidFill>
-                  <a:srgbClr val="18213D"/>
-                </a:solidFill>
-                <a:latin typeface="微软雅黑"/>
-                <a:ea typeface="微软雅黑"/>
-                <a:cs typeface="微软雅黑"/>
-              </a:defRPr>
-            </a:pPr>
-            <a:r>
-              <a:rPr sz="1425" b="0">
-                <a:solidFill>
-                  <a:srgbClr val="18213D"/>
+              <a:defRPr sz="1200" b="1">
+                <a:solidFill>
+                  <a:srgbClr val="334155"/>
+                </a:solidFill>
+                <a:latin typeface="微软雅黑"/>
+                <a:ea typeface="微软雅黑"/>
+                <a:cs typeface="微软雅黑"/>
+              </a:defRPr>
+            </a:pPr>
+            <a:r>
+              <a:rPr sz="1200" b="1">
+                <a:solidFill>
+                  <a:srgbClr val="334155"/>
                 </a:solidFill>
                 <a:latin typeface="微软雅黑"/>
                 <a:ea typeface="微软雅黑"/>
@@ -9639,49 +8654,49 @@
           <a:p xmlns:a="http://schemas.openxmlformats.org/drawingml/2006/main">
             <a:pPr algn="l">
               <a:buNone/>
-              <a:defRPr sz="1425" b="0">
-                <a:solidFill>
-                  <a:srgbClr val="18213D"/>
-                </a:solidFill>
-                <a:latin typeface="微软雅黑"/>
-                <a:ea typeface="微软雅黑"/>
-                <a:cs typeface="微软雅黑"/>
-              </a:defRPr>
-            </a:pPr>
-            <a:r>
-              <a:rPr sz="1425" b="0">
-                <a:solidFill>
-                  <a:srgbClr val="18213D"/>
-                </a:solidFill>
-                <a:latin typeface="微软雅黑"/>
-                <a:ea typeface="微软雅黑"/>
-                <a:cs typeface="微软雅黑"/>
-              </a:rPr>
-              <a:t>100% (10/10)</a:t>
+              <a:defRPr sz="1200" b="1">
+                <a:solidFill>
+                  <a:srgbClr val="334155"/>
+                </a:solidFill>
+                <a:latin typeface="微软雅黑"/>
+                <a:ea typeface="微软雅黑"/>
+                <a:cs typeface="微软雅黑"/>
+              </a:defRPr>
+            </a:pPr>
+            <a:r>
+              <a:rPr sz="1200" b="1">
+                <a:solidFill>
+                  <a:srgbClr val="334155"/>
+                </a:solidFill>
+                <a:latin typeface="微软雅黑"/>
+                <a:ea typeface="微软雅黑"/>
+                <a:cs typeface="微软雅黑"/>
+              </a:rPr>
+              <a:t>10/10 decisions require</a:t>
             </a:r>
           </a:p>
           <a:p xmlns:a="http://schemas.openxmlformats.org/drawingml/2006/main">
             <a:pPr algn="l">
               <a:buNone/>
-              <a:defRPr sz="1425" b="0">
-                <a:solidFill>
-                  <a:srgbClr val="18213D"/>
-                </a:solidFill>
-                <a:latin typeface="微软雅黑"/>
-                <a:ea typeface="微软雅黑"/>
-                <a:cs typeface="微软雅黑"/>
-              </a:defRPr>
-            </a:pPr>
-            <a:r>
-              <a:rPr sz="1425" b="0">
-                <a:solidFill>
-                  <a:srgbClr val="18213D"/>
-                </a:solidFill>
-                <a:latin typeface="微软雅黑"/>
-                <a:ea typeface="微软雅黑"/>
-                <a:cs typeface="微软雅黑"/>
-              </a:rPr>
-              <a:t>accuracy</a:t>
+              <a:defRPr sz="1200" b="1">
+                <a:solidFill>
+                  <a:srgbClr val="334155"/>
+                </a:solidFill>
+                <a:latin typeface="微软雅黑"/>
+                <a:ea typeface="微软雅黑"/>
+                <a:cs typeface="微软雅黑"/>
+              </a:defRPr>
+            </a:pPr>
+            <a:r>
+              <a:rPr sz="1200" b="1">
+                <a:solidFill>
+                  <a:srgbClr val="334155"/>
+                </a:solidFill>
+                <a:latin typeface="微软雅黑"/>
+                <a:ea typeface="微软雅黑"/>
+                <a:cs typeface="微软雅黑"/>
+              </a:rPr>
+              <a:t>valid Auditor authority</a:t>
             </a:r>
           </a:p>
         </p:txBody>
@@ -9740,7 +8755,7 @@
                 <a:ea typeface="微软雅黑"/>
                 <a:cs typeface="微软雅黑"/>
               </a:rPr>
-              <a:t>治理规则 PASS · 不生成综合 Trust Score</a:t>
+              <a:t>10/10 Oracle match · 8 个非关闭案例无错误关闭</a:t>
             </a:r>
           </a:p>
         </p:txBody>
@@ -9814,7 +8829,7 @@
                 <a:ea typeface="微软雅黑"/>
                 <a:cs typeface="微软雅黑"/>
               </a:rPr>
-              <a:t>09 · 开源与工程规范</a:t>
+              <a:t>13 · Engineering Validation</a:t>
             </a:r>
             <a:endParaRPr sz="1200"/>
           </a:p>
@@ -9860,7 +8875,7 @@
                 <a:ea typeface="微软雅黑"/>
                 <a:cs typeface="微软雅黑"/>
               </a:rPr>
-              <a:t>源码可提交，Runner 镜像继续受许可证门禁</a:t>
+              <a:t>冻结版本的完成声明都有自动化证据</a:t>
             </a:r>
             <a:endParaRPr sz="2900"/>
           </a:p>
@@ -9902,7 +8917,7 @@
                 <a:ea typeface="微软雅黑"/>
                 <a:cs typeface="微软雅黑"/>
               </a:rPr>
-              <a:t>Apache-2.0、CI、SBOM、NOTICE 与证据校验分层公开。</a:t>
+              <a:t>代码、Evidence、Public Demo、只读边界与开源合规分别验证。</a:t>
             </a:r>
             <a:endParaRPr>
               <a:latin typeface="微软雅黑"/>
@@ -9966,7 +8981,7 @@
                 <a:ea typeface="微软雅黑"/>
                 <a:cs typeface="微软雅黑"/>
               </a:rPr>
-              <a:t>已完成</a:t>
+              <a:t>测试</a:t>
             </a:r>
           </a:p>
         </p:txBody>
@@ -10027,7 +9042,7 @@
                 <a:ea typeface="微软雅黑"/>
                 <a:cs typeface="微软雅黑"/>
               </a:rPr>
-              <a:t>Source / 7 Skills / Schema / 3 Evidence Bundles / CI / Public Demo</a:t>
+              <a:t>127 tests  ·  125 passed  ·  2 optional PyTorch skipped</a:t>
             </a:r>
           </a:p>
         </p:txBody>
@@ -10086,7 +9101,7 @@
                 <a:ea typeface="微软雅黑"/>
                 <a:cs typeface="微软雅黑"/>
               </a:rPr>
-              <a:t>入口</a:t>
+              <a:t>Evidence / Interface</a:t>
             </a:r>
           </a:p>
         </p:txBody>
@@ -10147,7 +9162,7 @@
                 <a:ea typeface="微软雅黑"/>
                 <a:cs typeface="微软雅黑"/>
               </a:rPr>
-              <a:t>jakiic.github.io/LabOps-Guard/     github.com/JAKIIC/LabOps-Guard</a:t>
+              <a:t>AT-002/003/004 SHA-256 PASS  ·  Public Demo fresh  ·  write methods 405</a:t>
             </a:r>
           </a:p>
         </p:txBody>
@@ -10206,7 +9221,7 @@
                 <a:ea typeface="微软雅黑"/>
                 <a:cs typeface="微软雅黑"/>
               </a:rPr>
-              <a:t>发布门禁</a:t>
+              <a:t>CI / Hygiene</a:t>
             </a:r>
           </a:p>
         </p:txBody>
@@ -10243,7 +9258,7 @@
         </p:spPr>
         <p:txBody>
           <a:bodyPr xmlns:a="http://schemas.openxmlformats.org/drawingml/2006/main" lIns="133350" tIns="76200" rIns="133350" bIns="76200" anchor="ctr">
-            <a:normAutofit fontScale="91270"/>
+            <a:normAutofit fontScale="100000"/>
           </a:bodyPr>
           <a:lstStyle xmlns:a="http://schemas.openxmlformats.org/drawingml/2006/main"/>
           <a:p xmlns:a="http://schemas.openxmlformats.org/drawingml/2006/main">
@@ -10267,79 +9282,11 @@
                 <a:ea typeface="微软雅黑"/>
                 <a:cs typeface="微软雅黑"/>
               </a:rPr>
-              <a:t>基础镜像条款 / Debian 源码义务 / NOTICE / final digest</a:t>
-            </a:r>
-          </a:p>
-          <a:p xmlns:a="http://schemas.openxmlformats.org/drawingml/2006/main">
-            <a:pPr algn="ctr">
-              <a:buNone/>
-              <a:defRPr sz="1575" b="0">
-                <a:solidFill>
-                  <a:srgbClr val="5C647A"/>
-                </a:solidFill>
-                <a:latin typeface="微软雅黑"/>
-                <a:ea typeface="微软雅黑"/>
-                <a:cs typeface="微软雅黑"/>
-              </a:defRPr>
-            </a:pPr>
-            <a:r>
-              <a:rPr sz="1575" b="0">
-                <a:solidFill>
-                  <a:srgbClr val="5C647A"/>
-                </a:solidFill>
-                <a:latin typeface="微软雅黑"/>
-                <a:ea typeface="微软雅黑"/>
-                <a:cs typeface="微软雅黑"/>
-              </a:rPr>
-              <a:t>未关闭前：不发镜像、不建 Tag / Release</a:t>
-            </a:r>
-          </a:p>
-        </p:txBody>
-      </p:sp>
-      <p:pic>
-        <p:nvPicPr>
-          <p:cNvPr id="56" name=""/>
-          <p:cNvPicPr>
-            <a:picLocks xmlns:a="http://schemas.openxmlformats.org/drawingml/2006/main" noChangeAspect="1"/>
-          </p:cNvPicPr>
-          <p:nvPr/>
-        </p:nvPicPr>
-        <p:blipFill>
-          <a:blip xmlns:r="http://schemas.openxmlformats.org/officeDocument/2006/relationships" xmlns:a="http://schemas.openxmlformats.org/drawingml/2006/main" r:embed="R47c1346aa6a14d28"/>
-          <a:stretch xmlns:a="http://schemas.openxmlformats.org/drawingml/2006/main"/>
-        </p:blipFill>
-        <p:spPr>
-          <a:xfrm xmlns:a="http://schemas.openxmlformats.org/drawingml/2006/main">
-            <a:off x="9858375" y="790575"/>
-            <a:ext cx="781050" cy="781050"/>
-          </a:xfrm>
-          <a:prstGeom xmlns:a="http://schemas.openxmlformats.org/drawingml/2006/main" prst="rect">
-            <a:avLst/>
-          </a:prstGeom>
-        </p:spPr>
-      </p:pic>
-      <p:pic>
-        <p:nvPicPr>
-          <p:cNvPr id="57" name=""/>
-          <p:cNvPicPr>
-            <a:picLocks xmlns:a="http://schemas.openxmlformats.org/drawingml/2006/main" noChangeAspect="1"/>
-          </p:cNvPicPr>
-          <p:nvPr/>
-        </p:nvPicPr>
-        <p:blipFill>
-          <a:blip xmlns:r="http://schemas.openxmlformats.org/officeDocument/2006/relationships" xmlns:a="http://schemas.openxmlformats.org/drawingml/2006/main" r:embed="R273781f896ad4e73"/>
-          <a:stretch xmlns:a="http://schemas.openxmlformats.org/drawingml/2006/main"/>
-        </p:blipFill>
-        <p:spPr>
-          <a:xfrm xmlns:a="http://schemas.openxmlformats.org/drawingml/2006/main">
-            <a:off x="10858500" y="790575"/>
-            <a:ext cx="781050" cy="781050"/>
-          </a:xfrm>
-          <a:prstGeom xmlns:a="http://schemas.openxmlformats.org/drawingml/2006/main" prst="rect">
-            <a:avLst/>
-          </a:prstGeom>
-        </p:spPr>
-      </p:pic>
+              <a:t>Windows/Linux CI  ·  sensitive scan PASS  ·  SBOM / NOTICE / License gates</a:t>
+            </a:r>
+          </a:p>
+        </p:txBody>
+      </p:sp>
     </p:spTree>
     <p:extLst>
       <p:ext uri="{BB962C8B-B14F-4D97-AF65-F5344CB8AC3E}">
@@ -10402,7 +9349,7 @@
                 <a:ea typeface="微软雅黑"/>
                 <a:cs typeface="微软雅黑"/>
               </a:rPr>
-              <a:t>10 · 当前限制与路线</a:t>
+              <a:t>14 · Open Source / Boundary / Roadmap</a:t>
             </a:r>
             <a:endParaRPr sz="1200"/>
           </a:p>
@@ -10448,7 +9395,7 @@
                 <a:ea typeface="微软雅黑"/>
                 <a:cs typeface="微软雅黑"/>
               </a:rPr>
-              <a:t>当前是可信单机 Runtime，生产化边界清晰</a:t>
+              <a:t>开放复用，边界同样明确</a:t>
             </a:r>
             <a:endParaRPr sz="2900"/>
           </a:p>
@@ -10490,7 +9437,7 @@
                 <a:ea typeface="微软雅黑"/>
                 <a:cs typeface="微软雅黑"/>
               </a:rPr>
-              <a:t>优先守住已验证闭环，不堆叠与复赛无关的平台能力。</a:t>
+              <a:t>Apache-2.0 源码、7 Skills、Schema、Evidence、CI 与 Public Demo 支持第三方复核和复用。</a:t>
             </a:r>
             <a:endParaRPr>
               <a:latin typeface="微软雅黑"/>
@@ -10554,7 +9501,7 @@
                 <a:ea typeface="微软雅黑"/>
                 <a:cs typeface="微软雅黑"/>
               </a:rPr>
-              <a:t>当前能力</a:t>
+              <a:t>开放复用</a:t>
             </a:r>
           </a:p>
         </p:txBody>
@@ -10613,7 +9560,7 @@
                 <a:ea typeface="微软雅黑"/>
                 <a:cs typeface="微软雅黑"/>
               </a:rPr>
-              <a:t>单机 CPU</a:t>
+              <a:t>Source-first</a:t>
             </a:r>
           </a:p>
         </p:txBody>
@@ -10672,7 +9619,55 @@
                 <a:ea typeface="微软雅黑"/>
                 <a:cs typeface="微软雅黑"/>
               </a:rPr>
-              <a:t>策略身份、固定 allowlist、断网 Runner、Evidence-centric Observability</a:t>
+              <a:t>GitHub / Public Demo</a:t>
+            </a:r>
+          </a:p>
+          <a:p xmlns:a="http://schemas.openxmlformats.org/drawingml/2006/main">
+            <a:pPr algn="l">
+              <a:buNone/>
+              <a:defRPr sz="1650" b="0">
+                <a:solidFill>
+                  <a:srgbClr val="18213D"/>
+                </a:solidFill>
+                <a:latin typeface="微软雅黑"/>
+                <a:ea typeface="微软雅黑"/>
+                <a:cs typeface="微软雅黑"/>
+              </a:defRPr>
+            </a:pPr>
+            <a:r>
+              <a:rPr sz="1650" b="0">
+                <a:solidFill>
+                  <a:srgbClr val="18213D"/>
+                </a:solidFill>
+                <a:latin typeface="微软雅黑"/>
+                <a:ea typeface="微软雅黑"/>
+                <a:cs typeface="微软雅黑"/>
+              </a:rPr>
+              <a:t>Skill contracts / Schemas</a:t>
+            </a:r>
+          </a:p>
+          <a:p xmlns:a="http://schemas.openxmlformats.org/drawingml/2006/main">
+            <a:pPr algn="l">
+              <a:buNone/>
+              <a:defRPr sz="1650" b="0">
+                <a:solidFill>
+                  <a:srgbClr val="18213D"/>
+                </a:solidFill>
+                <a:latin typeface="微软雅黑"/>
+                <a:ea typeface="微软雅黑"/>
+                <a:cs typeface="微软雅黑"/>
+              </a:defRPr>
+            </a:pPr>
+            <a:r>
+              <a:rPr sz="1650" b="0">
+                <a:solidFill>
+                  <a:srgbClr val="18213D"/>
+                </a:solidFill>
+                <a:latin typeface="微软雅黑"/>
+                <a:ea typeface="微软雅黑"/>
+                <a:cs typeface="微软雅黑"/>
+              </a:rPr>
+              <a:t>3 Evidence Bundles / CI / SBOM</a:t>
             </a:r>
           </a:p>
         </p:txBody>
@@ -10731,7 +9726,7 @@
                 <a:ea typeface="微软雅黑"/>
                 <a:cs typeface="微软雅黑"/>
               </a:rPr>
-              <a:t>生产路线</a:t>
+              <a:t>当前边界</a:t>
             </a:r>
           </a:p>
         </p:txBody>
@@ -10790,7 +9785,7 @@
                 <a:ea typeface="微软雅黑"/>
                 <a:cs typeface="微软雅黑"/>
               </a:rPr>
-              <a:t>身份 + 调度</a:t>
+              <a:t>单机 CPU</a:t>
             </a:r>
           </a:p>
         </p:txBody>
@@ -10849,7 +9844,7 @@
                 <a:ea typeface="微软雅黑"/>
                 <a:cs typeface="微软雅黑"/>
               </a:rPr>
-              <a:t>OIDC / mTLS、队列、持久幂等、多租户与集中观测需独立实现。</a:t>
+              <a:t>策略身份与固定 allowlist；非 production IAM、非多租户 Runtime、无 native MCP / OTel backend。</a:t>
             </a:r>
           </a:p>
         </p:txBody>
@@ -10886,7 +9881,7 @@
         </p:spPr>
         <p:txBody>
           <a:bodyPr xmlns:a="http://schemas.openxmlformats.org/drawingml/2006/main" lIns="133350" tIns="76200" rIns="133350" bIns="76200" anchor="ctr">
-            <a:normAutofit fontScale="100000"/>
+            <a:normAutofit fontScale="80097"/>
           </a:bodyPr>
           <a:lstStyle xmlns:a="http://schemas.openxmlformats.org/drawingml/2006/main"/>
           <a:p xmlns:a="http://schemas.openxmlformats.org/drawingml/2006/main">
@@ -10910,7 +9905,7 @@
                 <a:ea typeface="微软雅黑"/>
                 <a:cs typeface="微软雅黑"/>
               </a:rPr>
-              <a:t>不声称：MCP Server · OTel 后端 · RAG · GPU 调度 · 通用 Agent OS</a:t>
+              <a:t>路线：production identity + scheduling + telemetry · Runner 镜像许可证门禁关闭前不发布</a:t>
             </a:r>
           </a:p>
         </p:txBody>
@@ -10984,7 +9979,7 @@
                 <a:ea typeface="微软雅黑"/>
                 <a:cs typeface="微软雅黑"/>
               </a:rPr>
-              <a:t>11 · 总结</a:t>
+              <a:t>15 · Closing</a:t>
             </a:r>
             <a:endParaRPr sz="1200"/>
           </a:p>
@@ -11030,7 +10025,7 @@
                 <a:ea typeface="微软雅黑"/>
                 <a:cs typeface="微软雅黑"/>
               </a:rPr>
-              <a:t>让 Agent 的工程行动有资格被系统承认</a:t>
+              <a:t>把 Agent 行动从“模型自述”变成“可验证工程事件”</a:t>
             </a:r>
             <a:endParaRPr sz="2900"/>
           </a:p>
@@ -11113,7 +10108,7 @@
           <a:lstStyle xmlns:a="http://schemas.openxmlformats.org/drawingml/2006/main"/>
           <a:p xmlns:a="http://schemas.openxmlformats.org/drawingml/2006/main">
             <a:r>
-              <a:t>Trust Contract v1 · Trust State Machine v1 · v1.0-rc1</a:t>
+              <a:t>Trust Infrastructure for Production Agent Systems</a:t>
             </a:r>
             <a:endParaRPr>
               <a:latin typeface="微软雅黑"/>
@@ -11231,97 +10226,73 @@
           <a:p xmlns:a="http://schemas.openxmlformats.org/drawingml/2006/main">
             <a:pPr algn="l">
               <a:buNone/>
-              <a:defRPr sz="1575" b="0">
-                <a:solidFill>
-                  <a:srgbClr val="18213D"/>
-                </a:solidFill>
-                <a:latin typeface="微软雅黑"/>
-                <a:ea typeface="微软雅黑"/>
-                <a:cs typeface="微软雅黑"/>
-              </a:defRPr>
-            </a:pPr>
-            <a:r>
-              <a:rPr sz="1575" b="0">
-                <a:solidFill>
-                  <a:srgbClr val="18213D"/>
-                </a:solidFill>
-                <a:latin typeface="微软雅黑"/>
-                <a:ea typeface="微软雅黑"/>
-                <a:cs typeface="微软雅黑"/>
-              </a:rPr>
-              <a:t>已验证闭环</a:t>
+              <a:defRPr sz="1650" b="1">
+                <a:solidFill>
+                  <a:srgbClr val="334155"/>
+                </a:solidFill>
+                <a:latin typeface="微软雅黑"/>
+                <a:ea typeface="微软雅黑"/>
+                <a:cs typeface="微软雅黑"/>
+              </a:defRPr>
+            </a:pPr>
+            <a:r>
+              <a:rPr sz="1650" b="1">
+                <a:solidFill>
+                  <a:srgbClr val="334155"/>
+                </a:solidFill>
+                <a:latin typeface="微软雅黑"/>
+                <a:ea typeface="微软雅黑"/>
+                <a:cs typeface="微软雅黑"/>
+              </a:rPr>
+              <a:t>Governed</a:t>
             </a:r>
           </a:p>
           <a:p xmlns:a="http://schemas.openxmlformats.org/drawingml/2006/main">
             <a:pPr algn="l">
               <a:buNone/>
-              <a:defRPr sz="1575" b="0">
-                <a:solidFill>
-                  <a:srgbClr val="18213D"/>
-                </a:solidFill>
-                <a:latin typeface="微软雅黑"/>
-                <a:ea typeface="微软雅黑"/>
-                <a:cs typeface="微软雅黑"/>
-              </a:defRPr>
-            </a:pPr>
-            <a:r>
-              <a:rPr sz="1575" b="0">
-                <a:solidFill>
-                  <a:srgbClr val="18213D"/>
-                </a:solidFill>
-                <a:latin typeface="微软雅黑"/>
-                <a:ea typeface="微软雅黑"/>
-                <a:cs typeface="微软雅黑"/>
-              </a:rPr>
-              <a:t>6 Agents · 7 Skills</a:t>
+              <a:defRPr sz="1650" b="1">
+                <a:solidFill>
+                  <a:srgbClr val="334155"/>
+                </a:solidFill>
+                <a:latin typeface="微软雅黑"/>
+                <a:ea typeface="微软雅黑"/>
+                <a:cs typeface="微软雅黑"/>
+              </a:defRPr>
+            </a:pPr>
+            <a:r>
+              <a:rPr sz="1650" b="1">
+                <a:solidFill>
+                  <a:srgbClr val="334155"/>
+                </a:solidFill>
+                <a:latin typeface="微软雅黑"/>
+                <a:ea typeface="微软雅黑"/>
+                <a:cs typeface="微软雅黑"/>
+              </a:rPr>
+              <a:t>Identity · Skill</a:t>
             </a:r>
           </a:p>
           <a:p xmlns:a="http://schemas.openxmlformats.org/drawingml/2006/main">
             <a:pPr algn="l">
               <a:buNone/>
-              <a:defRPr sz="1575" b="0">
-                <a:solidFill>
-                  <a:srgbClr val="18213D"/>
-                </a:solidFill>
-                <a:latin typeface="微软雅黑"/>
-                <a:ea typeface="微软雅黑"/>
-                <a:cs typeface="微软雅黑"/>
-              </a:defRPr>
-            </a:pPr>
-            <a:r>
-              <a:rPr sz="1575" b="0">
-                <a:solidFill>
-                  <a:srgbClr val="18213D"/>
-                </a:solidFill>
-                <a:latin typeface="微软雅黑"/>
-                <a:ea typeface="微软雅黑"/>
-                <a:cs typeface="微软雅黑"/>
-              </a:rPr>
-              <a:t>Secure Runner</a:t>
-            </a:r>
-          </a:p>
-          <a:p xmlns:a="http://schemas.openxmlformats.org/drawingml/2006/main">
-            <a:pPr algn="l">
-              <a:buNone/>
-              <a:defRPr sz="1575" b="0">
-                <a:solidFill>
-                  <a:srgbClr val="18213D"/>
-                </a:solidFill>
-                <a:latin typeface="微软雅黑"/>
-                <a:ea typeface="微软雅黑"/>
-                <a:cs typeface="微软雅黑"/>
-              </a:defRPr>
-            </a:pPr>
-            <a:r>
-              <a:rPr sz="1575" b="0">
-                <a:solidFill>
-                  <a:srgbClr val="18213D"/>
-                </a:solidFill>
-                <a:latin typeface="微软雅黑"/>
-                <a:ea typeface="微软雅黑"/>
-                <a:cs typeface="微软雅黑"/>
-              </a:rPr>
-              <a:t>Evidence Bundle</a:t>
+              <a:defRPr sz="1650" b="1">
+                <a:solidFill>
+                  <a:srgbClr val="334155"/>
+                </a:solidFill>
+                <a:latin typeface="微软雅黑"/>
+                <a:ea typeface="微软雅黑"/>
+                <a:cs typeface="微软雅黑"/>
+              </a:defRPr>
+            </a:pPr>
+            <a:r>
+              <a:rPr sz="1650" b="1">
+                <a:solidFill>
+                  <a:srgbClr val="334155"/>
+                </a:solidFill>
+                <a:latin typeface="微软雅黑"/>
+                <a:ea typeface="微软雅黑"/>
+                <a:cs typeface="微软雅黑"/>
+              </a:rPr>
+              <a:t>Policy · Approval</a:t>
             </a:r>
           </a:p>
         </p:txBody>
@@ -11368,97 +10339,73 @@
           <a:p xmlns:a="http://schemas.openxmlformats.org/drawingml/2006/main">
             <a:pPr algn="l">
               <a:buNone/>
-              <a:defRPr sz="1575" b="0">
-                <a:solidFill>
-                  <a:srgbClr val="18213D"/>
-                </a:solidFill>
-                <a:latin typeface="微软雅黑"/>
-                <a:ea typeface="微软雅黑"/>
-                <a:cs typeface="微软雅黑"/>
-              </a:defRPr>
-            </a:pPr>
-            <a:r>
-              <a:rPr sz="1575" b="0">
-                <a:solidFill>
-                  <a:srgbClr val="18213D"/>
-                </a:solidFill>
-                <a:latin typeface="微软雅黑"/>
-                <a:ea typeface="微软雅黑"/>
-                <a:cs typeface="微软雅黑"/>
-              </a:rPr>
-              <a:t>治理结果</a:t>
+              <a:defRPr sz="1650" b="1">
+                <a:solidFill>
+                  <a:srgbClr val="334155"/>
+                </a:solidFill>
+                <a:latin typeface="微软雅黑"/>
+                <a:ea typeface="微软雅黑"/>
+                <a:cs typeface="微软雅黑"/>
+              </a:defRPr>
+            </a:pPr>
+            <a:r>
+              <a:rPr sz="1650" b="1">
+                <a:solidFill>
+                  <a:srgbClr val="334155"/>
+                </a:solidFill>
+                <a:latin typeface="微软雅黑"/>
+                <a:ea typeface="微软雅黑"/>
+                <a:cs typeface="微软雅黑"/>
+              </a:rPr>
+              <a:t>Verifiable</a:t>
             </a:r>
           </a:p>
           <a:p xmlns:a="http://schemas.openxmlformats.org/drawingml/2006/main">
             <a:pPr algn="l">
               <a:buNone/>
-              <a:defRPr sz="1575" b="0">
-                <a:solidFill>
-                  <a:srgbClr val="18213D"/>
-                </a:solidFill>
-                <a:latin typeface="微软雅黑"/>
-                <a:ea typeface="微软雅黑"/>
-                <a:cs typeface="微软雅黑"/>
-              </a:defRPr>
-            </a:pPr>
-            <a:r>
-              <a:rPr sz="1575" b="0">
-                <a:solidFill>
-                  <a:srgbClr val="18213D"/>
-                </a:solidFill>
-                <a:latin typeface="微软雅黑"/>
-                <a:ea typeface="微软雅黑"/>
-                <a:cs typeface="微软雅黑"/>
-              </a:rPr>
-              <a:t>AT-004 PASS / RESOLVED</a:t>
+              <a:defRPr sz="1650" b="1">
+                <a:solidFill>
+                  <a:srgbClr val="334155"/>
+                </a:solidFill>
+                <a:latin typeface="微软雅黑"/>
+                <a:ea typeface="微软雅黑"/>
+                <a:cs typeface="微软雅黑"/>
+              </a:defRPr>
+            </a:pPr>
+            <a:r>
+              <a:rPr sz="1650" b="1">
+                <a:solidFill>
+                  <a:srgbClr val="334155"/>
+                </a:solidFill>
+                <a:latin typeface="微软雅黑"/>
+                <a:ea typeface="微软雅黑"/>
+                <a:cs typeface="微软雅黑"/>
+              </a:rPr>
+              <a:t>Secure Execution</a:t>
             </a:r>
           </a:p>
           <a:p xmlns:a="http://schemas.openxmlformats.org/drawingml/2006/main">
             <a:pPr algn="l">
               <a:buNone/>
-              <a:defRPr sz="1575" b="0">
-                <a:solidFill>
-                  <a:srgbClr val="18213D"/>
-                </a:solidFill>
-                <a:latin typeface="微软雅黑"/>
-                <a:ea typeface="微软雅黑"/>
-                <a:cs typeface="微软雅黑"/>
-              </a:defRPr>
-            </a:pPr>
-            <a:r>
-              <a:rPr sz="1575" b="0">
-                <a:solidFill>
-                  <a:srgbClr val="18213D"/>
-                </a:solidFill>
-                <a:latin typeface="微软雅黑"/>
-                <a:ea typeface="微软雅黑"/>
-                <a:cs typeface="微软雅黑"/>
-              </a:rPr>
-              <a:t>metric 篡改 ROLLED_BACK</a:t>
-            </a:r>
-          </a:p>
-          <a:p xmlns:a="http://schemas.openxmlformats.org/drawingml/2006/main">
-            <a:pPr algn="l">
-              <a:buNone/>
-              <a:defRPr sz="1575" b="0">
-                <a:solidFill>
-                  <a:srgbClr val="18213D"/>
-                </a:solidFill>
-                <a:latin typeface="微软雅黑"/>
-                <a:ea typeface="微软雅黑"/>
-                <a:cs typeface="微软雅黑"/>
-              </a:defRPr>
-            </a:pPr>
-            <a:r>
-              <a:rPr sz="1575" b="0">
-                <a:solidFill>
-                  <a:srgbClr val="18213D"/>
-                </a:solidFill>
-                <a:latin typeface="微软雅黑"/>
-                <a:ea typeface="微软雅黑"/>
-                <a:cs typeface="微软雅黑"/>
-              </a:rPr>
-              <a:t>错误关闭率 0%</a:t>
+              <a:defRPr sz="1650" b="1">
+                <a:solidFill>
+                  <a:srgbClr val="334155"/>
+                </a:solidFill>
+                <a:latin typeface="微软雅黑"/>
+                <a:ea typeface="微软雅黑"/>
+                <a:cs typeface="微软雅黑"/>
+              </a:defRPr>
+            </a:pPr>
+            <a:r>
+              <a:rPr sz="1650" b="1">
+                <a:solidFill>
+                  <a:srgbClr val="334155"/>
+                </a:solidFill>
+                <a:latin typeface="微软雅黑"/>
+                <a:ea typeface="微软雅黑"/>
+                <a:cs typeface="微软雅黑"/>
+              </a:rPr>
+              <a:t>Trace · Evidence · Audit</a:t>
             </a:r>
           </a:p>
         </p:txBody>
@@ -11505,97 +10452,73 @@
           <a:p xmlns:a="http://schemas.openxmlformats.org/drawingml/2006/main">
             <a:pPr algn="l">
               <a:buNone/>
-              <a:defRPr sz="1575" b="0">
-                <a:solidFill>
-                  <a:srgbClr val="18213D"/>
-                </a:solidFill>
-                <a:latin typeface="微软雅黑"/>
-                <a:ea typeface="微软雅黑"/>
-                <a:cs typeface="微软雅黑"/>
-              </a:defRPr>
-            </a:pPr>
-            <a:r>
-              <a:rPr sz="1575" b="0">
-                <a:solidFill>
-                  <a:srgbClr val="18213D"/>
-                </a:solidFill>
-                <a:latin typeface="微软雅黑"/>
-                <a:ea typeface="微软雅黑"/>
-                <a:cs typeface="微软雅黑"/>
-              </a:rPr>
-              <a:t>清晰边界</a:t>
+              <a:defRPr sz="1650" b="1">
+                <a:solidFill>
+                  <a:srgbClr val="334155"/>
+                </a:solidFill>
+                <a:latin typeface="微软雅黑"/>
+                <a:ea typeface="微软雅黑"/>
+                <a:cs typeface="微软雅黑"/>
+              </a:defRPr>
+            </a:pPr>
+            <a:r>
+              <a:rPr sz="1650" b="1">
+                <a:solidFill>
+                  <a:srgbClr val="334155"/>
+                </a:solidFill>
+                <a:latin typeface="微软雅黑"/>
+                <a:ea typeface="微软雅黑"/>
+                <a:cs typeface="微软雅黑"/>
+              </a:rPr>
+              <a:t>Reusable</a:t>
             </a:r>
           </a:p>
           <a:p xmlns:a="http://schemas.openxmlformats.org/drawingml/2006/main">
             <a:pPr algn="l">
               <a:buNone/>
-              <a:defRPr sz="1575" b="0">
-                <a:solidFill>
-                  <a:srgbClr val="18213D"/>
-                </a:solidFill>
-                <a:latin typeface="微软雅黑"/>
-                <a:ea typeface="微软雅黑"/>
-                <a:cs typeface="微软雅黑"/>
-              </a:defRPr>
-            </a:pPr>
-            <a:r>
-              <a:rPr sz="1575" b="0">
-                <a:solidFill>
-                  <a:srgbClr val="18213D"/>
-                </a:solidFill>
-                <a:latin typeface="微软雅黑"/>
-                <a:ea typeface="微软雅黑"/>
-                <a:cs typeface="微软雅黑"/>
-              </a:rPr>
-              <a:t>Read-only Dashboard</a:t>
+              <a:defRPr sz="1650" b="1">
+                <a:solidFill>
+                  <a:srgbClr val="334155"/>
+                </a:solidFill>
+                <a:latin typeface="微软雅黑"/>
+                <a:ea typeface="微软雅黑"/>
+                <a:cs typeface="微软雅黑"/>
+              </a:defRPr>
+            </a:pPr>
+            <a:r>
+              <a:rPr sz="1650" b="1">
+                <a:solidFill>
+                  <a:srgbClr val="334155"/>
+                </a:solidFill>
+                <a:latin typeface="微软雅黑"/>
+                <a:ea typeface="微软雅黑"/>
+                <a:cs typeface="微软雅黑"/>
+              </a:rPr>
+              <a:t>7 Skill Contracts</a:t>
             </a:r>
           </a:p>
           <a:p xmlns:a="http://schemas.openxmlformats.org/drawingml/2006/main">
             <a:pPr algn="l">
               <a:buNone/>
-              <a:defRPr sz="1575" b="0">
-                <a:solidFill>
-                  <a:srgbClr val="18213D"/>
-                </a:solidFill>
-                <a:latin typeface="微软雅黑"/>
-                <a:ea typeface="微软雅黑"/>
-                <a:cs typeface="微软雅黑"/>
-              </a:defRPr>
-            </a:pPr>
-            <a:r>
-              <a:rPr sz="1575" b="0">
-                <a:solidFill>
-                  <a:srgbClr val="18213D"/>
-                </a:solidFill>
-                <a:latin typeface="微软雅黑"/>
-                <a:ea typeface="微软雅黑"/>
-                <a:cs typeface="微软雅黑"/>
-              </a:rPr>
-              <a:t>source-only candidate</a:t>
-            </a:r>
-          </a:p>
-          <a:p xmlns:a="http://schemas.openxmlformats.org/drawingml/2006/main">
-            <a:pPr algn="l">
-              <a:buNone/>
-              <a:defRPr sz="1575" b="0">
-                <a:solidFill>
-                  <a:srgbClr val="18213D"/>
-                </a:solidFill>
-                <a:latin typeface="微软雅黑"/>
-                <a:ea typeface="微软雅黑"/>
-                <a:cs typeface="微软雅黑"/>
-              </a:defRPr>
-            </a:pPr>
-            <a:r>
-              <a:rPr sz="1575" b="0">
-                <a:solidFill>
-                  <a:srgbClr val="18213D"/>
-                </a:solidFill>
-                <a:latin typeface="微软雅黑"/>
-                <a:ea typeface="微软雅黑"/>
-                <a:cs typeface="微软雅黑"/>
-              </a:rPr>
-              <a:t>no Tag / Release</a:t>
+              <a:defRPr sz="1650" b="1">
+                <a:solidFill>
+                  <a:srgbClr val="334155"/>
+                </a:solidFill>
+                <a:latin typeface="微软雅黑"/>
+                <a:ea typeface="微软雅黑"/>
+                <a:cs typeface="微软雅黑"/>
+              </a:defRPr>
+            </a:pPr>
+            <a:r>
+              <a:rPr sz="1650" b="1">
+                <a:solidFill>
+                  <a:srgbClr val="334155"/>
+                </a:solidFill>
+                <a:latin typeface="微软雅黑"/>
+                <a:ea typeface="微软雅黑"/>
+                <a:cs typeface="微软雅黑"/>
+              </a:rPr>
+              <a:t>Schemas · Public Demo</a:t>
             </a:r>
           </a:p>
         </p:txBody>
@@ -11630,69 +10553,179 @@
         </p:spPr>
         <p:txBody>
           <a:bodyPr xmlns:a="http://schemas.openxmlformats.org/drawingml/2006/main" lIns="133350" tIns="76200" rIns="133350" bIns="76200" anchor="ctr">
-            <a:normAutofit fontScale="83333"/>
+            <a:normAutofit fontScale="90157"/>
           </a:bodyPr>
           <a:lstStyle xmlns:a="http://schemas.openxmlformats.org/drawingml/2006/main"/>
           <a:p xmlns:a="http://schemas.openxmlformats.org/drawingml/2006/main">
             <a:pPr algn="ctr">
               <a:buNone/>
-              <a:defRPr sz="1575" b="1">
-                <a:solidFill>
-                  <a:srgbClr val="1D2342"/>
-                </a:solidFill>
-                <a:latin typeface="微软雅黑"/>
-                <a:ea typeface="微软雅黑"/>
-                <a:cs typeface="微软雅黑"/>
-              </a:defRPr>
-            </a:pPr>
-            <a:r>
-              <a:rPr sz="1575" b="1">
-                <a:solidFill>
-                  <a:srgbClr val="1D2342"/>
-                </a:solidFill>
-                <a:latin typeface="微软雅黑"/>
-                <a:ea typeface="微软雅黑"/>
-                <a:cs typeface="微软雅黑"/>
-              </a:rPr>
-              <a:t>GitHub: github.com/JAKIIC/LabOps-Guard</a:t>
-            </a:r>
-            <a:br/>
-            <a:r>
-              <a:rPr sz="1575" b="1">
-                <a:solidFill>
-                  <a:srgbClr val="1D2342"/>
-                </a:solidFill>
-                <a:latin typeface="微软雅黑"/>
-                <a:ea typeface="微软雅黑"/>
-                <a:cs typeface="微软雅黑"/>
-              </a:rPr>
-              <a:t>Demo: jakiic.github.io/LabOps-Guard/</a:t>
+              <a:defRPr sz="1500" b="1">
+                <a:solidFill>
+                  <a:srgbClr val="334155"/>
+                </a:solidFill>
+                <a:latin typeface="微软雅黑"/>
+                <a:ea typeface="微软雅黑"/>
+                <a:cs typeface="微软雅黑"/>
+              </a:defRPr>
+            </a:pPr>
+            <a:r>
+              <a:rPr sz="1500" b="1">
+                <a:solidFill>
+                  <a:srgbClr val="334155"/>
+                </a:solidFill>
+                <a:latin typeface="微软雅黑"/>
+                <a:ea typeface="微软雅黑"/>
+                <a:cs typeface="微软雅黑"/>
+              </a:rPr>
+              <a:t>LabOps-Guard does not make agents smarter. It makes agent execution verifiable and governable.</a:t>
             </a:r>
           </a:p>
         </p:txBody>
       </p:sp>
       <p:pic>
         <p:nvPicPr>
-          <p:cNvPr id="56" name=""/>
+          <p:cNvPr id="59" name=""/>
           <p:cNvPicPr>
             <a:picLocks xmlns:a="http://schemas.openxmlformats.org/drawingml/2006/main" noChangeAspect="1"/>
           </p:cNvPicPr>
           <p:nvPr/>
         </p:nvPicPr>
         <p:blipFill>
-          <a:blip xmlns:r="http://schemas.openxmlformats.org/officeDocument/2006/relationships" xmlns:a="http://schemas.openxmlformats.org/drawingml/2006/main" r:embed="R8fc44e573b014023"/>
+          <a:blip xmlns:r="http://schemas.openxmlformats.org/officeDocument/2006/relationships" xmlns:a="http://schemas.openxmlformats.org/drawingml/2006/main" r:embed="Rb4ee4809d2b4484a"/>
           <a:stretch xmlns:a="http://schemas.openxmlformats.org/drawingml/2006/main"/>
         </p:blipFill>
         <p:spPr>
           <a:xfrm xmlns:a="http://schemas.openxmlformats.org/drawingml/2006/main">
-            <a:off x="10477500" y="714375"/>
-            <a:ext cx="1000125" cy="1000125"/>
+            <a:off x="10668000" y="685800"/>
+            <a:ext cx="838200" cy="838200"/>
           </a:xfrm>
           <a:prstGeom xmlns:a="http://schemas.openxmlformats.org/drawingml/2006/main" prst="rect">
             <a:avLst/>
           </a:prstGeom>
         </p:spPr>
       </p:pic>
+      <p:pic>
+        <p:nvPicPr>
+          <p:cNvPr id="60" name=""/>
+          <p:cNvPicPr>
+            <a:picLocks xmlns:a="http://schemas.openxmlformats.org/drawingml/2006/main" noChangeAspect="1"/>
+          </p:cNvPicPr>
+          <p:nvPr/>
+        </p:nvPicPr>
+        <p:blipFill>
+          <a:blip xmlns:r="http://schemas.openxmlformats.org/officeDocument/2006/relationships" xmlns:a="http://schemas.openxmlformats.org/drawingml/2006/main" r:embed="R6619fc11809b469b"/>
+          <a:stretch xmlns:a="http://schemas.openxmlformats.org/drawingml/2006/main"/>
+        </p:blipFill>
+        <p:spPr>
+          <a:xfrm xmlns:a="http://schemas.openxmlformats.org/drawingml/2006/main">
+            <a:off x="9667875" y="685800"/>
+            <a:ext cx="838200" cy="838200"/>
+          </a:xfrm>
+          <a:prstGeom xmlns:a="http://schemas.openxmlformats.org/drawingml/2006/main" prst="rect">
+            <a:avLst/>
+          </a:prstGeom>
+        </p:spPr>
+      </p:pic>
+      <p:sp>
+        <p:nvSpPr>
+          <p:cNvPr id="47" name="github-qr-label">
+            <a:extLst xmlns:a="http://schemas.openxmlformats.org/drawingml/2006/main">
+              <a:ext uri="{FF2B5EF4-FFF2-40B4-BE49-F238E27FC236}">
+                <a16:creationId xmlns:a16="http://schemas.microsoft.com/office/drawing/2014/main" id="{64C9BE24-B2C0-4CAD-AF25-FE881D07125E}"/>
+              </a:ext>
+            </a:extLst>
+          </p:cNvPr>
+          <p:cNvSpPr>
+            <a:spLocks xmlns:a="http://schemas.openxmlformats.org/drawingml/2006/main" noGrp="1"/>
+          </p:cNvSpPr>
+          <p:nvPr/>
+        </p:nvSpPr>
+        <p:spPr>
+          <a:xfrm xmlns:a="http://schemas.openxmlformats.org/drawingml/2006/main">
+            <a:off x="9601200" y="1562100"/>
+            <a:ext cx="971550" cy="209550"/>
+          </a:xfrm>
+          <a:prstGeom xmlns:a="http://schemas.openxmlformats.org/drawingml/2006/main" prst="rect">
+            <a:avLst/>
+          </a:prstGeom>
+          <a:noFill xmlns:a="http://schemas.openxmlformats.org/drawingml/2006/main"/>
+          <a:ln xmlns:a="http://schemas.openxmlformats.org/drawingml/2006/main" w="0">
+            <a:noFill/>
+            <a:prstDash val="solid"/>
+          </a:ln>
+        </p:spPr>
+        <p:txBody>
+          <a:bodyPr xmlns:a="http://schemas.openxmlformats.org/drawingml/2006/main"/>
+          <a:lstStyle xmlns:a="http://schemas.openxmlformats.org/drawingml/2006/main"/>
+          <a:p xmlns:a="http://schemas.openxmlformats.org/drawingml/2006/main">
+            <a:pPr algn="ctr">
+              <a:defRPr sz="900" b="1">
+                <a:solidFill>
+                  <a:srgbClr val="475569"/>
+                </a:solidFill>
+              </a:defRPr>
+            </a:pPr>
+            <a:r>
+              <a:rPr sz="900" b="1">
+                <a:solidFill>
+                  <a:srgbClr val="475569"/>
+                </a:solidFill>
+              </a:rPr>
+              <a:t>GitHub</a:t>
+            </a:r>
+          </a:p>
+        </p:txBody>
+      </p:sp>
+      <p:sp>
+        <p:nvSpPr>
+          <p:cNvPr id="48" name="demo-qr-label">
+            <a:extLst xmlns:a="http://schemas.openxmlformats.org/drawingml/2006/main">
+              <a:ext uri="{FF2B5EF4-FFF2-40B4-BE49-F238E27FC236}">
+                <a16:creationId xmlns:a16="http://schemas.microsoft.com/office/drawing/2014/main" id="{FE8B1A58-8F5F-4CA7-81F1-16D0629C91D5}"/>
+              </a:ext>
+            </a:extLst>
+          </p:cNvPr>
+          <p:cNvSpPr>
+            <a:spLocks xmlns:a="http://schemas.openxmlformats.org/drawingml/2006/main" noGrp="1"/>
+          </p:cNvSpPr>
+          <p:nvPr/>
+        </p:nvSpPr>
+        <p:spPr>
+          <a:xfrm xmlns:a="http://schemas.openxmlformats.org/drawingml/2006/main">
+            <a:off x="10591800" y="1562100"/>
+            <a:ext cx="990600" cy="209550"/>
+          </a:xfrm>
+          <a:prstGeom xmlns:a="http://schemas.openxmlformats.org/drawingml/2006/main" prst="rect">
+            <a:avLst/>
+          </a:prstGeom>
+          <a:noFill xmlns:a="http://schemas.openxmlformats.org/drawingml/2006/main"/>
+          <a:ln xmlns:a="http://schemas.openxmlformats.org/drawingml/2006/main" w="0">
+            <a:noFill/>
+            <a:prstDash val="solid"/>
+          </a:ln>
+        </p:spPr>
+        <p:txBody>
+          <a:bodyPr xmlns:a="http://schemas.openxmlformats.org/drawingml/2006/main"/>
+          <a:lstStyle xmlns:a="http://schemas.openxmlformats.org/drawingml/2006/main"/>
+          <a:p xmlns:a="http://schemas.openxmlformats.org/drawingml/2006/main">
+            <a:pPr algn="ctr">
+              <a:defRPr sz="900" b="1">
+                <a:solidFill>
+                  <a:srgbClr val="475569"/>
+                </a:solidFill>
+              </a:defRPr>
+            </a:pPr>
+            <a:r>
+              <a:rPr sz="900" b="1">
+                <a:solidFill>
+                  <a:srgbClr val="475569"/>
+                </a:solidFill>
+              </a:rPr>
+              <a:t>Public Demo</a:t>
+            </a:r>
+          </a:p>
+        </p:txBody>
+      </p:sp>
     </p:spTree>
     <p:extLst>
       <p:ext uri="{BB962C8B-B14F-4D97-AF65-F5344CB8AC3E}">
@@ -11762,7 +10795,7 @@
                 <a:ea typeface="微软雅黑"/>
                 <a:cs typeface="微软雅黑"/>
               </a:rPr>
-              <a:t>复赛 · 信任问题</a:t>
+              <a:t>复赛 · Trust Gap</a:t>
             </a:r>
             <a:endParaRPr sz="1200"/>
           </a:p>
@@ -11808,7 +10841,7 @@
                 <a:ea typeface="微软雅黑"/>
                 <a:cs typeface="微软雅黑"/>
               </a:rPr>
-              <a:t>Agent 获得执行权后</a:t>
+              <a:t>Agent 获得真实执行权限后，谁来证明它值得信任？</a:t>
             </a:r>
             <a:endParaRPr sz="2900"/>
           </a:p>
@@ -13104,7 +12137,7 @@
                 <a:ea typeface="微软雅黑"/>
                 <a:cs typeface="微软雅黑"/>
               </a:rPr>
-              <a:t>01 · 项目目标与范围</a:t>
+              <a:t>01 · 场景价值与复制性</a:t>
             </a:r>
             <a:endParaRPr sz="1200"/>
           </a:p>
@@ -13150,7 +12183,7 @@
                 <a:ea typeface="微软雅黑"/>
                 <a:cs typeface="微软雅黑"/>
               </a:rPr>
-              <a:t>把 Agent 行动变成可验证工程事件</a:t>
+              <a:t>AI Engineering：首个验证场景</a:t>
             </a:r>
             <a:endParaRPr sz="2900"/>
           </a:p>
@@ -13192,7 +12225,7 @@
                 <a:ea typeface="微软雅黑"/>
                 <a:cs typeface="微软雅黑"/>
               </a:rPr>
-              <a:t>LabOps Guard 约束 AI 工程执行，不承诺通用 Agent OS。</a:t>
+              <a:t>验证场景不等于项目定义；Trust Contract 与执行治理链可迁移。</a:t>
             </a:r>
             <a:endParaRPr>
               <a:latin typeface="微软雅黑"/>
@@ -13256,7 +12289,7 @@
                 <a:ea typeface="微软雅黑"/>
                 <a:cs typeface="微软雅黑"/>
               </a:rPr>
-              <a:t>当前目标</a:t>
+              <a:t>验证场景</a:t>
             </a:r>
           </a:p>
         </p:txBody>
@@ -13315,7 +12348,7 @@
                 <a:ea typeface="微软雅黑"/>
                 <a:cs typeface="微软雅黑"/>
               </a:rPr>
-              <a:t>可信执行</a:t>
+              <a:t>AI Engineering</a:t>
             </a:r>
           </a:p>
         </p:txBody>
@@ -13374,31 +12407,7 @@
                 <a:ea typeface="微软雅黑"/>
                 <a:cs typeface="微软雅黑"/>
               </a:rPr>
-              <a:t>身份、审批、Runner 与证据</a:t>
-            </a:r>
-          </a:p>
-          <a:p xmlns:a="http://schemas.openxmlformats.org/drawingml/2006/main">
-            <a:pPr algn="l">
-              <a:buNone/>
-              <a:defRPr sz="1650" b="0">
-                <a:solidFill>
-                  <a:srgbClr val="18213D"/>
-                </a:solidFill>
-                <a:latin typeface="微软雅黑"/>
-                <a:ea typeface="微软雅黑"/>
-                <a:cs typeface="微软雅黑"/>
-              </a:defRPr>
-            </a:pPr>
-            <a:r>
-              <a:rPr sz="1650" b="0">
-                <a:solidFill>
-                  <a:srgbClr val="18213D"/>
-                </a:solidFill>
-                <a:latin typeface="微软雅黑"/>
-                <a:ea typeface="微软雅黑"/>
-                <a:cs typeface="微软雅黑"/>
-              </a:rPr>
-              <a:t>由 Auditor 独立裁决</a:t>
+              <a:t>事故触发、采证、分析、计划、受控执行与独立验证形成可复核闭环。</a:t>
             </a:r>
           </a:p>
         </p:txBody>
@@ -13457,7 +12466,7 @@
                 <a:ea typeface="微软雅黑"/>
                 <a:cs typeface="微软雅黑"/>
               </a:rPr>
-              <a:t>明确边界</a:t>
+              <a:t>架构复用</a:t>
             </a:r>
           </a:p>
         </p:txBody>
@@ -13516,7 +12525,7 @@
                 <a:ea typeface="微软雅黑"/>
                 <a:cs typeface="微软雅黑"/>
               </a:rPr>
-              <a:t>单机 CPU</a:t>
+              <a:t>4 类 Agent</a:t>
             </a:r>
           </a:p>
         </p:txBody>
@@ -13575,7 +12584,7 @@
                 <a:ea typeface="微软雅黑"/>
                 <a:cs typeface="微软雅黑"/>
               </a:rPr>
-              <a:t>不含多租户调度、GPU、生产身份、MCP Server 或 RAG。</a:t>
+              <a:t>可迁移到 Coding、Data、Research、Deployment Agent；本版本不宣称已全部实现。</a:t>
             </a:r>
           </a:p>
         </p:txBody>
@@ -13636,7 +12645,7 @@
                 <a:ea typeface="微软雅黑"/>
                 <a:cs typeface="微软雅黑"/>
               </a:rPr>
-              <a:t>适用：模型研发 · 评测平台 · AI Infra · 算法治理</a:t>
+              <a:t>首个验证场景 ≠ 项目定义 · 可复用的是 Trust Contract 与执行治理链</a:t>
             </a:r>
           </a:p>
         </p:txBody>
@@ -13756,7 +12765,7 @@
                 <a:ea typeface="微软雅黑"/>
                 <a:cs typeface="微软雅黑"/>
               </a:rPr>
-              <a:t>五段证据链约束每一次 Agent 工程行动</a:t>
+              <a:t>把 Agent 行动变成可验证工程事件</a:t>
             </a:r>
             <a:endParaRPr sz="2900"/>
           </a:p>
@@ -13844,7 +12853,7 @@
                 <a:ea typeface="微软雅黑"/>
                 <a:cs typeface="微软雅黑"/>
               </a:rPr>
-              <a:t>Control Plane 保持逻辑架构；Dashboard 只读，不拆新服务。</a:t>
+              <a:t>Agent Application → Trust Layer → Secure Runtime → Engineering Environment</a:t>
             </a:r>
             <a:endParaRPr>
               <a:latin typeface="微软雅黑"/>
@@ -14069,7 +13078,7 @@
                 <a:ea typeface="微软雅黑"/>
                 <a:cs typeface="微软雅黑"/>
               </a:rPr>
-              <a:t>信任层 · Contract + Policy</a:t>
+              <a:t>信任层 · Trust Contract</a:t>
             </a:r>
           </a:p>
           <a:p xmlns:a="http://schemas.openxmlformats.org/drawingml/2006/main">
@@ -14093,7 +13102,7 @@
                 <a:ea typeface="微软雅黑"/>
                 <a:cs typeface="微软雅黑"/>
               </a:rPr>
-              <a:t>Identity · Skill · Approval</a:t>
+              <a:t>Identity · Skill · Policy · Approval</a:t>
             </a:r>
           </a:p>
         </p:txBody>
@@ -14158,7 +13167,7 @@
                 <a:ea typeface="微软雅黑"/>
                 <a:cs typeface="微软雅黑"/>
               </a:rPr>
-              <a:t>执行层 · Secure Runner</a:t>
+              <a:t>执行层 · Secure Runtime</a:t>
             </a:r>
           </a:p>
           <a:p xmlns:a="http://schemas.openxmlformats.org/drawingml/2006/main">
@@ -14182,7 +13191,7 @@
                 <a:ea typeface="微软雅黑"/>
                 <a:cs typeface="微软雅黑"/>
               </a:rPr>
-              <a:t>Tool Contract · allowlist · sandbox</a:t>
+              <a:t>Execution · Evidence · Audit</a:t>
             </a:r>
           </a:p>
         </p:txBody>
@@ -14227,7 +13236,7 @@
               <a:buNone/>
               <a:defRPr sz="1425" b="1">
                 <a:solidFill>
-                  <a:srgbClr val="1D2342"/>
+                  <a:srgbClr val="334155"/>
                 </a:solidFill>
                 <a:latin typeface="微软雅黑"/>
                 <a:ea typeface="微软雅黑"/>
@@ -14237,13 +13246,13 @@
             <a:r>
               <a:rPr sz="1425" b="1">
                 <a:solidFill>
-                  <a:srgbClr val="1D2342"/>
-                </a:solidFill>
-                <a:latin typeface="微软雅黑"/>
-                <a:ea typeface="微软雅黑"/>
-                <a:cs typeface="微软雅黑"/>
-              </a:rPr>
-              <a:t>Identity     Policy     Execution     Evidence     Audit</a:t>
+                  <a:srgbClr val="334155"/>
+                </a:solidFill>
+                <a:latin typeface="微软雅黑"/>
+                <a:ea typeface="微软雅黑"/>
+                <a:cs typeface="微软雅黑"/>
+              </a:rPr>
+              <a:t>Identity     Skill     Policy     Approval     Execution     Evidence     Audit</a:t>
             </a:r>
           </a:p>
         </p:txBody>
@@ -14302,7 +13311,7 @@
                 <a:ea typeface="微软雅黑"/>
                 <a:cs typeface="微软雅黑"/>
               </a:rPr>
-              <a:t>Auditor 独占终态；每个域显示证据来源与限制，不生成综合评分。</a:t>
+              <a:t>Control Plane 保持逻辑架构；Dashboard 只读，不生成综合评分。</a:t>
             </a:r>
           </a:p>
         </p:txBody>
@@ -14376,7 +13385,7 @@
                 <a:ea typeface="微软雅黑"/>
                 <a:cs typeface="微软雅黑"/>
               </a:rPr>
-              <a:t>03 · 六 Agent 职责隔离</a:t>
+              <a:t>03 · AgentTeams 六角色真实协作</a:t>
             </a:r>
             <a:endParaRPr sz="1200"/>
           </a:p>
@@ -14422,7 +13431,7 @@
                 <a:ea typeface="微软雅黑"/>
                 <a:cs typeface="微软雅黑"/>
               </a:rPr>
-              <a:t>每个角色只拥有完成本职工作所需的权限</a:t>
+              <a:t>六 Agent 的价值是职责隔离，不是角色数量</a:t>
             </a:r>
             <a:endParaRPr sz="2900"/>
           </a:p>
@@ -14464,7 +13473,7 @@
                 <a:ea typeface="微软雅黑"/>
                 <a:cs typeface="微软雅黑"/>
               </a:rPr>
-              <a:t>六个 Identity 共享状态与证据，但 Safe Executor 不能自证成功。</a:t>
+              <a:t>六个 Identity 共享状态与证据；Executor 不能自证成功，Auditor 独占终态裁决。</a:t>
             </a:r>
             <a:endParaRPr>
               <a:latin typeface="微软雅黑"/>
@@ -15292,7 +14301,7 @@
                 <a:ea typeface="微软雅黑"/>
                 <a:cs typeface="微软雅黑"/>
               </a:rPr>
-              <a:t>人工审批不计作 Agent</a:t>
+              <a:t>真实 handoff 留痕</a:t>
             </a:r>
           </a:p>
           <a:p xmlns:a="http://schemas.openxmlformats.org/drawingml/2006/main">
@@ -15316,7 +14325,7 @@
                 <a:ea typeface="微软雅黑"/>
                 <a:cs typeface="微软雅黑"/>
               </a:rPr>
-              <a:t>审批事件单独留痕</a:t>
+              <a:t>Manager / Worker</a:t>
             </a:r>
           </a:p>
           <a:p xmlns:a="http://schemas.openxmlformats.org/drawingml/2006/main">
@@ -15340,7 +14349,7 @@
                 <a:ea typeface="微软雅黑"/>
                 <a:cs typeface="微软雅黑"/>
               </a:rPr>
-              <a:t>批准必须早于执行</a:t>
+              <a:t>task + event reference</a:t>
             </a:r>
           </a:p>
         </p:txBody>
@@ -15405,7 +14414,31 @@
                 <a:ea typeface="微软雅黑"/>
                 <a:cs typeface="微软雅黑"/>
               </a:rPr>
-              <a:t>只有 Auditor 可裁决</a:t>
+              <a:t>Separation of Duties</a:t>
+            </a:r>
+          </a:p>
+          <a:p xmlns:a="http://schemas.openxmlformats.org/drawingml/2006/main">
+            <a:pPr algn="l">
+              <a:buNone/>
+              <a:defRPr sz="1425" b="0">
+                <a:solidFill>
+                  <a:srgbClr val="18213D"/>
+                </a:solidFill>
+                <a:latin typeface="微软雅黑"/>
+                <a:ea typeface="微软雅黑"/>
+                <a:cs typeface="微软雅黑"/>
+              </a:defRPr>
+            </a:pPr>
+            <a:r>
+              <a:rPr sz="1425" b="0">
+                <a:solidFill>
+                  <a:srgbClr val="18213D"/>
+                </a:solidFill>
+                <a:latin typeface="微软雅黑"/>
+                <a:ea typeface="微软雅黑"/>
+                <a:cs typeface="微软雅黑"/>
+              </a:rPr>
+              <a:t>Executor ≠ Auditor</a:t>
             </a:r>
           </a:p>
           <a:p xmlns:a="http://schemas.openxmlformats.org/drawingml/2006/main">
@@ -15503,7 +14536,7 @@
                 <a:ea typeface="微软雅黑"/>
                 <a:cs typeface="微软雅黑"/>
               </a:rPr>
-              <a:t>03 · Identity 与 Skill</a:t>
+              <a:t>04 · Skill Engineering</a:t>
             </a:r>
             <a:endParaRPr sz="1200"/>
           </a:p>
@@ -15549,7 +14582,7 @@
                 <a:ea typeface="微软雅黑"/>
                 <a:cs typeface="微软雅黑"/>
               </a:rPr>
-              <a:t>Identity 与 Skill Registry 统一校验</a:t>
+              <a:t>7 个可复用、版本化、可验证的能力契约</a:t>
             </a:r>
             <a:endParaRPr sz="2900"/>
           </a:p>
@@ -15624,7 +14657,7 @@
                 <a:ea typeface="微软雅黑"/>
                 <a:cs typeface="微软雅黑"/>
               </a:rPr>
-              <a:t>v1</a:t>
+              <a:t>7</a:t>
             </a:r>
             <a:endParaRPr sz="1500"/>
           </a:p>
@@ -15666,7 +14699,7 @@
                 <a:ea typeface="微软雅黑"/>
                 <a:cs typeface="微软雅黑"/>
               </a:rPr>
-              <a:t>Registry 提供发现与校验，不接管现有 Skill 执行。</a:t>
+              <a:t>Skill 不是 Prompt：Registry 绑定 Owner、I/O、调用条件、失败状态、安全边界与验证方法。</a:t>
             </a:r>
             <a:endParaRPr>
               <a:latin typeface="微软雅黑"/>
@@ -15850,49 +14883,73 @@
           <a:p xmlns:a="http://schemas.openxmlformats.org/drawingml/2006/main">
             <a:pPr algn="l">
               <a:buNone/>
-              <a:defRPr sz="1350" b="0">
-                <a:solidFill>
-                  <a:srgbClr val="18213D"/>
-                </a:solidFill>
-                <a:latin typeface="微软雅黑"/>
-                <a:ea typeface="微软雅黑"/>
-                <a:cs typeface="微软雅黑"/>
-              </a:defRPr>
-            </a:pPr>
-            <a:r>
-              <a:rPr sz="1350" b="0">
-                <a:solidFill>
-                  <a:srgbClr val="18213D"/>
-                </a:solidFill>
-                <a:latin typeface="微软雅黑"/>
-                <a:ea typeface="微软雅黑"/>
-                <a:cs typeface="微软雅黑"/>
-              </a:rPr>
-              <a:t>Identity</a:t>
+              <a:defRPr sz="1050" b="1">
+                <a:solidFill>
+                  <a:srgbClr val="334155"/>
+                </a:solidFill>
+                <a:latin typeface="微软雅黑"/>
+                <a:ea typeface="微软雅黑"/>
+                <a:cs typeface="微软雅黑"/>
+              </a:defRPr>
+            </a:pPr>
+            <a:r>
+              <a:rPr sz="1050" b="1">
+                <a:solidFill>
+                  <a:srgbClr val="334155"/>
+                </a:solidFill>
+                <a:latin typeface="微软雅黑"/>
+                <a:ea typeface="微软雅黑"/>
+                <a:cs typeface="微软雅黑"/>
+              </a:rPr>
+              <a:t>collect-lab-</a:t>
             </a:r>
           </a:p>
           <a:p xmlns:a="http://schemas.openxmlformats.org/drawingml/2006/main">
             <a:pPr algn="l">
               <a:buNone/>
-              <a:defRPr sz="1350" b="0">
-                <a:solidFill>
-                  <a:srgbClr val="18213D"/>
-                </a:solidFill>
-                <a:latin typeface="微软雅黑"/>
-                <a:ea typeface="微软雅黑"/>
-                <a:cs typeface="微软雅黑"/>
-              </a:defRPr>
-            </a:pPr>
-            <a:r>
-              <a:rPr sz="1350" b="0">
-                <a:solidFill>
-                  <a:srgbClr val="18213D"/>
-                </a:solidFill>
-                <a:latin typeface="微软雅黑"/>
-                <a:ea typeface="微软雅黑"/>
-                <a:cs typeface="微软雅黑"/>
-              </a:rPr>
-              <a:t>6 roles</a:t>
+              <a:defRPr sz="1050" b="1">
+                <a:solidFill>
+                  <a:srgbClr val="334155"/>
+                </a:solidFill>
+                <a:latin typeface="微软雅黑"/>
+                <a:ea typeface="微软雅黑"/>
+                <a:cs typeface="微软雅黑"/>
+              </a:defRPr>
+            </a:pPr>
+            <a:r>
+              <a:rPr sz="1050" b="1">
+                <a:solidFill>
+                  <a:srgbClr val="334155"/>
+                </a:solidFill>
+                <a:latin typeface="微软雅黑"/>
+                <a:ea typeface="微软雅黑"/>
+                <a:cs typeface="微软雅黑"/>
+              </a:rPr>
+              <a:t>evidence</a:t>
+            </a:r>
+          </a:p>
+          <a:p xmlns:a="http://schemas.openxmlformats.org/drawingml/2006/main">
+            <a:pPr algn="l">
+              <a:buNone/>
+              <a:defRPr sz="1050" b="1">
+                <a:solidFill>
+                  <a:srgbClr val="334155"/>
+                </a:solidFill>
+                <a:latin typeface="微软雅黑"/>
+                <a:ea typeface="微软雅黑"/>
+                <a:cs typeface="微软雅黑"/>
+              </a:defRPr>
+            </a:pPr>
+            <a:r>
+              <a:rPr sz="1050" b="1">
+                <a:solidFill>
+                  <a:srgbClr val="334155"/>
+                </a:solidFill>
+                <a:latin typeface="微软雅黑"/>
+                <a:ea typeface="微软雅黑"/>
+                <a:cs typeface="微软雅黑"/>
+              </a:rPr>
+              <a:t>v0.2.0 · Collector</a:t>
             </a:r>
           </a:p>
         </p:txBody>
@@ -15939,49 +14996,73 @@
           <a:p xmlns:a="http://schemas.openxmlformats.org/drawingml/2006/main">
             <a:pPr algn="l">
               <a:buNone/>
-              <a:defRPr sz="1350" b="0">
-                <a:solidFill>
-                  <a:srgbClr val="18213D"/>
-                </a:solidFill>
-                <a:latin typeface="微软雅黑"/>
-                <a:ea typeface="微软雅黑"/>
-                <a:cs typeface="微软雅黑"/>
-              </a:defRPr>
-            </a:pPr>
-            <a:r>
-              <a:rPr sz="1350" b="0">
-                <a:solidFill>
-                  <a:srgbClr val="18213D"/>
-                </a:solidFill>
-                <a:latin typeface="微软雅黑"/>
-                <a:ea typeface="微软雅黑"/>
-                <a:cs typeface="微软雅黑"/>
-              </a:rPr>
-              <a:t>Owner</a:t>
+              <a:defRPr sz="1050" b="1">
+                <a:solidFill>
+                  <a:srgbClr val="334155"/>
+                </a:solidFill>
+                <a:latin typeface="微软雅黑"/>
+                <a:ea typeface="微软雅黑"/>
+                <a:cs typeface="微软雅黑"/>
+              </a:defRPr>
+            </a:pPr>
+            <a:r>
+              <a:rPr sz="1050" b="1">
+                <a:solidFill>
+                  <a:srgbClr val="334155"/>
+                </a:solidFill>
+                <a:latin typeface="微软雅黑"/>
+                <a:ea typeface="微软雅黑"/>
+                <a:cs typeface="微软雅黑"/>
+              </a:rPr>
+              <a:t>diagnose-lab-</a:t>
             </a:r>
           </a:p>
           <a:p xmlns:a="http://schemas.openxmlformats.org/drawingml/2006/main">
             <a:pPr algn="l">
               <a:buNone/>
-              <a:defRPr sz="1350" b="0">
-                <a:solidFill>
-                  <a:srgbClr val="18213D"/>
-                </a:solidFill>
-                <a:latin typeface="微软雅黑"/>
-                <a:ea typeface="微软雅黑"/>
-                <a:cs typeface="微软雅黑"/>
-              </a:defRPr>
-            </a:pPr>
-            <a:r>
-              <a:rPr sz="1350" b="0">
-                <a:solidFill>
-                  <a:srgbClr val="18213D"/>
-                </a:solidFill>
-                <a:latin typeface="微软雅黑"/>
-                <a:ea typeface="微软雅黑"/>
-                <a:cs typeface="微软雅黑"/>
-              </a:rPr>
-              <a:t>binding</a:t>
+              <a:defRPr sz="1050" b="1">
+                <a:solidFill>
+                  <a:srgbClr val="334155"/>
+                </a:solidFill>
+                <a:latin typeface="微软雅黑"/>
+                <a:ea typeface="微软雅黑"/>
+                <a:cs typeface="微软雅黑"/>
+              </a:defRPr>
+            </a:pPr>
+            <a:r>
+              <a:rPr sz="1050" b="1">
+                <a:solidFill>
+                  <a:srgbClr val="334155"/>
+                </a:solidFill>
+                <a:latin typeface="微软雅黑"/>
+                <a:ea typeface="微软雅黑"/>
+                <a:cs typeface="微软雅黑"/>
+              </a:rPr>
+              <a:t>incident</a:t>
+            </a:r>
+          </a:p>
+          <a:p xmlns:a="http://schemas.openxmlformats.org/drawingml/2006/main">
+            <a:pPr algn="l">
+              <a:buNone/>
+              <a:defRPr sz="1050" b="1">
+                <a:solidFill>
+                  <a:srgbClr val="334155"/>
+                </a:solidFill>
+                <a:latin typeface="微软雅黑"/>
+                <a:ea typeface="微软雅黑"/>
+                <a:cs typeface="微软雅黑"/>
+              </a:defRPr>
+            </a:pPr>
+            <a:r>
+              <a:rPr sz="1050" b="1">
+                <a:solidFill>
+                  <a:srgbClr val="334155"/>
+                </a:solidFill>
+                <a:latin typeface="微软雅黑"/>
+                <a:ea typeface="微软雅黑"/>
+                <a:cs typeface="微软雅黑"/>
+              </a:rPr>
+              <a:t>v0.2.0 · RCA</a:t>
             </a:r>
           </a:p>
         </p:txBody>
@@ -16028,49 +15109,73 @@
           <a:p xmlns:a="http://schemas.openxmlformats.org/drawingml/2006/main">
             <a:pPr algn="l">
               <a:buNone/>
-              <a:defRPr sz="1350" b="0">
-                <a:solidFill>
-                  <a:srgbClr val="18213D"/>
-                </a:solidFill>
-                <a:latin typeface="微软雅黑"/>
-                <a:ea typeface="微软雅黑"/>
-                <a:cs typeface="微软雅黑"/>
-              </a:defRPr>
-            </a:pPr>
-            <a:r>
-              <a:rPr sz="1350" b="0">
-                <a:solidFill>
-                  <a:srgbClr val="18213D"/>
-                </a:solidFill>
-                <a:latin typeface="微软雅黑"/>
-                <a:ea typeface="微软雅黑"/>
-                <a:cs typeface="微软雅黑"/>
-              </a:rPr>
-              <a:t>I/O</a:t>
+              <a:defRPr sz="1050" b="1">
+                <a:solidFill>
+                  <a:srgbClr val="334155"/>
+                </a:solidFill>
+                <a:latin typeface="微软雅黑"/>
+                <a:ea typeface="微软雅黑"/>
+                <a:cs typeface="微软雅黑"/>
+              </a:defRPr>
+            </a:pPr>
+            <a:r>
+              <a:rPr sz="1050" b="1">
+                <a:solidFill>
+                  <a:srgbClr val="334155"/>
+                </a:solidFill>
+                <a:latin typeface="微软雅黑"/>
+                <a:ea typeface="微软雅黑"/>
+                <a:cs typeface="微软雅黑"/>
+              </a:rPr>
+              <a:t>plan-lab-</a:t>
             </a:r>
           </a:p>
           <a:p xmlns:a="http://schemas.openxmlformats.org/drawingml/2006/main">
             <a:pPr algn="l">
               <a:buNone/>
-              <a:defRPr sz="1350" b="0">
-                <a:solidFill>
-                  <a:srgbClr val="18213D"/>
-                </a:solidFill>
-                <a:latin typeface="微软雅黑"/>
-                <a:ea typeface="微软雅黑"/>
-                <a:cs typeface="微软雅黑"/>
-              </a:defRPr>
-            </a:pPr>
-            <a:r>
-              <a:rPr sz="1350" b="0">
-                <a:solidFill>
-                  <a:srgbClr val="18213D"/>
-                </a:solidFill>
-                <a:latin typeface="微软雅黑"/>
-                <a:ea typeface="微软雅黑"/>
-                <a:cs typeface="微软雅黑"/>
-              </a:rPr>
-              <a:t>Schema</a:t>
+              <a:defRPr sz="1050" b="1">
+                <a:solidFill>
+                  <a:srgbClr val="334155"/>
+                </a:solidFill>
+                <a:latin typeface="微软雅黑"/>
+                <a:ea typeface="微软雅黑"/>
+                <a:cs typeface="微软雅黑"/>
+              </a:defRPr>
+            </a:pPr>
+            <a:r>
+              <a:rPr sz="1050" b="1">
+                <a:solidFill>
+                  <a:srgbClr val="334155"/>
+                </a:solidFill>
+                <a:latin typeface="微软雅黑"/>
+                <a:ea typeface="微软雅黑"/>
+                <a:cs typeface="微软雅黑"/>
+              </a:rPr>
+              <a:t>experiment</a:t>
+            </a:r>
+          </a:p>
+          <a:p xmlns:a="http://schemas.openxmlformats.org/drawingml/2006/main">
+            <a:pPr algn="l">
+              <a:buNone/>
+              <a:defRPr sz="1050" b="1">
+                <a:solidFill>
+                  <a:srgbClr val="334155"/>
+                </a:solidFill>
+                <a:latin typeface="微软雅黑"/>
+                <a:ea typeface="微软雅黑"/>
+                <a:cs typeface="微软雅黑"/>
+              </a:defRPr>
+            </a:pPr>
+            <a:r>
+              <a:rPr sz="1050" b="1">
+                <a:solidFill>
+                  <a:srgbClr val="334155"/>
+                </a:solidFill>
+                <a:latin typeface="微软雅黑"/>
+                <a:ea typeface="微软雅黑"/>
+                <a:cs typeface="微软雅黑"/>
+              </a:rPr>
+              <a:t>v0.2.1 · Planner</a:t>
             </a:r>
           </a:p>
         </p:txBody>
@@ -16117,49 +15222,73 @@
           <a:p xmlns:a="http://schemas.openxmlformats.org/drawingml/2006/main">
             <a:pPr algn="l">
               <a:buNone/>
-              <a:defRPr sz="1350" b="0">
-                <a:solidFill>
-                  <a:srgbClr val="18213D"/>
-                </a:solidFill>
-                <a:latin typeface="微软雅黑"/>
-                <a:ea typeface="微软雅黑"/>
-                <a:cs typeface="微软雅黑"/>
-              </a:defRPr>
-            </a:pPr>
-            <a:r>
-              <a:rPr sz="1350" b="0">
-                <a:solidFill>
-                  <a:srgbClr val="18213D"/>
-                </a:solidFill>
-                <a:latin typeface="微软雅黑"/>
-                <a:ea typeface="微软雅黑"/>
-                <a:cs typeface="微软雅黑"/>
-              </a:rPr>
-              <a:t>Policy</a:t>
+              <a:defRPr sz="1050" b="1">
+                <a:solidFill>
+                  <a:srgbClr val="334155"/>
+                </a:solidFill>
+                <a:latin typeface="微软雅黑"/>
+                <a:ea typeface="微软雅黑"/>
+                <a:cs typeface="微软雅黑"/>
+              </a:defRPr>
+            </a:pPr>
+            <a:r>
+              <a:rPr sz="1050" b="1">
+                <a:solidFill>
+                  <a:srgbClr val="334155"/>
+                </a:solidFill>
+                <a:latin typeface="微软雅黑"/>
+                <a:ea typeface="微软雅黑"/>
+                <a:cs typeface="微软雅黑"/>
+              </a:rPr>
+              <a:t>control-lab-</a:t>
             </a:r>
           </a:p>
           <a:p xmlns:a="http://schemas.openxmlformats.org/drawingml/2006/main">
             <a:pPr algn="l">
               <a:buNone/>
-              <a:defRPr sz="1350" b="0">
-                <a:solidFill>
-                  <a:srgbClr val="18213D"/>
-                </a:solidFill>
-                <a:latin typeface="微软雅黑"/>
-                <a:ea typeface="微软雅黑"/>
-                <a:cs typeface="微软雅黑"/>
-              </a:defRPr>
-            </a:pPr>
-            <a:r>
-              <a:rPr sz="1350" b="0">
-                <a:solidFill>
-                  <a:srgbClr val="18213D"/>
-                </a:solidFill>
-                <a:latin typeface="微软雅黑"/>
-                <a:ea typeface="微软雅黑"/>
-                <a:cs typeface="微软雅黑"/>
-              </a:rPr>
-              <a:t>class</a:t>
+              <a:defRPr sz="1050" b="1">
+                <a:solidFill>
+                  <a:srgbClr val="334155"/>
+                </a:solidFill>
+                <a:latin typeface="微软雅黑"/>
+                <a:ea typeface="微软雅黑"/>
+                <a:cs typeface="微软雅黑"/>
+              </a:defRPr>
+            </a:pPr>
+            <a:r>
+              <a:rPr sz="1050" b="1">
+                <a:solidFill>
+                  <a:srgbClr val="334155"/>
+                </a:solidFill>
+                <a:latin typeface="微软雅黑"/>
+                <a:ea typeface="微软雅黑"/>
+                <a:cs typeface="微软雅黑"/>
+              </a:rPr>
+              <a:t>action</a:t>
+            </a:r>
+          </a:p>
+          <a:p xmlns:a="http://schemas.openxmlformats.org/drawingml/2006/main">
+            <a:pPr algn="l">
+              <a:buNone/>
+              <a:defRPr sz="1050" b="1">
+                <a:solidFill>
+                  <a:srgbClr val="334155"/>
+                </a:solidFill>
+                <a:latin typeface="微软雅黑"/>
+                <a:ea typeface="微软雅黑"/>
+                <a:cs typeface="微软雅黑"/>
+              </a:defRPr>
+            </a:pPr>
+            <a:r>
+              <a:rPr sz="1050" b="1">
+                <a:solidFill>
+                  <a:srgbClr val="334155"/>
+                </a:solidFill>
+                <a:latin typeface="微软雅黑"/>
+                <a:ea typeface="微软雅黑"/>
+                <a:cs typeface="微软雅黑"/>
+              </a:rPr>
+              <a:t>v0.2.0 · Executor</a:t>
             </a:r>
           </a:p>
         </p:txBody>
@@ -16206,49 +15335,73 @@
           <a:p xmlns:a="http://schemas.openxmlformats.org/drawingml/2006/main">
             <a:pPr algn="l">
               <a:buNone/>
-              <a:defRPr sz="1350" b="0">
-                <a:solidFill>
-                  <a:srgbClr val="18213D"/>
-                </a:solidFill>
-                <a:latin typeface="微软雅黑"/>
-                <a:ea typeface="微软雅黑"/>
-                <a:cs typeface="微软雅黑"/>
-              </a:defRPr>
-            </a:pPr>
-            <a:r>
-              <a:rPr sz="1350" b="0">
-                <a:solidFill>
-                  <a:srgbClr val="18213D"/>
-                </a:solidFill>
-                <a:latin typeface="微软雅黑"/>
-                <a:ea typeface="微软雅黑"/>
-                <a:cs typeface="微软雅黑"/>
-              </a:rPr>
-              <a:t>Audit</a:t>
+              <a:defRPr sz="1050" b="1">
+                <a:solidFill>
+                  <a:srgbClr val="334155"/>
+                </a:solidFill>
+                <a:latin typeface="微软雅黑"/>
+                <a:ea typeface="微软雅黑"/>
+                <a:cs typeface="微软雅黑"/>
+              </a:defRPr>
+            </a:pPr>
+            <a:r>
+              <a:rPr sz="1050" b="1">
+                <a:solidFill>
+                  <a:srgbClr val="334155"/>
+                </a:solidFill>
+                <a:latin typeface="微软雅黑"/>
+                <a:ea typeface="微软雅黑"/>
+                <a:cs typeface="微软雅黑"/>
+              </a:rPr>
+              <a:t>verify-lab-</a:t>
             </a:r>
           </a:p>
           <a:p xmlns:a="http://schemas.openxmlformats.org/drawingml/2006/main">
             <a:pPr algn="l">
               <a:buNone/>
-              <a:defRPr sz="1350" b="0">
-                <a:solidFill>
-                  <a:srgbClr val="18213D"/>
-                </a:solidFill>
-                <a:latin typeface="微软雅黑"/>
-                <a:ea typeface="微软雅黑"/>
-                <a:cs typeface="微软雅黑"/>
-              </a:defRPr>
-            </a:pPr>
-            <a:r>
-              <a:rPr sz="1350" b="0">
-                <a:solidFill>
-                  <a:srgbClr val="18213D"/>
-                </a:solidFill>
-                <a:latin typeface="微软雅黑"/>
-                <a:ea typeface="微软雅黑"/>
-                <a:cs typeface="微软雅黑"/>
-              </a:rPr>
-              <a:t>events</a:t>
+              <a:defRPr sz="1050" b="1">
+                <a:solidFill>
+                  <a:srgbClr val="334155"/>
+                </a:solidFill>
+                <a:latin typeface="微软雅黑"/>
+                <a:ea typeface="微软雅黑"/>
+                <a:cs typeface="微软雅黑"/>
+              </a:defRPr>
+            </a:pPr>
+            <a:r>
+              <a:rPr sz="1050" b="1">
+                <a:solidFill>
+                  <a:srgbClr val="334155"/>
+                </a:solidFill>
+                <a:latin typeface="微软雅黑"/>
+                <a:ea typeface="微软雅黑"/>
+                <a:cs typeface="微软雅黑"/>
+              </a:rPr>
+              <a:t>result</a:t>
+            </a:r>
+          </a:p>
+          <a:p xmlns:a="http://schemas.openxmlformats.org/drawingml/2006/main">
+            <a:pPr algn="l">
+              <a:buNone/>
+              <a:defRPr sz="1050" b="1">
+                <a:solidFill>
+                  <a:srgbClr val="334155"/>
+                </a:solidFill>
+                <a:latin typeface="微软雅黑"/>
+                <a:ea typeface="微软雅黑"/>
+                <a:cs typeface="微软雅黑"/>
+              </a:defRPr>
+            </a:pPr>
+            <a:r>
+              <a:rPr sz="1050" b="1">
+                <a:solidFill>
+                  <a:srgbClr val="334155"/>
+                </a:solidFill>
+                <a:latin typeface="微软雅黑"/>
+                <a:ea typeface="微软雅黑"/>
+                <a:cs typeface="微软雅黑"/>
+              </a:rPr>
+              <a:t>v0.2.0 · Auditor</a:t>
             </a:r>
           </a:p>
         </p:txBody>
@@ -16291,25 +15444,25 @@
           <a:p xmlns:a="http://schemas.openxmlformats.org/drawingml/2006/main">
             <a:pPr algn="ctr">
               <a:buNone/>
-              <a:defRPr sz="1575" b="1">
-                <a:solidFill>
-                  <a:srgbClr val="1D2342"/>
-                </a:solidFill>
-                <a:latin typeface="微软雅黑"/>
-                <a:ea typeface="微软雅黑"/>
-                <a:cs typeface="微软雅黑"/>
-              </a:defRPr>
-            </a:pPr>
-            <a:r>
-              <a:rPr sz="1575" b="1">
-                <a:solidFill>
-                  <a:srgbClr val="1D2342"/>
-                </a:solidFill>
-                <a:latin typeface="微软雅黑"/>
-                <a:ea typeface="微软雅黑"/>
-                <a:cs typeface="微软雅黑"/>
-              </a:rPr>
-              <a:t>skill_id · version · owner_agents · tool_dependencies · failure_states</a:t>
+              <a:defRPr sz="1275" b="1">
+                <a:solidFill>
+                  <a:srgbClr val="334155"/>
+                </a:solidFill>
+                <a:latin typeface="微软雅黑"/>
+                <a:ea typeface="微软雅黑"/>
+                <a:cs typeface="微软雅黑"/>
+              </a:defRPr>
+            </a:pPr>
+            <a:r>
+              <a:rPr sz="1275" b="1">
+                <a:solidFill>
+                  <a:srgbClr val="334155"/>
+                </a:solidFill>
+                <a:latin typeface="微软雅黑"/>
+                <a:ea typeface="微软雅黑"/>
+                <a:cs typeface="微软雅黑"/>
+              </a:rPr>
+              <a:t>Registry · Version · Owner · I/O Schema · Invocation · Failure · Security · Validation · Reuse</a:t>
             </a:r>
           </a:p>
         </p:txBody>
@@ -16356,25 +15509,49 @@
           <a:p xmlns:a="http://schemas.openxmlformats.org/drawingml/2006/main">
             <a:pPr algn="ctr">
               <a:buNone/>
-              <a:defRPr sz="1425" b="0">
-                <a:solidFill>
-                  <a:srgbClr val="18213D"/>
-                </a:solidFill>
-                <a:latin typeface="微软雅黑"/>
-                <a:ea typeface="微软雅黑"/>
-                <a:cs typeface="微软雅黑"/>
-              </a:defRPr>
-            </a:pPr>
-            <a:r>
-              <a:rPr sz="1425" b="0">
-                <a:solidFill>
-                  <a:srgbClr val="18213D"/>
-                </a:solidFill>
-                <a:latin typeface="微软雅黑"/>
-                <a:ea typeface="微软雅黑"/>
-                <a:cs typeface="微软雅黑"/>
-              </a:rPr>
-              <a:t>未授权 Agent 或 Registry 损坏时 fail closed；不新增 Agent/Skill。</a:t>
+              <a:defRPr sz="1350" b="1">
+                <a:solidFill>
+                  <a:srgbClr val="334155"/>
+                </a:solidFill>
+                <a:latin typeface="微软雅黑"/>
+                <a:ea typeface="微软雅黑"/>
+                <a:cs typeface="微软雅黑"/>
+              </a:defRPr>
+            </a:pPr>
+            <a:r>
+              <a:rPr sz="1350" b="1">
+                <a:solidFill>
+                  <a:srgbClr val="334155"/>
+                </a:solidFill>
+                <a:latin typeface="微软雅黑"/>
+                <a:ea typeface="微软雅黑"/>
+                <a:cs typeface="微软雅黑"/>
+              </a:rPr>
+              <a:t>Commander Skills</a:t>
+            </a:r>
+          </a:p>
+          <a:p xmlns:a="http://schemas.openxmlformats.org/drawingml/2006/main">
+            <a:pPr algn="ctr">
+              <a:buNone/>
+              <a:defRPr sz="1350" b="1">
+                <a:solidFill>
+                  <a:srgbClr val="334155"/>
+                </a:solidFill>
+                <a:latin typeface="微软雅黑"/>
+                <a:ea typeface="微软雅黑"/>
+                <a:cs typeface="微软雅黑"/>
+              </a:defRPr>
+            </a:pPr>
+            <a:r>
+              <a:rPr sz="1350" b="1">
+                <a:solidFill>
+                  <a:srgbClr val="334155"/>
+                </a:solidFill>
+                <a:latin typeface="微软雅黑"/>
+                <a:ea typeface="微软雅黑"/>
+                <a:cs typeface="微软雅黑"/>
+              </a:rPr>
+              <a:t>pack-lab-evidence 0.2.0  ·  publish-case-memory 0.1.0</a:t>
             </a:r>
           </a:p>
         </p:txBody>
@@ -16448,7 +15625,7 @@
                 <a:ea typeface="微软雅黑"/>
                 <a:cs typeface="微软雅黑"/>
               </a:rPr>
-              <a:t>04 · Trust State Machine v1</a:t>
+              <a:t>04 · Agent / Skill / Tool</a:t>
             </a:r>
             <a:endParaRPr sz="1200"/>
           </a:p>
@@ -16494,7 +15671,7 @@
                 <a:ea typeface="微软雅黑"/>
                 <a:cs typeface="微软雅黑"/>
               </a:rPr>
-              <a:t>审批必须先于执行</a:t>
+              <a:t>Agent、Skill、Tool 三层分离</a:t>
             </a:r>
             <a:endParaRPr sz="2900"/>
           </a:p>
@@ -16536,7 +15713,7 @@
                 <a:ea typeface="微软雅黑"/>
                 <a:cs typeface="微软雅黑"/>
               </a:rPr>
-              <a:t>只有结构化产物可迁移状态；自然语言和 Dashboard 回放不是执行证据。</a:t>
+              <a:t>control-lab-action v0.2.0 · owner=safe-executor · 真实可验证契约</a:t>
             </a:r>
             <a:endParaRPr>
               <a:latin typeface="微软雅黑"/>
@@ -16753,49 +15930,73 @@
           <a:p xmlns:a="http://schemas.openxmlformats.org/drawingml/2006/main">
             <a:pPr algn="l">
               <a:buNone/>
-              <a:defRPr sz="1350" b="0">
-                <a:solidFill>
-                  <a:srgbClr val="18213D"/>
-                </a:solidFill>
-                <a:latin typeface="微软雅黑"/>
-                <a:ea typeface="微软雅黑"/>
-                <a:cs typeface="微软雅黑"/>
-              </a:defRPr>
-            </a:pPr>
-            <a:r>
-              <a:rPr sz="1350" b="0">
-                <a:solidFill>
-                  <a:srgbClr val="18213D"/>
-                </a:solidFill>
-                <a:latin typeface="微软雅黑"/>
-                <a:ea typeface="微软雅黑"/>
-                <a:cs typeface="微软雅黑"/>
-              </a:rPr>
-              <a:t>PLAN</a:t>
+              <a:defRPr sz="1200" b="1">
+                <a:solidFill>
+                  <a:srgbClr val="334155"/>
+                </a:solidFill>
+                <a:latin typeface="微软雅黑"/>
+                <a:ea typeface="微软雅黑"/>
+                <a:cs typeface="微软雅黑"/>
+              </a:defRPr>
+            </a:pPr>
+            <a:r>
+              <a:rPr sz="1200" b="1">
+                <a:solidFill>
+                  <a:srgbClr val="334155"/>
+                </a:solidFill>
+                <a:latin typeface="微软雅黑"/>
+                <a:ea typeface="微软雅黑"/>
+                <a:cs typeface="微软雅黑"/>
+              </a:rPr>
+              <a:t>Agent</a:t>
             </a:r>
           </a:p>
           <a:p xmlns:a="http://schemas.openxmlformats.org/drawingml/2006/main">
             <a:pPr algn="l">
               <a:buNone/>
-              <a:defRPr sz="1350" b="0">
-                <a:solidFill>
-                  <a:srgbClr val="18213D"/>
-                </a:solidFill>
-                <a:latin typeface="微软雅黑"/>
-                <a:ea typeface="微软雅黑"/>
-                <a:cs typeface="微软雅黑"/>
-              </a:defRPr>
-            </a:pPr>
-            <a:r>
-              <a:rPr sz="1350" b="0">
-                <a:solidFill>
-                  <a:srgbClr val="18213D"/>
-                </a:solidFill>
-                <a:latin typeface="微软雅黑"/>
-                <a:ea typeface="微软雅黑"/>
-                <a:cs typeface="微软雅黑"/>
-              </a:rPr>
-              <a:t>READY</a:t>
+              <a:defRPr sz="1200" b="1">
+                <a:solidFill>
+                  <a:srgbClr val="334155"/>
+                </a:solidFill>
+                <a:latin typeface="微软雅黑"/>
+                <a:ea typeface="微软雅黑"/>
+                <a:cs typeface="微软雅黑"/>
+              </a:defRPr>
+            </a:pPr>
+            <a:r>
+              <a:rPr sz="1200" b="1">
+                <a:solidFill>
+                  <a:srgbClr val="334155"/>
+                </a:solidFill>
+                <a:latin typeface="微软雅黑"/>
+                <a:ea typeface="微软雅黑"/>
+                <a:cs typeface="微软雅黑"/>
+              </a:rPr>
+              <a:t>Safe Executor</a:t>
+            </a:r>
+          </a:p>
+          <a:p xmlns:a="http://schemas.openxmlformats.org/drawingml/2006/main">
+            <a:pPr algn="l">
+              <a:buNone/>
+              <a:defRPr sz="1200" b="1">
+                <a:solidFill>
+                  <a:srgbClr val="334155"/>
+                </a:solidFill>
+                <a:latin typeface="微软雅黑"/>
+                <a:ea typeface="微软雅黑"/>
+                <a:cs typeface="微软雅黑"/>
+              </a:defRPr>
+            </a:pPr>
+            <a:r>
+              <a:rPr sz="1200" b="1">
+                <a:solidFill>
+                  <a:srgbClr val="334155"/>
+                </a:solidFill>
+                <a:latin typeface="微软雅黑"/>
+                <a:ea typeface="微软雅黑"/>
+                <a:cs typeface="微软雅黑"/>
+              </a:rPr>
+              <a:t>不能自证成功</a:t>
             </a:r>
           </a:p>
         </p:txBody>
@@ -16842,49 +16043,97 @@
           <a:p xmlns:a="http://schemas.openxmlformats.org/drawingml/2006/main">
             <a:pPr algn="l">
               <a:buNone/>
-              <a:defRPr sz="1350" b="0">
-                <a:solidFill>
-                  <a:srgbClr val="18213D"/>
-                </a:solidFill>
-                <a:latin typeface="微软雅黑"/>
-                <a:ea typeface="微软雅黑"/>
-                <a:cs typeface="微软雅黑"/>
-              </a:defRPr>
-            </a:pPr>
-            <a:r>
-              <a:rPr sz="1350" b="0">
-                <a:solidFill>
-                  <a:srgbClr val="18213D"/>
-                </a:solidFill>
-                <a:latin typeface="微软雅黑"/>
-                <a:ea typeface="微软雅黑"/>
-                <a:cs typeface="微软雅黑"/>
-              </a:rPr>
-              <a:t>POLICY</a:t>
+              <a:defRPr sz="1200" b="1">
+                <a:solidFill>
+                  <a:srgbClr val="334155"/>
+                </a:solidFill>
+                <a:latin typeface="微软雅黑"/>
+                <a:ea typeface="微软雅黑"/>
+                <a:cs typeface="微软雅黑"/>
+              </a:defRPr>
+            </a:pPr>
+            <a:r>
+              <a:rPr sz="1200" b="1">
+                <a:solidFill>
+                  <a:srgbClr val="334155"/>
+                </a:solidFill>
+                <a:latin typeface="微软雅黑"/>
+                <a:ea typeface="微软雅黑"/>
+                <a:cs typeface="微软雅黑"/>
+              </a:rPr>
+              <a:t>Skill</a:t>
             </a:r>
           </a:p>
           <a:p xmlns:a="http://schemas.openxmlformats.org/drawingml/2006/main">
             <a:pPr algn="l">
               <a:buNone/>
-              <a:defRPr sz="1350" b="0">
-                <a:solidFill>
-                  <a:srgbClr val="18213D"/>
-                </a:solidFill>
-                <a:latin typeface="微软雅黑"/>
-                <a:ea typeface="微软雅黑"/>
-                <a:cs typeface="微软雅黑"/>
-              </a:defRPr>
-            </a:pPr>
-            <a:r>
-              <a:rPr sz="1350" b="0">
-                <a:solidFill>
-                  <a:srgbClr val="18213D"/>
-                </a:solidFill>
-                <a:latin typeface="微软雅黑"/>
-                <a:ea typeface="微软雅黑"/>
-                <a:cs typeface="微软雅黑"/>
-              </a:rPr>
-              <a:t>CHECKING</a:t>
+              <a:defRPr sz="1200" b="1">
+                <a:solidFill>
+                  <a:srgbClr val="334155"/>
+                </a:solidFill>
+                <a:latin typeface="微软雅黑"/>
+                <a:ea typeface="微软雅黑"/>
+                <a:cs typeface="微软雅黑"/>
+              </a:defRPr>
+            </a:pPr>
+            <a:r>
+              <a:rPr sz="1200" b="1">
+                <a:solidFill>
+                  <a:srgbClr val="334155"/>
+                </a:solidFill>
+                <a:latin typeface="微软雅黑"/>
+                <a:ea typeface="微软雅黑"/>
+                <a:cs typeface="微软雅黑"/>
+              </a:rPr>
+              <a:t>control-</a:t>
+            </a:r>
+          </a:p>
+          <a:p xmlns:a="http://schemas.openxmlformats.org/drawingml/2006/main">
+            <a:pPr algn="l">
+              <a:buNone/>
+              <a:defRPr sz="1200" b="1">
+                <a:solidFill>
+                  <a:srgbClr val="334155"/>
+                </a:solidFill>
+                <a:latin typeface="微软雅黑"/>
+                <a:ea typeface="微软雅黑"/>
+                <a:cs typeface="微软雅黑"/>
+              </a:defRPr>
+            </a:pPr>
+            <a:r>
+              <a:rPr sz="1200" b="1">
+                <a:solidFill>
+                  <a:srgbClr val="334155"/>
+                </a:solidFill>
+                <a:latin typeface="微软雅黑"/>
+                <a:ea typeface="微软雅黑"/>
+                <a:cs typeface="微软雅黑"/>
+              </a:rPr>
+              <a:t>lab-action</a:t>
+            </a:r>
+          </a:p>
+          <a:p xmlns:a="http://schemas.openxmlformats.org/drawingml/2006/main">
+            <a:pPr algn="l">
+              <a:buNone/>
+              <a:defRPr sz="1200" b="1">
+                <a:solidFill>
+                  <a:srgbClr val="334155"/>
+                </a:solidFill>
+                <a:latin typeface="微软雅黑"/>
+                <a:ea typeface="微软雅黑"/>
+                <a:cs typeface="微软雅黑"/>
+              </a:defRPr>
+            </a:pPr>
+            <a:r>
+              <a:rPr sz="1200" b="1">
+                <a:solidFill>
+                  <a:srgbClr val="334155"/>
+                </a:solidFill>
+                <a:latin typeface="微软雅黑"/>
+                <a:ea typeface="微软雅黑"/>
+                <a:cs typeface="微软雅黑"/>
+              </a:rPr>
+              <a:t>版本化契约</a:t>
             </a:r>
           </a:p>
         </p:txBody>
@@ -16931,49 +16180,73 @@
           <a:p xmlns:a="http://schemas.openxmlformats.org/drawingml/2006/main">
             <a:pPr algn="l">
               <a:buNone/>
-              <a:defRPr sz="1350" b="0">
-                <a:solidFill>
-                  <a:srgbClr val="18213D"/>
-                </a:solidFill>
-                <a:latin typeface="微软雅黑"/>
-                <a:ea typeface="微软雅黑"/>
-                <a:cs typeface="微软雅黑"/>
-              </a:defRPr>
-            </a:pPr>
-            <a:r>
-              <a:rPr sz="1350" b="0">
-                <a:solidFill>
-                  <a:srgbClr val="18213D"/>
-                </a:solidFill>
-                <a:latin typeface="微软雅黑"/>
-                <a:ea typeface="微软雅黑"/>
-                <a:cs typeface="微软雅黑"/>
-              </a:rPr>
-              <a:t>APPROVAL</a:t>
+              <a:defRPr sz="1200" b="1">
+                <a:solidFill>
+                  <a:srgbClr val="334155"/>
+                </a:solidFill>
+                <a:latin typeface="微软雅黑"/>
+                <a:ea typeface="微软雅黑"/>
+                <a:cs typeface="微软雅黑"/>
+              </a:defRPr>
+            </a:pPr>
+            <a:r>
+              <a:rPr sz="1200" b="1">
+                <a:solidFill>
+                  <a:srgbClr val="334155"/>
+                </a:solidFill>
+                <a:latin typeface="微软雅黑"/>
+                <a:ea typeface="微软雅黑"/>
+                <a:cs typeface="微软雅黑"/>
+              </a:rPr>
+              <a:t>Tool</a:t>
             </a:r>
           </a:p>
           <a:p xmlns:a="http://schemas.openxmlformats.org/drawingml/2006/main">
             <a:pPr algn="l">
               <a:buNone/>
-              <a:defRPr sz="1350" b="0">
-                <a:solidFill>
-                  <a:srgbClr val="18213D"/>
-                </a:solidFill>
-                <a:latin typeface="微软雅黑"/>
-                <a:ea typeface="微软雅黑"/>
-                <a:cs typeface="微软雅黑"/>
-              </a:defRPr>
-            </a:pPr>
-            <a:r>
-              <a:rPr sz="1350" b="0">
-                <a:solidFill>
-                  <a:srgbClr val="18213D"/>
-                </a:solidFill>
-                <a:latin typeface="微软雅黑"/>
-                <a:ea typeface="微软雅黑"/>
-                <a:cs typeface="微软雅黑"/>
-              </a:rPr>
-              <a:t>PENDING</a:t>
+              <a:defRPr sz="1200" b="1">
+                <a:solidFill>
+                  <a:srgbClr val="334155"/>
+                </a:solidFill>
+                <a:latin typeface="微软雅黑"/>
+                <a:ea typeface="微软雅黑"/>
+                <a:cs typeface="微软雅黑"/>
+              </a:defRPr>
+            </a:pPr>
+            <a:r>
+              <a:rPr sz="1200" b="1">
+                <a:solidFill>
+                  <a:srgbClr val="334155"/>
+                </a:solidFill>
+                <a:latin typeface="微软雅黑"/>
+                <a:ea typeface="微软雅黑"/>
+                <a:cs typeface="微软雅黑"/>
+              </a:rPr>
+              <a:t>Runner Gateway</a:t>
+            </a:r>
+          </a:p>
+          <a:p xmlns:a="http://schemas.openxmlformats.org/drawingml/2006/main">
+            <a:pPr algn="l">
+              <a:buNone/>
+              <a:defRPr sz="1200" b="1">
+                <a:solidFill>
+                  <a:srgbClr val="334155"/>
+                </a:solidFill>
+                <a:latin typeface="微软雅黑"/>
+                <a:ea typeface="微软雅黑"/>
+                <a:cs typeface="微软雅黑"/>
+              </a:defRPr>
+            </a:pPr>
+            <a:r>
+              <a:rPr sz="1200" b="1">
+                <a:solidFill>
+                  <a:srgbClr val="334155"/>
+                </a:solidFill>
+                <a:latin typeface="微软雅黑"/>
+                <a:ea typeface="微软雅黑"/>
+                <a:cs typeface="微软雅黑"/>
+              </a:rPr>
+              <a:t>外部执行接口</a:t>
             </a:r>
           </a:p>
         </p:txBody>
@@ -17020,25 +16293,73 @@
           <a:p xmlns:a="http://schemas.openxmlformats.org/drawingml/2006/main">
             <a:pPr algn="l">
               <a:buNone/>
-              <a:defRPr sz="1350" b="0">
-                <a:solidFill>
-                  <a:srgbClr val="18213D"/>
-                </a:solidFill>
-                <a:latin typeface="微软雅黑"/>
-                <a:ea typeface="微软雅黑"/>
-                <a:cs typeface="微软雅黑"/>
-              </a:defRPr>
-            </a:pPr>
-            <a:r>
-              <a:rPr sz="1350" b="0">
-                <a:solidFill>
-                  <a:srgbClr val="18213D"/>
-                </a:solidFill>
-                <a:latin typeface="微软雅黑"/>
-                <a:ea typeface="微软雅黑"/>
-                <a:cs typeface="微软雅黑"/>
-              </a:rPr>
-              <a:t>APPROVED</a:t>
+              <a:defRPr sz="1200" b="1">
+                <a:solidFill>
+                  <a:srgbClr val="334155"/>
+                </a:solidFill>
+                <a:latin typeface="微软雅黑"/>
+                <a:ea typeface="微软雅黑"/>
+                <a:cs typeface="微软雅黑"/>
+              </a:defRPr>
+            </a:pPr>
+            <a:r>
+              <a:rPr sz="1200" b="1">
+                <a:solidFill>
+                  <a:srgbClr val="334155"/>
+                </a:solidFill>
+                <a:latin typeface="微软雅黑"/>
+                <a:ea typeface="微软雅黑"/>
+                <a:cs typeface="微软雅黑"/>
+              </a:rPr>
+              <a:t>Input</a:t>
+            </a:r>
+          </a:p>
+          <a:p xmlns:a="http://schemas.openxmlformats.org/drawingml/2006/main">
+            <a:pPr algn="l">
+              <a:buNone/>
+              <a:defRPr sz="1200" b="1">
+                <a:solidFill>
+                  <a:srgbClr val="334155"/>
+                </a:solidFill>
+                <a:latin typeface="微软雅黑"/>
+                <a:ea typeface="微软雅黑"/>
+                <a:cs typeface="微软雅黑"/>
+              </a:defRPr>
+            </a:pPr>
+            <a:r>
+              <a:rPr sz="1200" b="1">
+                <a:solidFill>
+                  <a:srgbClr val="334155"/>
+                </a:solidFill>
+                <a:latin typeface="微软雅黑"/>
+                <a:ea typeface="微软雅黑"/>
+                <a:cs typeface="微软雅黑"/>
+              </a:rPr>
+              <a:t>Approved Plan</a:t>
+            </a:r>
+          </a:p>
+          <a:p xmlns:a="http://schemas.openxmlformats.org/drawingml/2006/main">
+            <a:pPr algn="l">
+              <a:buNone/>
+              <a:defRPr sz="1200" b="1">
+                <a:solidFill>
+                  <a:srgbClr val="334155"/>
+                </a:solidFill>
+                <a:latin typeface="微软雅黑"/>
+                <a:ea typeface="微软雅黑"/>
+                <a:cs typeface="微软雅黑"/>
+              </a:defRPr>
+            </a:pPr>
+            <a:r>
+              <a:rPr sz="1200" b="1">
+                <a:solidFill>
+                  <a:srgbClr val="334155"/>
+                </a:solidFill>
+                <a:latin typeface="微软雅黑"/>
+                <a:ea typeface="微软雅黑"/>
+                <a:cs typeface="微软雅黑"/>
+              </a:rPr>
+              <a:t>+ Approval</a:t>
             </a:r>
           </a:p>
         </p:txBody>
@@ -17085,25 +16406,73 @@
           <a:p xmlns:a="http://schemas.openxmlformats.org/drawingml/2006/main">
             <a:pPr algn="l">
               <a:buNone/>
-              <a:defRPr sz="1350" b="0">
-                <a:solidFill>
-                  <a:srgbClr val="18213D"/>
-                </a:solidFill>
-                <a:latin typeface="微软雅黑"/>
-                <a:ea typeface="微软雅黑"/>
-                <a:cs typeface="微软雅黑"/>
-              </a:defRPr>
-            </a:pPr>
-            <a:r>
-              <a:rPr sz="1350" b="0">
-                <a:solidFill>
-                  <a:srgbClr val="18213D"/>
-                </a:solidFill>
-                <a:latin typeface="微软雅黑"/>
-                <a:ea typeface="微软雅黑"/>
-                <a:cs typeface="微软雅黑"/>
-              </a:rPr>
-              <a:t>EXECUTING</a:t>
+              <a:defRPr sz="1200" b="1">
+                <a:solidFill>
+                  <a:srgbClr val="334155"/>
+                </a:solidFill>
+                <a:latin typeface="微软雅黑"/>
+                <a:ea typeface="微软雅黑"/>
+                <a:cs typeface="微软雅黑"/>
+              </a:defRPr>
+            </a:pPr>
+            <a:r>
+              <a:rPr sz="1200" b="1">
+                <a:solidFill>
+                  <a:srgbClr val="334155"/>
+                </a:solidFill>
+                <a:latin typeface="微软雅黑"/>
+                <a:ea typeface="微软雅黑"/>
+                <a:cs typeface="微软雅黑"/>
+              </a:rPr>
+              <a:t>Output</a:t>
+            </a:r>
+          </a:p>
+          <a:p xmlns:a="http://schemas.openxmlformats.org/drawingml/2006/main">
+            <a:pPr algn="l">
+              <a:buNone/>
+              <a:defRPr sz="1200" b="1">
+                <a:solidFill>
+                  <a:srgbClr val="334155"/>
+                </a:solidFill>
+                <a:latin typeface="微软雅黑"/>
+                <a:ea typeface="微软雅黑"/>
+                <a:cs typeface="微软雅黑"/>
+              </a:defRPr>
+            </a:pPr>
+            <a:r>
+              <a:rPr sz="1200" b="1">
+                <a:solidFill>
+                  <a:srgbClr val="334155"/>
+                </a:solidFill>
+                <a:latin typeface="微软雅黑"/>
+                <a:ea typeface="微软雅黑"/>
+                <a:cs typeface="微软雅黑"/>
+              </a:rPr>
+              <a:t>Run Result</a:t>
+            </a:r>
+          </a:p>
+          <a:p xmlns:a="http://schemas.openxmlformats.org/drawingml/2006/main">
+            <a:pPr algn="l">
+              <a:buNone/>
+              <a:defRPr sz="1200" b="1">
+                <a:solidFill>
+                  <a:srgbClr val="334155"/>
+                </a:solidFill>
+                <a:latin typeface="微软雅黑"/>
+                <a:ea typeface="微软雅黑"/>
+                <a:cs typeface="微软雅黑"/>
+              </a:defRPr>
+            </a:pPr>
+            <a:r>
+              <a:rPr sz="1200" b="1">
+                <a:solidFill>
+                  <a:srgbClr val="334155"/>
+                </a:solidFill>
+                <a:latin typeface="微软雅黑"/>
+                <a:ea typeface="微软雅黑"/>
+                <a:cs typeface="微软雅黑"/>
+              </a:rPr>
+              <a:t>+ Manifest</a:t>
             </a:r>
           </a:p>
         </p:txBody>
@@ -17150,25 +16519,73 @@
           <a:p xmlns:a="http://schemas.openxmlformats.org/drawingml/2006/main">
             <a:pPr algn="l">
               <a:buNone/>
-              <a:defRPr sz="1350" b="0">
-                <a:solidFill>
-                  <a:srgbClr val="18213D"/>
-                </a:solidFill>
-                <a:latin typeface="微软雅黑"/>
-                <a:ea typeface="微软雅黑"/>
-                <a:cs typeface="微软雅黑"/>
-              </a:defRPr>
-            </a:pPr>
-            <a:r>
-              <a:rPr sz="1350" b="0">
-                <a:solidFill>
-                  <a:srgbClr val="18213D"/>
-                </a:solidFill>
-                <a:latin typeface="微软雅黑"/>
-                <a:ea typeface="微软雅黑"/>
-                <a:cs typeface="微软雅黑"/>
-              </a:rPr>
-              <a:t>VERIFYING</a:t>
+              <a:defRPr sz="1200" b="1">
+                <a:solidFill>
+                  <a:srgbClr val="334155"/>
+                </a:solidFill>
+                <a:latin typeface="微软雅黑"/>
+                <a:ea typeface="微软雅黑"/>
+                <a:cs typeface="微软雅黑"/>
+              </a:defRPr>
+            </a:pPr>
+            <a:r>
+              <a:rPr sz="1200" b="1">
+                <a:solidFill>
+                  <a:srgbClr val="334155"/>
+                </a:solidFill>
+                <a:latin typeface="微软雅黑"/>
+                <a:ea typeface="微软雅黑"/>
+                <a:cs typeface="微软雅黑"/>
+              </a:rPr>
+              <a:t>Boundary</a:t>
+            </a:r>
+          </a:p>
+          <a:p xmlns:a="http://schemas.openxmlformats.org/drawingml/2006/main">
+            <a:pPr algn="l">
+              <a:buNone/>
+              <a:defRPr sz="1200" b="1">
+                <a:solidFill>
+                  <a:srgbClr val="334155"/>
+                </a:solidFill>
+                <a:latin typeface="微软雅黑"/>
+                <a:ea typeface="微软雅黑"/>
+                <a:cs typeface="微软雅黑"/>
+              </a:defRPr>
+            </a:pPr>
+            <a:r>
+              <a:rPr sz="1200" b="1">
+                <a:solidFill>
+                  <a:srgbClr val="334155"/>
+                </a:solidFill>
+                <a:latin typeface="微软雅黑"/>
+                <a:ea typeface="微软雅黑"/>
+                <a:cs typeface="微软雅黑"/>
+              </a:rPr>
+              <a:t>network=none</a:t>
+            </a:r>
+          </a:p>
+          <a:p xmlns:a="http://schemas.openxmlformats.org/drawingml/2006/main">
+            <a:pPr algn="l">
+              <a:buNone/>
+              <a:defRPr sz="1200" b="1">
+                <a:solidFill>
+                  <a:srgbClr val="334155"/>
+                </a:solidFill>
+                <a:latin typeface="微软雅黑"/>
+                <a:ea typeface="微软雅黑"/>
+                <a:cs typeface="微软雅黑"/>
+              </a:defRPr>
+            </a:pPr>
+            <a:r>
+              <a:rPr sz="1200" b="1">
+                <a:solidFill>
+                  <a:srgbClr val="334155"/>
+                </a:solidFill>
+                <a:latin typeface="微软雅黑"/>
+                <a:ea typeface="微软雅黑"/>
+                <a:cs typeface="微软雅黑"/>
+              </a:rPr>
+              <a:t>protected paths</a:t>
             </a:r>
           </a:p>
         </p:txBody>
@@ -17227,7 +16644,7 @@
                 <a:ea typeface="微软雅黑"/>
                 <a:cs typeface="微软雅黑"/>
               </a:rPr>
-              <a:t>Trust State Machine v1</a:t>
+              <a:t>Invocation：Policy passed &amp;&amp; scoped approval exists</a:t>
             </a:r>
           </a:p>
         </p:txBody>
@@ -17274,49 +16691,73 @@
           <a:p xmlns:a="http://schemas.openxmlformats.org/drawingml/2006/main">
             <a:pPr algn="l">
               <a:buNone/>
-              <a:defRPr sz="1425" b="0">
-                <a:solidFill>
-                  <a:srgbClr val="18213D"/>
-                </a:solidFill>
-                <a:latin typeface="微软雅黑"/>
-                <a:ea typeface="微软雅黑"/>
-                <a:cs typeface="微软雅黑"/>
-              </a:defRPr>
-            </a:pPr>
-            <a:r>
-              <a:rPr sz="1425" b="0">
-                <a:solidFill>
-                  <a:srgbClr val="18213D"/>
-                </a:solidFill>
-                <a:latin typeface="微软雅黑"/>
-                <a:ea typeface="微软雅黑"/>
-                <a:cs typeface="微软雅黑"/>
-              </a:rPr>
-              <a:t>拒绝 / 缺审批 / 晚审批</a:t>
+              <a:defRPr sz="1200" b="1">
+                <a:solidFill>
+                  <a:srgbClr val="334155"/>
+                </a:solidFill>
+                <a:latin typeface="微软雅黑"/>
+                <a:ea typeface="微软雅黑"/>
+                <a:cs typeface="微软雅黑"/>
+              </a:defRPr>
+            </a:pPr>
+            <a:r>
+              <a:rPr sz="1200" b="1">
+                <a:solidFill>
+                  <a:srgbClr val="334155"/>
+                </a:solidFill>
+                <a:latin typeface="微软雅黑"/>
+                <a:ea typeface="微软雅黑"/>
+                <a:cs typeface="微软雅黑"/>
+              </a:rPr>
+              <a:t>Failure</a:t>
             </a:r>
           </a:p>
           <a:p xmlns:a="http://schemas.openxmlformats.org/drawingml/2006/main">
             <a:pPr algn="l">
               <a:buNone/>
-              <a:defRPr sz="1425" b="0">
-                <a:solidFill>
-                  <a:srgbClr val="18213D"/>
-                </a:solidFill>
-                <a:latin typeface="微软雅黑"/>
-                <a:ea typeface="微软雅黑"/>
-                <a:cs typeface="微软雅黑"/>
-              </a:defRPr>
-            </a:pPr>
-            <a:r>
-              <a:rPr sz="1425" b="0">
-                <a:solidFill>
-                  <a:srgbClr val="18213D"/>
-                </a:solidFill>
-                <a:latin typeface="微软雅黑"/>
-                <a:ea typeface="微软雅黑"/>
-                <a:cs typeface="微软雅黑"/>
-              </a:rPr>
-              <a:t>→ BLOCKED</a:t>
+              <a:defRPr sz="1200" b="1">
+                <a:solidFill>
+                  <a:srgbClr val="334155"/>
+                </a:solidFill>
+                <a:latin typeface="微软雅黑"/>
+                <a:ea typeface="微软雅黑"/>
+                <a:cs typeface="微软雅黑"/>
+              </a:defRPr>
+            </a:pPr>
+            <a:r>
+              <a:rPr sz="1200" b="1">
+                <a:solidFill>
+                  <a:srgbClr val="334155"/>
+                </a:solidFill>
+                <a:latin typeface="微软雅黑"/>
+                <a:ea typeface="微软雅黑"/>
+                <a:cs typeface="微软雅黑"/>
+              </a:rPr>
+              <a:t>capability missing / timeout / policy mismatch</a:t>
+            </a:r>
+          </a:p>
+          <a:p xmlns:a="http://schemas.openxmlformats.org/drawingml/2006/main">
+            <a:pPr algn="l">
+              <a:buNone/>
+              <a:defRPr sz="1200" b="1">
+                <a:solidFill>
+                  <a:srgbClr val="334155"/>
+                </a:solidFill>
+                <a:latin typeface="微软雅黑"/>
+                <a:ea typeface="微软雅黑"/>
+                <a:cs typeface="微软雅黑"/>
+              </a:defRPr>
+            </a:pPr>
+            <a:r>
+              <a:rPr sz="1200" b="1">
+                <a:solidFill>
+                  <a:srgbClr val="334155"/>
+                </a:solidFill>
+                <a:latin typeface="微软雅黑"/>
+                <a:ea typeface="微软雅黑"/>
+                <a:cs typeface="微软雅黑"/>
+              </a:rPr>
+              <a:t>→ fail closed</a:t>
             </a:r>
           </a:p>
         </p:txBody>
@@ -17363,49 +16804,73 @@
           <a:p xmlns:a="http://schemas.openxmlformats.org/drawingml/2006/main">
             <a:pPr algn="l">
               <a:buNone/>
-              <a:defRPr sz="1425" b="0">
-                <a:solidFill>
-                  <a:srgbClr val="18213D"/>
-                </a:solidFill>
-                <a:latin typeface="微软雅黑"/>
-                <a:ea typeface="微软雅黑"/>
-                <a:cs typeface="微软雅黑"/>
-              </a:defRPr>
-            </a:pPr>
-            <a:r>
-              <a:rPr sz="1425" b="0">
-                <a:solidFill>
-                  <a:srgbClr val="18213D"/>
-                </a:solidFill>
-                <a:latin typeface="微软雅黑"/>
-                <a:ea typeface="微软雅黑"/>
-                <a:cs typeface="微软雅黑"/>
-              </a:rPr>
-              <a:t>Auditor 裁决</a:t>
+              <a:defRPr sz="1200" b="1">
+                <a:solidFill>
+                  <a:srgbClr val="334155"/>
+                </a:solidFill>
+                <a:latin typeface="微软雅黑"/>
+                <a:ea typeface="微软雅黑"/>
+                <a:cs typeface="微软雅黑"/>
+              </a:defRPr>
+            </a:pPr>
+            <a:r>
+              <a:rPr sz="1200" b="1">
+                <a:solidFill>
+                  <a:srgbClr val="334155"/>
+                </a:solidFill>
+                <a:latin typeface="微软雅黑"/>
+                <a:ea typeface="微软雅黑"/>
+                <a:cs typeface="微软雅黑"/>
+              </a:rPr>
+              <a:t>Validation + Reuse</a:t>
             </a:r>
           </a:p>
           <a:p xmlns:a="http://schemas.openxmlformats.org/drawingml/2006/main">
             <a:pPr algn="l">
               <a:buNone/>
-              <a:defRPr sz="1425" b="0">
-                <a:solidFill>
-                  <a:srgbClr val="18213D"/>
-                </a:solidFill>
-                <a:latin typeface="微软雅黑"/>
-                <a:ea typeface="微软雅黑"/>
-                <a:cs typeface="微软雅黑"/>
-              </a:defRPr>
-            </a:pPr>
-            <a:r>
-              <a:rPr sz="1425" b="0">
-                <a:solidFill>
-                  <a:srgbClr val="18213D"/>
-                </a:solidFill>
-                <a:latin typeface="微软雅黑"/>
-                <a:ea typeface="微软雅黑"/>
-                <a:cs typeface="微软雅黑"/>
-              </a:rPr>
-              <a:t>→ RESOLVED / ROLLED_BACK / BLOCKED</a:t>
+              <a:defRPr sz="1200" b="1">
+                <a:solidFill>
+                  <a:srgbClr val="334155"/>
+                </a:solidFill>
+                <a:latin typeface="微软雅黑"/>
+                <a:ea typeface="微软雅黑"/>
+                <a:cs typeface="微软雅黑"/>
+              </a:defRPr>
+            </a:pPr>
+            <a:r>
+              <a:rPr sz="1200" b="1">
+                <a:solidFill>
+                  <a:srgbClr val="334155"/>
+                </a:solidFill>
+                <a:latin typeface="微软雅黑"/>
+                <a:ea typeface="微软雅黑"/>
+                <a:cs typeface="微软雅黑"/>
+              </a:rPr>
+              <a:t>manifest + protected hashes</a:t>
+            </a:r>
+          </a:p>
+          <a:p xmlns:a="http://schemas.openxmlformats.org/drawingml/2006/main">
+            <a:pPr algn="l">
+              <a:buNone/>
+              <a:defRPr sz="1200" b="1">
+                <a:solidFill>
+                  <a:srgbClr val="334155"/>
+                </a:solidFill>
+                <a:latin typeface="微软雅黑"/>
+                <a:ea typeface="微软雅黑"/>
+                <a:cs typeface="微软雅黑"/>
+              </a:defRPr>
+            </a:pPr>
+            <a:r>
+              <a:rPr sz="1200" b="1">
+                <a:solidFill>
+                  <a:srgbClr val="334155"/>
+                </a:solidFill>
+                <a:latin typeface="微软雅黑"/>
+                <a:ea typeface="微软雅黑"/>
+                <a:cs typeface="微软雅黑"/>
+              </a:rPr>
+              <a:t>evaluation / data / controlled engineering</a:t>
             </a:r>
           </a:p>
         </p:txBody>
@@ -17479,7 +16944,7 @@
                 <a:ea typeface="微软雅黑"/>
                 <a:cs typeface="微软雅黑"/>
               </a:rPr>
-              <a:t>05 · Tool Contract 与 Runner</a:t>
+              <a:t>05 · Policy / Approval / Tool Contract</a:t>
             </a:r>
             <a:endParaRPr sz="1200"/>
           </a:p>
@@ -17525,7 +16990,7 @@
                 <a:ea typeface="微软雅黑"/>
                 <a:cs typeface="微软雅黑"/>
               </a:rPr>
-              <a:t>计划与执行职责隔离</a:t>
+              <a:t>Agent 不能直接调用真实工程环境</a:t>
             </a:r>
             <a:endParaRPr sz="2900"/>
           </a:p>
@@ -17567,7 +17032,7 @@
                 <a:ea typeface="微软雅黑"/>
                 <a:cs typeface="微软雅黑"/>
               </a:rPr>
-              <a:t>Executor 提交结构化 Tool Contract；Gateway 校验后启动一次性断网 CPU 容器。</a:t>
+              <a:t>Plan → Policy → Human Approval → Tool Contract → Gateway → 一次性断网 Runner</a:t>
             </a:r>
             <a:endParaRPr>
               <a:latin typeface="微软雅黑"/>
@@ -17631,7 +17096,7 @@
                 <a:ea typeface="微软雅黑"/>
                 <a:cs typeface="微软雅黑"/>
               </a:rPr>
-              <a:t>职责隔离</a:t>
+              <a:t>受控入口</a:t>
             </a:r>
           </a:p>
         </p:txBody>
@@ -17668,7 +17133,7 @@
         </p:spPr>
         <p:txBody>
           <a:bodyPr xmlns:a="http://schemas.openxmlformats.org/drawingml/2006/main" lIns="133350" tIns="76200" rIns="133350" bIns="76200" anchor="ctr">
-            <a:normAutofit fontScale="80761"/>
+            <a:normAutofit fontScale="53571"/>
           </a:bodyPr>
           <a:lstStyle xmlns:a="http://schemas.openxmlformats.org/drawingml/2006/main"/>
           <a:p xmlns:a="http://schemas.openxmlformats.org/drawingml/2006/main">
@@ -17692,7 +17157,31 @@
                 <a:ea typeface="微软雅黑"/>
                 <a:cs typeface="微软雅黑"/>
               </a:rPr>
-              <a:t>Safe Executor</a:t>
+              <a:t>Approved</a:t>
+            </a:r>
+          </a:p>
+          <a:p xmlns:a="http://schemas.openxmlformats.org/drawingml/2006/main">
+            <a:pPr algn="ctr">
+              <a:buNone/>
+              <a:defRPr sz="3150" b="1">
+                <a:solidFill>
+                  <a:srgbClr val="C44747"/>
+                </a:solidFill>
+                <a:latin typeface="微软雅黑"/>
+                <a:ea typeface="微软雅黑"/>
+                <a:cs typeface="微软雅黑"/>
+              </a:defRPr>
+            </a:pPr>
+            <a:r>
+              <a:rPr sz="3150" b="1">
+                <a:solidFill>
+                  <a:srgbClr val="C44747"/>
+                </a:solidFill>
+                <a:latin typeface="微软雅黑"/>
+                <a:ea typeface="微软雅黑"/>
+                <a:cs typeface="微软雅黑"/>
+              </a:rPr>
+              <a:t>Plan</a:t>
             </a:r>
           </a:p>
         </p:txBody>
@@ -17762,9 +17251,33 @@
         </p:spPr>
         <p:txBody>
           <a:bodyPr xmlns:a="http://schemas.openxmlformats.org/drawingml/2006/main" lIns="133350" tIns="76200" rIns="133350" bIns="76200" anchor="ctr">
-            <a:normAutofit fontScale="100000"/>
+            <a:normAutofit fontScale="53571"/>
           </a:bodyPr>
           <a:lstStyle xmlns:a="http://schemas.openxmlformats.org/drawingml/2006/main"/>
+          <a:p xmlns:a="http://schemas.openxmlformats.org/drawingml/2006/main">
+            <a:pPr algn="ctr">
+              <a:buNone/>
+              <a:defRPr sz="3150" b="1">
+                <a:solidFill>
+                  <a:srgbClr val="13A36D"/>
+                </a:solidFill>
+                <a:latin typeface="微软雅黑"/>
+                <a:ea typeface="微软雅黑"/>
+                <a:cs typeface="微软雅黑"/>
+              </a:defRPr>
+            </a:pPr>
+            <a:r>
+              <a:rPr sz="3150" b="1">
+                <a:solidFill>
+                  <a:srgbClr val="13A36D"/>
+                </a:solidFill>
+                <a:latin typeface="微软雅黑"/>
+                <a:ea typeface="微软雅黑"/>
+                <a:cs typeface="微软雅黑"/>
+              </a:rPr>
+              <a:t>Secure</a:t>
+            </a:r>
+          </a:p>
           <a:p xmlns:a="http://schemas.openxmlformats.org/drawingml/2006/main">
             <a:pPr algn="ctr">
               <a:buNone/>
@@ -17845,7 +17358,7 @@
                 <a:ea typeface="微软雅黑"/>
                 <a:cs typeface="微软雅黑"/>
               </a:rPr>
-              <a:t>plan + approval  →  Gateway allowlist  →  ephemeral container</a:t>
+              <a:t>Policy  →  Approval  →  Contract  →  Gateway allowlist</a:t>
             </a:r>
           </a:p>
         </p:txBody>
@@ -17904,7 +17417,7 @@
                 <a:ea typeface="微软雅黑"/>
                 <a:cs typeface="微软雅黑"/>
               </a:rPr>
-              <a:t>tool_id · caller_agent_id · skill_id · run_id · idempotency_key</a:t>
+              <a:t>tool_id · caller_agent_id · skill_id · run_id · approval_reference</a:t>
             </a:r>
           </a:p>
         </p:txBody>
@@ -17951,73 +17464,97 @@
           <a:p xmlns:a="http://schemas.openxmlformats.org/drawingml/2006/main">
             <a:pPr algn="l">
               <a:buNone/>
-              <a:defRPr sz="1425" b="0">
-                <a:solidFill>
-                  <a:srgbClr val="18213D"/>
-                </a:solidFill>
-                <a:latin typeface="微软雅黑"/>
-                <a:ea typeface="微软雅黑"/>
-                <a:cs typeface="微软雅黑"/>
-              </a:defRPr>
-            </a:pPr>
-            <a:r>
-              <a:rPr sz="1425" b="0">
-                <a:solidFill>
-                  <a:srgbClr val="18213D"/>
-                </a:solidFill>
-                <a:latin typeface="微软雅黑"/>
-                <a:ea typeface="微软雅黑"/>
-                <a:cs typeface="微软雅黑"/>
-              </a:rPr>
-              <a:t>Gateway</a:t>
+              <a:defRPr sz="1275" b="1">
+                <a:solidFill>
+                  <a:srgbClr val="334155"/>
+                </a:solidFill>
+                <a:latin typeface="微软雅黑"/>
+                <a:ea typeface="微软雅黑"/>
+                <a:cs typeface="微软雅黑"/>
+              </a:defRPr>
+            </a:pPr>
+            <a:r>
+              <a:rPr sz="1275" b="1">
+                <a:solidFill>
+                  <a:srgbClr val="334155"/>
+                </a:solidFill>
+                <a:latin typeface="微软雅黑"/>
+                <a:ea typeface="微软雅黑"/>
+                <a:cs typeface="微软雅黑"/>
+              </a:rPr>
+              <a:t>Tool Contract</a:t>
             </a:r>
           </a:p>
           <a:p xmlns:a="http://schemas.openxmlformats.org/drawingml/2006/main">
             <a:pPr algn="l">
               <a:buNone/>
-              <a:defRPr sz="1425" b="0">
-                <a:solidFill>
-                  <a:srgbClr val="18213D"/>
-                </a:solidFill>
-                <a:latin typeface="微软雅黑"/>
-                <a:ea typeface="微软雅黑"/>
-                <a:cs typeface="微软雅黑"/>
-              </a:defRPr>
-            </a:pPr>
-            <a:r>
-              <a:rPr sz="1425" b="0">
-                <a:solidFill>
-                  <a:srgbClr val="18213D"/>
-                </a:solidFill>
-                <a:latin typeface="微软雅黑"/>
-                <a:ea typeface="微软雅黑"/>
-                <a:cs typeface="微软雅黑"/>
-              </a:rPr>
-              <a:t>固定 task / incident / image</a:t>
+              <a:defRPr sz="1275" b="1">
+                <a:solidFill>
+                  <a:srgbClr val="334155"/>
+                </a:solidFill>
+                <a:latin typeface="微软雅黑"/>
+                <a:ea typeface="微软雅黑"/>
+                <a:cs typeface="微软雅黑"/>
+              </a:defRPr>
+            </a:pPr>
+            <a:r>
+              <a:rPr sz="1275" b="1">
+                <a:solidFill>
+                  <a:srgbClr val="334155"/>
+                </a:solidFill>
+                <a:latin typeface="微软雅黑"/>
+                <a:ea typeface="微软雅黑"/>
+                <a:cs typeface="微软雅黑"/>
+              </a:rPr>
+              <a:t>身份 / 任务 / 审批</a:t>
             </a:r>
           </a:p>
           <a:p xmlns:a="http://schemas.openxmlformats.org/drawingml/2006/main">
             <a:pPr algn="l">
               <a:buNone/>
-              <a:defRPr sz="1425" b="0">
-                <a:solidFill>
-                  <a:srgbClr val="18213D"/>
-                </a:solidFill>
-                <a:latin typeface="微软雅黑"/>
-                <a:ea typeface="微软雅黑"/>
-                <a:cs typeface="微软雅黑"/>
-              </a:defRPr>
-            </a:pPr>
-            <a:r>
-              <a:rPr sz="1425" b="0">
-                <a:solidFill>
-                  <a:srgbClr val="18213D"/>
-                </a:solidFill>
-                <a:latin typeface="微软雅黑"/>
-                <a:ea typeface="微软雅黑"/>
-                <a:cs typeface="微软雅黑"/>
-              </a:rPr>
-              <a:t>command + path allowlist</a:t>
+              <a:defRPr sz="1275" b="1">
+                <a:solidFill>
+                  <a:srgbClr val="334155"/>
+                </a:solidFill>
+                <a:latin typeface="微软雅黑"/>
+                <a:ea typeface="微软雅黑"/>
+                <a:cs typeface="微软雅黑"/>
+              </a:defRPr>
+            </a:pPr>
+            <a:r>
+              <a:rPr sz="1275" b="1">
+                <a:solidFill>
+                  <a:srgbClr val="334155"/>
+                </a:solidFill>
+                <a:latin typeface="微软雅黑"/>
+                <a:ea typeface="微软雅黑"/>
+                <a:cs typeface="微软雅黑"/>
+              </a:rPr>
+              <a:t>副作用 / 保护对象</a:t>
+            </a:r>
+          </a:p>
+          <a:p xmlns:a="http://schemas.openxmlformats.org/drawingml/2006/main">
+            <a:pPr algn="l">
+              <a:buNone/>
+              <a:defRPr sz="1275" b="1">
+                <a:solidFill>
+                  <a:srgbClr val="334155"/>
+                </a:solidFill>
+                <a:latin typeface="微软雅黑"/>
+                <a:ea typeface="微软雅黑"/>
+                <a:cs typeface="微软雅黑"/>
+              </a:defRPr>
+            </a:pPr>
+            <a:r>
+              <a:rPr sz="1275" b="1">
+                <a:solidFill>
+                  <a:srgbClr val="334155"/>
+                </a:solidFill>
+                <a:latin typeface="微软雅黑"/>
+                <a:ea typeface="微软雅黑"/>
+                <a:cs typeface="微软雅黑"/>
+              </a:rPr>
+              <a:t>预算 / 幂等键</a:t>
             </a:r>
           </a:p>
         </p:txBody>
@@ -18064,67 +17601,67 @@
           <a:p xmlns:a="http://schemas.openxmlformats.org/drawingml/2006/main">
             <a:pPr algn="l">
               <a:buNone/>
-              <a:defRPr sz="1425" b="0">
-                <a:solidFill>
-                  <a:srgbClr val="18213D"/>
-                </a:solidFill>
-                <a:latin typeface="微软雅黑"/>
-                <a:ea typeface="微软雅黑"/>
-                <a:cs typeface="微软雅黑"/>
-              </a:defRPr>
-            </a:pPr>
-            <a:r>
-              <a:rPr sz="1425" b="0">
-                <a:solidFill>
-                  <a:srgbClr val="18213D"/>
-                </a:solidFill>
-                <a:latin typeface="微软雅黑"/>
-                <a:ea typeface="微软雅黑"/>
-                <a:cs typeface="微软雅黑"/>
-              </a:rPr>
-              <a:t>只读输入</a:t>
+              <a:defRPr sz="1275" b="1">
+                <a:solidFill>
+                  <a:srgbClr val="334155"/>
+                </a:solidFill>
+                <a:latin typeface="微软雅黑"/>
+                <a:ea typeface="微软雅黑"/>
+                <a:cs typeface="微软雅黑"/>
+              </a:defRPr>
+            </a:pPr>
+            <a:r>
+              <a:rPr sz="1275" b="1">
+                <a:solidFill>
+                  <a:srgbClr val="334155"/>
+                </a:solidFill>
+                <a:latin typeface="微软雅黑"/>
+                <a:ea typeface="微软雅黑"/>
+                <a:cs typeface="微软雅黑"/>
+              </a:rPr>
+              <a:t>执行隔离</a:t>
             </a:r>
           </a:p>
           <a:p xmlns:a="http://schemas.openxmlformats.org/drawingml/2006/main">
             <a:pPr algn="l">
               <a:buNone/>
-              <a:defRPr sz="1425" b="0">
-                <a:solidFill>
-                  <a:srgbClr val="18213D"/>
-                </a:solidFill>
-                <a:latin typeface="微软雅黑"/>
-                <a:ea typeface="微软雅黑"/>
-                <a:cs typeface="微软雅黑"/>
-              </a:defRPr>
-            </a:pPr>
-            <a:r>
-              <a:rPr sz="1425" b="0">
-                <a:solidFill>
-                  <a:srgbClr val="18213D"/>
-                </a:solidFill>
-                <a:latin typeface="微软雅黑"/>
-                <a:ea typeface="微软雅黑"/>
-                <a:cs typeface="微软雅黑"/>
-              </a:rPr>
-              <a:t>project / run 只读</a:t>
+              <a:defRPr sz="1275" b="1">
+                <a:solidFill>
+                  <a:srgbClr val="334155"/>
+                </a:solidFill>
+                <a:latin typeface="微软雅黑"/>
+                <a:ea typeface="微软雅黑"/>
+                <a:cs typeface="微软雅黑"/>
+              </a:defRPr>
+            </a:pPr>
+            <a:r>
+              <a:rPr sz="1275" b="1">
+                <a:solidFill>
+                  <a:srgbClr val="334155"/>
+                </a:solidFill>
+                <a:latin typeface="微软雅黑"/>
+                <a:ea typeface="微软雅黑"/>
+                <a:cs typeface="微软雅黑"/>
+              </a:rPr>
+              <a:t>non-root · read-only rootfs</a:t>
             </a:r>
           </a:p>
           <a:p xmlns:a="http://schemas.openxmlformats.org/drawingml/2006/main">
             <a:pPr algn="l">
               <a:buNone/>
-              <a:defRPr sz="1425" b="0">
-                <a:solidFill>
-                  <a:srgbClr val="18213D"/>
-                </a:solidFill>
-                <a:latin typeface="微软雅黑"/>
-                <a:ea typeface="微软雅黑"/>
-                <a:cs typeface="微软雅黑"/>
-              </a:defRPr>
-            </a:pPr>
-            <a:r>
-              <a:rPr sz="1425" b="0">
-                <a:solidFill>
-                  <a:srgbClr val="18213D"/>
+              <a:defRPr sz="1275" b="1">
+                <a:solidFill>
+                  <a:srgbClr val="334155"/>
+                </a:solidFill>
+                <a:latin typeface="微软雅黑"/>
+                <a:ea typeface="微软雅黑"/>
+                <a:cs typeface="微软雅黑"/>
+              </a:defRPr>
+            </a:pPr>
+            <a:r>
+              <a:rPr sz="1275" b="1">
+                <a:solidFill>
+                  <a:srgbClr val="334155"/>
                 </a:solidFill>
                 <a:latin typeface="微软雅黑"/>
                 <a:ea typeface="微软雅黑"/>
@@ -18177,67 +17714,67 @@
           <a:p xmlns:a="http://schemas.openxmlformats.org/drawingml/2006/main">
             <a:pPr algn="l">
               <a:buNone/>
-              <a:defRPr sz="1425" b="0">
-                <a:solidFill>
-                  <a:srgbClr val="18213D"/>
-                </a:solidFill>
-                <a:latin typeface="微软雅黑"/>
-                <a:ea typeface="微软雅黑"/>
-                <a:cs typeface="微软雅黑"/>
-              </a:defRPr>
-            </a:pPr>
-            <a:r>
-              <a:rPr sz="1425" b="0">
-                <a:solidFill>
-                  <a:srgbClr val="18213D"/>
-                </a:solidFill>
-                <a:latin typeface="微软雅黑"/>
-                <a:ea typeface="微软雅黑"/>
-                <a:cs typeface="微软雅黑"/>
-              </a:rPr>
-              <a:t>运行边界</a:t>
+              <a:defRPr sz="1275" b="1">
+                <a:solidFill>
+                  <a:srgbClr val="334155"/>
+                </a:solidFill>
+                <a:latin typeface="微软雅黑"/>
+                <a:ea typeface="微软雅黑"/>
+                <a:cs typeface="微软雅黑"/>
+              </a:defRPr>
+            </a:pPr>
+            <a:r>
+              <a:rPr sz="1275" b="1">
+                <a:solidFill>
+                  <a:srgbClr val="334155"/>
+                </a:solidFill>
+                <a:latin typeface="微软雅黑"/>
+                <a:ea typeface="微软雅黑"/>
+                <a:cs typeface="微软雅黑"/>
+              </a:rPr>
+              <a:t>运行限制</a:t>
             </a:r>
           </a:p>
           <a:p xmlns:a="http://schemas.openxmlformats.org/drawingml/2006/main">
             <a:pPr algn="l">
               <a:buNone/>
-              <a:defRPr sz="1425" b="0">
-                <a:solidFill>
-                  <a:srgbClr val="18213D"/>
-                </a:solidFill>
-                <a:latin typeface="微软雅黑"/>
-                <a:ea typeface="微软雅黑"/>
-                <a:cs typeface="微软雅黑"/>
-              </a:defRPr>
-            </a:pPr>
-            <a:r>
-              <a:rPr sz="1425" b="0">
-                <a:solidFill>
-                  <a:srgbClr val="18213D"/>
-                </a:solidFill>
-                <a:latin typeface="微软雅黑"/>
-                <a:ea typeface="微软雅黑"/>
-                <a:cs typeface="微软雅黑"/>
-              </a:rPr>
-              <a:t>CPU · non-root</a:t>
+              <a:defRPr sz="1275" b="1">
+                <a:solidFill>
+                  <a:srgbClr val="334155"/>
+                </a:solidFill>
+                <a:latin typeface="微软雅黑"/>
+                <a:ea typeface="微软雅黑"/>
+                <a:cs typeface="微软雅黑"/>
+              </a:defRPr>
+            </a:pPr>
+            <a:r>
+              <a:rPr sz="1275" b="1">
+                <a:solidFill>
+                  <a:srgbClr val="334155"/>
+                </a:solidFill>
+                <a:latin typeface="微软雅黑"/>
+                <a:ea typeface="微软雅黑"/>
+                <a:cs typeface="微软雅黑"/>
+              </a:rPr>
+              <a:t>CPU / memory / PID / timeout</a:t>
             </a:r>
           </a:p>
           <a:p xmlns:a="http://schemas.openxmlformats.org/drawingml/2006/main">
             <a:pPr algn="l">
               <a:buNone/>
-              <a:defRPr sz="1425" b="0">
-                <a:solidFill>
-                  <a:srgbClr val="18213D"/>
-                </a:solidFill>
-                <a:latin typeface="微软雅黑"/>
-                <a:ea typeface="微软雅黑"/>
-                <a:cs typeface="微软雅黑"/>
-              </a:defRPr>
-            </a:pPr>
-            <a:r>
-              <a:rPr sz="1425" b="0">
-                <a:solidFill>
-                  <a:srgbClr val="18213D"/>
+              <a:defRPr sz="1275" b="1">
+                <a:solidFill>
+                  <a:srgbClr val="334155"/>
+                </a:solidFill>
+                <a:latin typeface="微软雅黑"/>
+                <a:ea typeface="微软雅黑"/>
+                <a:cs typeface="微软雅黑"/>
+              </a:defRPr>
+            </a:pPr>
+            <a:r>
+              <a:rPr sz="1275" b="1">
+                <a:solidFill>
+                  <a:srgbClr val="334155"/>
                 </a:solidFill>
                 <a:latin typeface="微软雅黑"/>
                 <a:ea typeface="微软雅黑"/>
@@ -18290,19 +17827,19 @@
           <a:p xmlns:a="http://schemas.openxmlformats.org/drawingml/2006/main">
             <a:pPr algn="l">
               <a:buNone/>
-              <a:defRPr sz="1425" b="0">
-                <a:solidFill>
-                  <a:srgbClr val="18213D"/>
-                </a:solidFill>
-                <a:latin typeface="微软雅黑"/>
-                <a:ea typeface="微软雅黑"/>
-                <a:cs typeface="微软雅黑"/>
-              </a:defRPr>
-            </a:pPr>
-            <a:r>
-              <a:rPr sz="1425" b="0">
-                <a:solidFill>
-                  <a:srgbClr val="18213D"/>
+              <a:defRPr sz="1275" b="1">
+                <a:solidFill>
+                  <a:srgbClr val="334155"/>
+                </a:solidFill>
+                <a:latin typeface="微软雅黑"/>
+                <a:ea typeface="微软雅黑"/>
+                <a:cs typeface="微软雅黑"/>
+              </a:defRPr>
+            </a:pPr>
+            <a:r>
+              <a:rPr sz="1275" b="1">
+                <a:solidFill>
+                  <a:srgbClr val="334155"/>
                 </a:solidFill>
                 <a:latin typeface="微软雅黑"/>
                 <a:ea typeface="微软雅黑"/>
@@ -18314,19 +17851,19 @@
           <a:p xmlns:a="http://schemas.openxmlformats.org/drawingml/2006/main">
             <a:pPr algn="l">
               <a:buNone/>
-              <a:defRPr sz="1425" b="0">
-                <a:solidFill>
-                  <a:srgbClr val="18213D"/>
-                </a:solidFill>
-                <a:latin typeface="微软雅黑"/>
-                <a:ea typeface="微软雅黑"/>
-                <a:cs typeface="微软雅黑"/>
-              </a:defRPr>
-            </a:pPr>
-            <a:r>
-              <a:rPr sz="1425" b="0">
-                <a:solidFill>
-                  <a:srgbClr val="18213D"/>
+              <a:defRPr sz="1275" b="1">
+                <a:solidFill>
+                  <a:srgbClr val="334155"/>
+                </a:solidFill>
+                <a:latin typeface="微软雅黑"/>
+                <a:ea typeface="微软雅黑"/>
+                <a:cs typeface="微软雅黑"/>
+              </a:defRPr>
+            </a:pPr>
+            <a:r>
+              <a:rPr sz="1275" b="1">
+                <a:solidFill>
+                  <a:srgbClr val="334155"/>
                 </a:solidFill>
                 <a:latin typeface="微软雅黑"/>
                 <a:ea typeface="微软雅黑"/>
@@ -18338,19 +17875,19 @@
           <a:p xmlns:a="http://schemas.openxmlformats.org/drawingml/2006/main">
             <a:pPr algn="l">
               <a:buNone/>
-              <a:defRPr sz="1425" b="0">
-                <a:solidFill>
-                  <a:srgbClr val="18213D"/>
-                </a:solidFill>
-                <a:latin typeface="微软雅黑"/>
-                <a:ea typeface="微软雅黑"/>
-                <a:cs typeface="微软雅黑"/>
-              </a:defRPr>
-            </a:pPr>
-            <a:r>
-              <a:rPr sz="1425" b="0">
-                <a:solidFill>
-                  <a:srgbClr val="18213D"/>
+              <a:defRPr sz="1275" b="1">
+                <a:solidFill>
+                  <a:srgbClr val="334155"/>
+                </a:solidFill>
+                <a:latin typeface="微软雅黑"/>
+                <a:ea typeface="微软雅黑"/>
+                <a:cs typeface="微软雅黑"/>
+              </a:defRPr>
+            </a:pPr>
+            <a:r>
+              <a:rPr sz="1275" b="1">
+                <a:solidFill>
+                  <a:srgbClr val="334155"/>
                 </a:solidFill>
                 <a:latin typeface="微软雅黑"/>
                 <a:ea typeface="微软雅黑"/>
@@ -18415,7 +17952,7 @@
                 <a:ea typeface="微软雅黑"/>
                 <a:cs typeface="微软雅黑"/>
               </a:rPr>
-              <a:t>无凭据 · 无在线安装 · 不修改原始工作区</a:t>
+              <a:t>无审批或契约不一致 → Runner 不启动 / BLOCKED</a:t>
             </a:r>
           </a:p>
         </p:txBody>
@@ -18489,7 +18026,7 @@
                 <a:ea typeface="微软雅黑"/>
                 <a:cs typeface="微软雅黑"/>
               </a:rPr>
-              <a:t>05 · Independent Auditor</a:t>
+              <a:t>06 · Independent Auditor</a:t>
             </a:r>
             <a:endParaRPr sz="1200"/>
           </a:p>

--- a/submission/LabOps-Guard-GOAI-复赛方案-v1.0-rc1.pptx
+++ b/submission/LabOps-Guard-GOAI-复赛方案-v1.0-rc1.pptx
@@ -2,31 +2,31 @@
 <file path=ppt/presentation.xml><?xml version="1.0" encoding="utf-8"?>
 <p:presentation xmlns:p="http://schemas.openxmlformats.org/presentationml/2006/main">
   <p:sldMasterIdLst>
-    <p:sldMasterId xmlns:r="http://schemas.openxmlformats.org/officeDocument/2006/relationships" id="2147483648" r:id="R359638d8ccc946e6"/>
-    <p:sldMasterId xmlns:r="http://schemas.openxmlformats.org/officeDocument/2006/relationships" id="2147483650" r:id="R3d5098fb0be34d06"/>
+    <p:sldMasterId xmlns:r="http://schemas.openxmlformats.org/officeDocument/2006/relationships" id="2147483648" r:id="R6aaefbe5bb1b4341"/>
+    <p:sldMasterId xmlns:r="http://schemas.openxmlformats.org/officeDocument/2006/relationships" id="2147483650" r:id="R830847ee9e404772"/>
   </p:sldMasterIdLst>
   <p:notesMasterIdLst>
-    <p:notesMasterId xmlns:r="http://schemas.openxmlformats.org/officeDocument/2006/relationships" r:id="R1b4ec6001caf43f8"/>
+    <p:notesMasterId xmlns:r="http://schemas.openxmlformats.org/officeDocument/2006/relationships" r:id="Rce7c93aeeabd4d78"/>
   </p:notesMasterIdLst>
   <p:sldIdLst>
-    <p:sldId xmlns:r="http://schemas.openxmlformats.org/officeDocument/2006/relationships" id="256" r:id="Rd4bcb63e2f9b4b2b"/>
-    <p:sldId xmlns:r="http://schemas.openxmlformats.org/officeDocument/2006/relationships" id="257" r:id="Rd6cda0383d764169"/>
-    <p:sldId xmlns:r="http://schemas.openxmlformats.org/officeDocument/2006/relationships" id="258" r:id="R7174ae3dad354244"/>
-    <p:sldId xmlns:r="http://schemas.openxmlformats.org/officeDocument/2006/relationships" id="259" r:id="Rb1276729e7604e9b"/>
-    <p:sldId xmlns:r="http://schemas.openxmlformats.org/officeDocument/2006/relationships" id="260" r:id="R0655d05ea01546ec"/>
-    <p:sldId xmlns:r="http://schemas.openxmlformats.org/officeDocument/2006/relationships" id="261" r:id="R33741d50408a46d0"/>
-    <p:sldId xmlns:r="http://schemas.openxmlformats.org/officeDocument/2006/relationships" id="262" r:id="R13ad0f242ff6440f"/>
-    <p:sldId xmlns:r="http://schemas.openxmlformats.org/officeDocument/2006/relationships" id="263" r:id="R1a4a6ff024b04228"/>
-    <p:sldId xmlns:r="http://schemas.openxmlformats.org/officeDocument/2006/relationships" id="264" r:id="Rc2dadc82dd0f4337"/>
-    <p:sldId xmlns:r="http://schemas.openxmlformats.org/officeDocument/2006/relationships" id="265" r:id="R677b2b135dfa4d79"/>
-    <p:sldId xmlns:r="http://schemas.openxmlformats.org/officeDocument/2006/relationships" id="266" r:id="R5c6ee593a3fa44f0"/>
-    <p:sldId xmlns:r="http://schemas.openxmlformats.org/officeDocument/2006/relationships" id="267" r:id="Rc2a47a40a626474d"/>
-    <p:sldId xmlns:r="http://schemas.openxmlformats.org/officeDocument/2006/relationships" id="268" r:id="R9a4fff4e0afa4781"/>
-    <p:sldId xmlns:r="http://schemas.openxmlformats.org/officeDocument/2006/relationships" id="269" r:id="Rd8aaa84b04ec404a"/>
-    <p:sldId xmlns:r="http://schemas.openxmlformats.org/officeDocument/2006/relationships" id="270" r:id="R04dda8f29f0742cf"/>
-    <p:sldId xmlns:r="http://schemas.openxmlformats.org/officeDocument/2006/relationships" id="271" r:id="Rac386cb63a024bfa"/>
-    <p:sldId xmlns:r="http://schemas.openxmlformats.org/officeDocument/2006/relationships" id="272" r:id="R36232e551bb84f07"/>
-    <p:sldId xmlns:r="http://schemas.openxmlformats.org/officeDocument/2006/relationships" id="273" r:id="R173d992d9e7d41ae"/>
+    <p:sldId xmlns:r="http://schemas.openxmlformats.org/officeDocument/2006/relationships" id="256" r:id="Rb42e70698db74d27"/>
+    <p:sldId xmlns:r="http://schemas.openxmlformats.org/officeDocument/2006/relationships" id="257" r:id="Rec87320b7d47492e"/>
+    <p:sldId xmlns:r="http://schemas.openxmlformats.org/officeDocument/2006/relationships" id="258" r:id="R09501167e352495d"/>
+    <p:sldId xmlns:r="http://schemas.openxmlformats.org/officeDocument/2006/relationships" id="259" r:id="Rbf46fd0bca074a96"/>
+    <p:sldId xmlns:r="http://schemas.openxmlformats.org/officeDocument/2006/relationships" id="260" r:id="Rb9f058ff619d45a3"/>
+    <p:sldId xmlns:r="http://schemas.openxmlformats.org/officeDocument/2006/relationships" id="261" r:id="R90304ee631d34a27"/>
+    <p:sldId xmlns:r="http://schemas.openxmlformats.org/officeDocument/2006/relationships" id="262" r:id="R6a1d08e935ad426b"/>
+    <p:sldId xmlns:r="http://schemas.openxmlformats.org/officeDocument/2006/relationships" id="263" r:id="R4cecb2347c3e41ae"/>
+    <p:sldId xmlns:r="http://schemas.openxmlformats.org/officeDocument/2006/relationships" id="264" r:id="Rb1a248d174904f61"/>
+    <p:sldId xmlns:r="http://schemas.openxmlformats.org/officeDocument/2006/relationships" id="265" r:id="R3b3fca69618444a7"/>
+    <p:sldId xmlns:r="http://schemas.openxmlformats.org/officeDocument/2006/relationships" id="266" r:id="R530dcbeb49134b14"/>
+    <p:sldId xmlns:r="http://schemas.openxmlformats.org/officeDocument/2006/relationships" id="267" r:id="R9cd20e558d054ce4"/>
+    <p:sldId xmlns:r="http://schemas.openxmlformats.org/officeDocument/2006/relationships" id="268" r:id="Rc2f796370e3f46dd"/>
+    <p:sldId xmlns:r="http://schemas.openxmlformats.org/officeDocument/2006/relationships" id="269" r:id="Rfa292f24c241426d"/>
+    <p:sldId xmlns:r="http://schemas.openxmlformats.org/officeDocument/2006/relationships" id="270" r:id="R8e063013d0c14448"/>
+    <p:sldId xmlns:r="http://schemas.openxmlformats.org/officeDocument/2006/relationships" id="271" r:id="R7bc3df798ae24f82"/>
+    <p:sldId xmlns:r="http://schemas.openxmlformats.org/officeDocument/2006/relationships" id="272" r:id="R506cb708fc534605"/>
+    <p:sldId xmlns:r="http://schemas.openxmlformats.org/officeDocument/2006/relationships" id="273" r:id="R794d114c70b24f51"/>
   </p:sldIdLst>
   <p:sldSz cx="12192000" cy="6858000"/>
   <p:notesSz cx="6858000" cy="9144000"/>
@@ -2065,7 +2065,7 @@
   </p:cSld>
   <p:clrMap bg1="lt1" tx1="dk1" bg2="lt2" tx2="dk2" accent1="accent1" accent2="accent2" accent3="accent3" accent4="accent4" accent5="accent5" accent6="accent6" hlink="hlink" folHlink="folHlink"/>
   <p:sldLayoutIdLst>
-    <p:sldLayoutId xmlns:r="http://schemas.openxmlformats.org/officeDocument/2006/relationships" id="2147483649" r:id="R522fb3dfc567408a"/>
+    <p:sldLayoutId xmlns:r="http://schemas.openxmlformats.org/officeDocument/2006/relationships" id="2147483649" r:id="R34753fee4c7d4a2b"/>
   </p:sldLayoutIdLst>
   <p:hf sldNum="0" hdr="0" ftr="0" dt="0"/>
   <p:txStyles>
@@ -2348,7 +2348,7 @@
   </p:cSld>
   <p:clrMap bg1="lt1" tx1="dk1" bg2="lt2" tx2="dk2" accent1="accent1" accent2="accent2" accent3="accent3" accent4="accent4" accent5="accent5" accent6="accent6" hlink="hlink" folHlink="folHlink"/>
   <p:sldLayoutIdLst>
-    <p:sldLayoutId xmlns:r="http://schemas.openxmlformats.org/officeDocument/2006/relationships" id="2147483651" r:id="R1bc643f8df824f87"/>
+    <p:sldLayoutId xmlns:r="http://schemas.openxmlformats.org/officeDocument/2006/relationships" id="2147483651" r:id="R97aff0d3c34546e7"/>
   </p:sldLayoutIdLst>
   <p:hf sldNum="0" hdr="0" ftr="0" dt="0"/>
   <p:txStyles>
@@ -4632,7 +4632,7 @@
           <p:nvPr/>
         </p:nvPicPr>
         <p:blipFill>
-          <a:blip xmlns:r="http://schemas.openxmlformats.org/officeDocument/2006/relationships" xmlns:a="http://schemas.openxmlformats.org/drawingml/2006/main" r:embed="Re764040ebaee470b"/>
+          <a:blip xmlns:r="http://schemas.openxmlformats.org/officeDocument/2006/relationships" xmlns:a="http://schemas.openxmlformats.org/drawingml/2006/main" r:embed="R356634331864487a"/>
           <a:srcRect xmlns:a="http://schemas.openxmlformats.org/drawingml/2006/main" l="0" t="11709" r="0" b="11709"/>
           <a:stretch xmlns:a="http://schemas.openxmlformats.org/drawingml/2006/main">
             <a:fillRect l="0" t="0" r="0" b="0"/>
@@ -6679,7 +6679,7 @@
           <p:nvPr/>
         </p:nvPicPr>
         <p:blipFill>
-          <a:blip xmlns:r="http://schemas.openxmlformats.org/officeDocument/2006/relationships" xmlns:a="http://schemas.openxmlformats.org/drawingml/2006/main" r:embed="Rd52801de8792487f"/>
+          <a:blip xmlns:r="http://schemas.openxmlformats.org/officeDocument/2006/relationships" xmlns:a="http://schemas.openxmlformats.org/drawingml/2006/main" r:embed="Rcd920ab25f8a4c1f"/>
           <a:stretch xmlns:a="http://schemas.openxmlformats.org/drawingml/2006/main"/>
         </p:blipFill>
         <p:spPr>
@@ -8829,7 +8829,7 @@
                 <a:ea typeface="微软雅黑"/>
                 <a:cs typeface="微软雅黑"/>
               </a:rPr>
-              <a:t>13 · Engineering Validation</a:t>
+              <a:t>13 · Engineering Validation &amp; Recovery</a:t>
             </a:r>
             <a:endParaRPr sz="1200"/>
           </a:p>
@@ -8875,7 +8875,7 @@
                 <a:ea typeface="微软雅黑"/>
                 <a:cs typeface="微软雅黑"/>
               </a:rPr>
-              <a:t>冻结版本的完成声明都有自动化证据</a:t>
+              <a:t>167 项测试覆盖正常闭环与异常接管</a:t>
             </a:r>
             <a:endParaRPr sz="2900"/>
           </a:p>
@@ -8917,7 +8917,7 @@
                 <a:ea typeface="微软雅黑"/>
                 <a:cs typeface="微软雅黑"/>
               </a:rPr>
-              <a:t>代码、Evidence、Public Demo、只读边界与开源合规分别验证。</a:t>
+              <a:t>Approval、Session 隔离、Recovery / Takeover 与 Skill binding 均有自动化回归。</a:t>
             </a:r>
             <a:endParaRPr>
               <a:latin typeface="微软雅黑"/>
@@ -9042,7 +9042,7 @@
                 <a:ea typeface="微软雅黑"/>
                 <a:cs typeface="微软雅黑"/>
               </a:rPr>
-              <a:t>127 tests  ·  125 passed  ·  2 optional PyTorch skipped</a:t>
+              <a:t>167 tests passed  ·  Approval / Live Session / Recovery / Skill binding</a:t>
             </a:r>
           </a:p>
         </p:txBody>
@@ -9221,7 +9221,7 @@
                 <a:ea typeface="微软雅黑"/>
                 <a:cs typeface="微软雅黑"/>
               </a:rPr>
-              <a:t>CI / Hygiene</a:t>
+              <a:t>Recovery / Takeover</a:t>
             </a:r>
           </a:p>
         </p:txBody>
@@ -9282,7 +9282,7 @@
                 <a:ea typeface="微软雅黑"/>
                 <a:cs typeface="微软雅黑"/>
               </a:rPr>
-              <a:t>Windows/Linux CI  ·  sensitive scan PASS  ·  SBOM / NOTICE / License gates</a:t>
+              <a:t>append-only attempts · retry budget · real-worker proof · human accept/resume · Auditor final</a:t>
             </a:r>
           </a:p>
         </p:txBody>
@@ -9395,7 +9395,7 @@
                 <a:ea typeface="微软雅黑"/>
                 <a:cs typeface="微软雅黑"/>
               </a:rPr>
-              <a:t>开放复用，边界同样明确</a:t>
+              <a:t>开放复用，生产边界与运维路线同样明确</a:t>
             </a:r>
             <a:endParaRPr sz="2900"/>
           </a:p>
@@ -9437,7 +9437,7 @@
                 <a:ea typeface="微软雅黑"/>
                 <a:cs typeface="微软雅黑"/>
               </a:rPr>
-              <a:t>Apache-2.0 源码、7 Skills、Schema、Evidence、CI 与 Public Demo 支持第三方复核和复用。</a:t>
+              <a:t>Apache-2.0 源码、7 Skills、Schema、Evidence、CI 与 Public Demo 支持第三方复核；生产能力分层规划。</a:t>
             </a:r>
             <a:endParaRPr>
               <a:latin typeface="微软雅黑"/>
@@ -9844,7 +9844,7 @@
                 <a:ea typeface="微软雅黑"/>
                 <a:cs typeface="微软雅黑"/>
               </a:rPr>
-              <a:t>策略身份与固定 allowlist；非 production IAM、非多租户 Runtime、无 native MCP / OTel backend。</a:t>
+              <a:t>策略身份、固定 allowlist 与文件型 observability；已支持 recovery / takeover，不宣称 HA 或多租户。</a:t>
             </a:r>
           </a:p>
         </p:txBody>
@@ -9881,7 +9881,7 @@
         </p:spPr>
         <p:txBody>
           <a:bodyPr xmlns:a="http://schemas.openxmlformats.org/drawingml/2006/main" lIns="133350" tIns="76200" rIns="133350" bIns="76200" anchor="ctr">
-            <a:normAutofit fontScale="80097"/>
+            <a:normAutofit fontScale="73447"/>
           </a:bodyPr>
           <a:lstStyle xmlns:a="http://schemas.openxmlformats.org/drawingml/2006/main"/>
           <a:p xmlns:a="http://schemas.openxmlformats.org/drawingml/2006/main">
@@ -9905,7 +9905,7 @@
                 <a:ea typeface="微软雅黑"/>
                 <a:cs typeface="微软雅黑"/>
               </a:rPr>
-              <a:t>路线：production identity + scheduling + telemetry · Runner 镜像许可证门禁关闭前不发布</a:t>
+              <a:t>路线：IAM/KMS · immutable storage · alerting · release rollback · OTel adapter · 本轮不堆叠组件</a:t>
             </a:r>
           </a:p>
         </p:txBody>
@@ -10584,14 +10584,14 @@
       </p:sp>
       <p:pic>
         <p:nvPicPr>
-          <p:cNvPr id="59" name=""/>
+          <p:cNvPr id="61" name=""/>
           <p:cNvPicPr>
             <a:picLocks xmlns:a="http://schemas.openxmlformats.org/drawingml/2006/main" noChangeAspect="1"/>
           </p:cNvPicPr>
           <p:nvPr/>
         </p:nvPicPr>
         <p:blipFill>
-          <a:blip xmlns:r="http://schemas.openxmlformats.org/officeDocument/2006/relationships" xmlns:a="http://schemas.openxmlformats.org/drawingml/2006/main" r:embed="Rb4ee4809d2b4484a"/>
+          <a:blip xmlns:r="http://schemas.openxmlformats.org/officeDocument/2006/relationships" xmlns:a="http://schemas.openxmlformats.org/drawingml/2006/main" r:embed="R593df4d159a643cf"/>
           <a:stretch xmlns:a="http://schemas.openxmlformats.org/drawingml/2006/main"/>
         </p:blipFill>
         <p:spPr>
@@ -10606,14 +10606,14 @@
       </p:pic>
       <p:pic>
         <p:nvPicPr>
-          <p:cNvPr id="60" name=""/>
+          <p:cNvPr id="62" name=""/>
           <p:cNvPicPr>
             <a:picLocks xmlns:a="http://schemas.openxmlformats.org/drawingml/2006/main" noChangeAspect="1"/>
           </p:cNvPicPr>
           <p:nvPr/>
         </p:nvPicPr>
         <p:blipFill>
-          <a:blip xmlns:r="http://schemas.openxmlformats.org/officeDocument/2006/relationships" xmlns:a="http://schemas.openxmlformats.org/drawingml/2006/main" r:embed="R6619fc11809b469b"/>
+          <a:blip xmlns:r="http://schemas.openxmlformats.org/officeDocument/2006/relationships" xmlns:a="http://schemas.openxmlformats.org/drawingml/2006/main" r:embed="R1aa701da4e6f494f"/>
           <a:stretch xmlns:a="http://schemas.openxmlformats.org/drawingml/2006/main"/>
         </p:blipFill>
         <p:spPr>
@@ -10659,6 +10659,7 @@
           <a:lstStyle xmlns:a="http://schemas.openxmlformats.org/drawingml/2006/main"/>
           <a:p xmlns:a="http://schemas.openxmlformats.org/drawingml/2006/main">
             <a:pPr algn="ctr">
+              <a:buNone/>
               <a:defRPr sz="900" b="1">
                 <a:solidFill>
                   <a:srgbClr val="475569"/>
@@ -10709,6 +10710,7 @@
           <a:lstStyle xmlns:a="http://schemas.openxmlformats.org/drawingml/2006/main"/>
           <a:p xmlns:a="http://schemas.openxmlformats.org/drawingml/2006/main">
             <a:pPr algn="ctr">
+              <a:buNone/>
               <a:defRPr sz="900" b="1">
                 <a:solidFill>
                   <a:srgbClr val="475569"/>
@@ -12137,7 +12139,7 @@
                 <a:ea typeface="微软雅黑"/>
                 <a:cs typeface="微软雅黑"/>
               </a:rPr>
-              <a:t>01 · 场景价值与复制性</a:t>
+              <a:t>01 · 真实实验室流程与价值</a:t>
             </a:r>
             <a:endParaRPr sz="1200"/>
           </a:p>
@@ -12183,7 +12185,7 @@
                 <a:ea typeface="微软雅黑"/>
                 <a:cs typeface="微软雅黑"/>
               </a:rPr>
-              <a:t>AI Engineering：首个验证场景</a:t>
+              <a:t>一次评测漂移，为什么会变成跨角色返工</a:t>
             </a:r>
             <a:endParaRPr sz="2900"/>
           </a:p>
@@ -12225,7 +12227,7 @@
                 <a:ea typeface="微软雅黑"/>
                 <a:cs typeface="微软雅黑"/>
               </a:rPr>
-              <a:t>验证场景不等于项目定义；Trust Contract 与执行治理链可迁移。</a:t>
+              <a:t>证据分散、责任交叉、重复运行；LabOps 把采证、审批、执行与审计固化为证据链。</a:t>
             </a:r>
             <a:endParaRPr>
               <a:latin typeface="微软雅黑"/>
@@ -12289,7 +12291,7 @@
                 <a:ea typeface="微软雅黑"/>
                 <a:cs typeface="微软雅黑"/>
               </a:rPr>
-              <a:t>验证场景</a:t>
+              <a:t>传统实验室</a:t>
             </a:r>
           </a:p>
         </p:txBody>
@@ -12348,7 +12350,7 @@
                 <a:ea typeface="微软雅黑"/>
                 <a:cs typeface="微软雅黑"/>
               </a:rPr>
-              <a:t>AI Engineering</a:t>
+              <a:t>多轮人工返工</a:t>
             </a:r>
           </a:p>
         </p:txBody>
@@ -12407,7 +12409,7 @@
                 <a:ea typeface="微软雅黑"/>
                 <a:cs typeface="微软雅黑"/>
               </a:rPr>
-              <a:t>事故触发、采证、分析、计划、受控执行与独立验证形成可复核闭环。</a:t>
+              <a:t>值班发现 → 工程师找证据 → 研究员分析 → 负责人审批 → 修改重跑 → 独立复核。</a:t>
             </a:r>
           </a:p>
         </p:txBody>
@@ -12466,7 +12468,7 @@
                 <a:ea typeface="微软雅黑"/>
                 <a:cs typeface="微软雅黑"/>
               </a:rPr>
-              <a:t>架构复用</a:t>
+              <a:t>LabOps 引入后</a:t>
             </a:r>
           </a:p>
         </p:txBody>
@@ -12525,7 +12527,7 @@
                 <a:ea typeface="微软雅黑"/>
                 <a:cs typeface="微软雅黑"/>
               </a:rPr>
-              <a:t>4 类 Agent</a:t>
+              <a:t>一次受控闭环</a:t>
             </a:r>
           </a:p>
         </p:txBody>
@@ -12584,7 +12586,7 @@
                 <a:ea typeface="微软雅黑"/>
                 <a:cs typeface="微软雅黑"/>
               </a:rPr>
-              <a:t>可迁移到 Coding、Data、Research、Deployment Agent；本版本不宣称已全部实现。</a:t>
+              <a:t>Incident → Evidence → RCA → Plan → Approval → Runner → Audit；每步有 owner 与证据引用。</a:t>
             </a:r>
           </a:p>
         </p:txBody>
@@ -12621,7 +12623,7 @@
         </p:spPr>
         <p:txBody>
           <a:bodyPr xmlns:a="http://schemas.openxmlformats.org/drawingml/2006/main" lIns="133350" tIns="76200" rIns="133350" bIns="76200" anchor="ctr">
-            <a:normAutofit fontScale="100000"/>
+            <a:normAutofit fontScale="99531"/>
           </a:bodyPr>
           <a:lstStyle xmlns:a="http://schemas.openxmlformats.org/drawingml/2006/main"/>
           <a:p xmlns:a="http://schemas.openxmlformats.org/drawingml/2006/main">
@@ -12645,7 +12647,7 @@
                 <a:ea typeface="微软雅黑"/>
                 <a:cs typeface="微软雅黑"/>
               </a:rPr>
-              <a:t>首个验证场景 ≠ 项目定义 · 可复用的是 Trust Contract 与执行治理链</a:t>
+              <a:t>受控指标：人工接触 · 消息往返 · 重复运行 · 证据完整度 · 错误关闭 · 处理时间</a:t>
             </a:r>
           </a:p>
         </p:txBody>
@@ -13431,7 +13433,7 @@
                 <a:ea typeface="微软雅黑"/>
                 <a:cs typeface="微软雅黑"/>
               </a:rPr>
-              <a:t>六 Agent 的价值是职责隔离，不是角色数量</a:t>
+              <a:t>任务分派、上下文、状态与责任全部可核验</a:t>
             </a:r>
             <a:endParaRPr sz="2900"/>
           </a:p>
@@ -13473,7 +13475,7 @@
                 <a:ea typeface="微软雅黑"/>
                 <a:cs typeface="微软雅黑"/>
               </a:rPr>
-              <a:t>六个 Identity 共享状态与证据；Executor 不能自证成功，Auditor 独占终态裁决。</a:t>
+              <a:t>handoff 绑定 task / incident / attempt、输入输出 artifact、状态、时间与 Matrix event ID。</a:t>
             </a:r>
             <a:endParaRPr>
               <a:latin typeface="微软雅黑"/>
@@ -14301,7 +14303,7 @@
                 <a:ea typeface="微软雅黑"/>
                 <a:cs typeface="微软雅黑"/>
               </a:rPr>
-              <a:t>真实 handoff 留痕</a:t>
+              <a:t>异常恢复</a:t>
             </a:r>
           </a:p>
           <a:p xmlns:a="http://schemas.openxmlformats.org/drawingml/2006/main">
@@ -14325,7 +14327,7 @@
                 <a:ea typeface="微软雅黑"/>
                 <a:cs typeface="微软雅黑"/>
               </a:rPr>
-              <a:t>Manager / Worker</a:t>
+              <a:t>BLOCKED → Retry / Reassign</a:t>
             </a:r>
           </a:p>
           <a:p xmlns:a="http://schemas.openxmlformats.org/drawingml/2006/main">
@@ -14349,7 +14351,7 @@
                 <a:ea typeface="微软雅黑"/>
                 <a:cs typeface="微软雅黑"/>
               </a:rPr>
-              <a:t>task + event reference</a:t>
+              <a:t>→ Takeover / new attempt</a:t>
             </a:r>
           </a:p>
         </p:txBody>
@@ -14414,7 +14416,7 @@
                 <a:ea typeface="微软雅黑"/>
                 <a:cs typeface="微软雅黑"/>
               </a:rPr>
-              <a:t>Separation of Duties</a:t>
+              <a:t>责任边界</a:t>
             </a:r>
           </a:p>
           <a:p xmlns:a="http://schemas.openxmlformats.org/drawingml/2006/main">
@@ -14438,7 +14440,7 @@
                 <a:ea typeface="微软雅黑"/>
                 <a:cs typeface="微软雅黑"/>
               </a:rPr>
-              <a:t>Executor ≠ Auditor</a:t>
+              <a:t>真人 Approval ≠ Human Takeover</a:t>
             </a:r>
           </a:p>
           <a:p xmlns:a="http://schemas.openxmlformats.org/drawingml/2006/main">
@@ -14462,7 +14464,7 @@
                 <a:ea typeface="微软雅黑"/>
                 <a:cs typeface="微软雅黑"/>
               </a:rPr>
-              <a:t>RESOLVED / ROLLED_BACK / BLOCKED</a:t>
+              <a:t>Auditor 独占终态裁决</a:t>
             </a:r>
           </a:p>
         </p:txBody>
@@ -14582,7 +14584,7 @@
                 <a:ea typeface="微软雅黑"/>
                 <a:cs typeface="微软雅黑"/>
               </a:rPr>
-              <a:t>7 个可复用、版本化、可验证的能力契约</a:t>
+              <a:t>7 个 Skill：工程契约完整，证据边界清晰</a:t>
             </a:r>
             <a:endParaRPr sz="2900"/>
           </a:p>
@@ -14699,7 +14701,7 @@
                 <a:ea typeface="微软雅黑"/>
                 <a:cs typeface="微软雅黑"/>
               </a:rPr>
-              <a:t>Skill 不是 Prompt：Registry 绑定 Owner、I/O、调用条件、失败状态、安全边界与验证方法。</a:t>
+              <a:t>7 个 Skill 声明 Owner、I/O、调用条件、工具权限、失败、安全、验证与复用。</a:t>
             </a:r>
             <a:endParaRPr>
               <a:latin typeface="微软雅黑"/>
@@ -15438,7 +15440,7 @@
         </p:spPr>
         <p:txBody>
           <a:bodyPr xmlns:a="http://schemas.openxmlformats.org/drawingml/2006/main" lIns="133350" tIns="76200" rIns="133350" bIns="76200" anchor="ctr">
-            <a:normAutofit fontScale="100000"/>
+            <a:normAutofit fontScale="98332"/>
           </a:bodyPr>
           <a:lstStyle xmlns:a="http://schemas.openxmlformats.org/drawingml/2006/main"/>
           <a:p xmlns:a="http://schemas.openxmlformats.org/drawingml/2006/main">
@@ -15462,7 +15464,7 @@
                 <a:ea typeface="微软雅黑"/>
                 <a:cs typeface="微软雅黑"/>
               </a:rPr>
-              <a:t>Registry · Version · Owner · I/O Schema · Invocation · Failure · Security · Validation · Reuse</a:t>
+              <a:t>Registry · Version · Owner · I/O · Invocation · Tool Permission · Failure · Security · Validation · Reuse</a:t>
             </a:r>
           </a:p>
         </p:txBody>
@@ -15527,7 +15529,7 @@
                 <a:ea typeface="微软雅黑"/>
                 <a:cs typeface="微软雅黑"/>
               </a:rPr>
-              <a:t>Commander Skills</a:t>
+              <a:t>Runtime evidence</a:t>
             </a:r>
           </a:p>
           <a:p xmlns:a="http://schemas.openxmlformats.org/drawingml/2006/main">
@@ -15551,7 +15553,7 @@
                 <a:ea typeface="微软雅黑"/>
                 <a:cs typeface="微软雅黑"/>
               </a:rPr>
-              <a:t>pack-lab-evidence 0.2.0  ·  publish-case-memory 0.1.0</a:t>
+              <a:t>control-lab-action: Gateway-verifiable  ·  other 6: hook required</a:t>
             </a:r>
           </a:p>
         </p:txBody>
@@ -15671,7 +15673,7 @@
                 <a:ea typeface="微软雅黑"/>
                 <a:cs typeface="微软雅黑"/>
               </a:rPr>
-              <a:t>Agent、Skill、Tool 三层分离</a:t>
+              <a:t>一个 Skill 的真实 Tool 绑定</a:t>
             </a:r>
             <a:endParaRPr sz="2900"/>
           </a:p>
@@ -15713,7 +15715,7 @@
                 <a:ea typeface="微软雅黑"/>
                 <a:cs typeface="微软雅黑"/>
               </a:rPr>
-              <a:t>control-lab-action v0.2.0 · owner=safe-executor · 真实可验证契约</a:t>
+              <a:t>新 live verifier 仅在归档契约与 Gateway / Runner 证据一致时确认。</a:t>
             </a:r>
             <a:endParaRPr>
               <a:latin typeface="微软雅黑"/>
@@ -16644,7 +16646,7 @@
                 <a:ea typeface="微软雅黑"/>
                 <a:cs typeface="微软雅黑"/>
               </a:rPr>
-              <a:t>Invocation：Policy passed &amp;&amp; scoped approval exists</a:t>
+              <a:t>safe-executor → control-lab-action → labops.runner.execute</a:t>
             </a:r>
           </a:p>
         </p:txBody>
@@ -16709,7 +16711,7 @@
                 <a:ea typeface="微软雅黑"/>
                 <a:cs typeface="微软雅黑"/>
               </a:rPr>
-              <a:t>Failure</a:t>
+              <a:t>Fail closed</a:t>
             </a:r>
           </a:p>
           <a:p xmlns:a="http://schemas.openxmlformats.org/drawingml/2006/main">
@@ -16733,7 +16735,7 @@
                 <a:ea typeface="微软雅黑"/>
                 <a:cs typeface="微软雅黑"/>
               </a:rPr>
-              <a:t>capability missing / timeout / policy mismatch</a:t>
+              <a:t>missing / reduced / forged contract</a:t>
             </a:r>
           </a:p>
           <a:p xmlns:a="http://schemas.openxmlformats.org/drawingml/2006/main">
@@ -16757,7 +16759,7 @@
                 <a:ea typeface="微软雅黑"/>
                 <a:cs typeface="微软雅黑"/>
               </a:rPr>
-              <a:t>→ fail closed</a:t>
+              <a:t>→ BLOCKED</a:t>
             </a:r>
           </a:p>
         </p:txBody>
@@ -16822,7 +16824,7 @@
                 <a:ea typeface="微软雅黑"/>
                 <a:cs typeface="微软雅黑"/>
               </a:rPr>
-              <a:t>Validation + Reuse</a:t>
+              <a:t>Evidence boundary</a:t>
             </a:r>
           </a:p>
           <a:p xmlns:a="http://schemas.openxmlformats.org/drawingml/2006/main">
@@ -16846,7 +16848,7 @@
                 <a:ea typeface="微软雅黑"/>
                 <a:cs typeface="微软雅黑"/>
               </a:rPr>
-              <a:t>manifest + protected hashes</a:t>
+              <a:t>1 Skill: Gateway-verifiable</a:t>
             </a:r>
           </a:p>
           <a:p xmlns:a="http://schemas.openxmlformats.org/drawingml/2006/main">
@@ -16870,7 +16872,7 @@
                 <a:ea typeface="微软雅黑"/>
                 <a:cs typeface="微软雅黑"/>
               </a:rPr>
-              <a:t>evaluation / data / controlled engineering</a:t>
+              <a:t>6 Skills: CONFIGURED / hook required</a:t>
             </a:r>
           </a:p>
         </p:txBody>
@@ -16990,7 +16992,7 @@
                 <a:ea typeface="微软雅黑"/>
                 <a:cs typeface="微软雅黑"/>
               </a:rPr>
-              <a:t>Agent 不能直接调用真实工程环境</a:t>
+              <a:t>真人批准必须与具体计划强绑定</a:t>
             </a:r>
             <a:endParaRPr sz="2900"/>
           </a:p>
@@ -17032,7 +17034,7 @@
                 <a:ea typeface="微软雅黑"/>
                 <a:cs typeface="微软雅黑"/>
               </a:rPr>
-              <a:t>Plan → Policy → Human Approval → Tool Contract → Gateway → 一次性断网 Runner</a:t>
+              <a:t>ApprovalGrant v1 绑定计划哈希、范围、副作用、保护对象、预算、时效、nonce 与 run。</a:t>
             </a:r>
             <a:endParaRPr>
               <a:latin typeface="微软雅黑"/>
@@ -17358,7 +17360,7 @@
                 <a:ea typeface="微软雅黑"/>
                 <a:cs typeface="微软雅黑"/>
               </a:rPr>
-              <a:t>Policy  →  Approval  →  Contract  →  Gateway allowlist</a:t>
+              <a:t>Plan hash → scope → protected resources → budget → expiry → nonce</a:t>
             </a:r>
           </a:p>
         </p:txBody>
@@ -17417,7 +17419,7 @@
                 <a:ea typeface="微软雅黑"/>
                 <a:cs typeface="微软雅黑"/>
               </a:rPr>
-              <a:t>tool_id · caller_agent_id · skill_id · run_id · approval_reference</a:t>
+              <a:t>incident_id · plan_id · canonical SHA-256 · run_id · approved_at</a:t>
             </a:r>
           </a:p>
         </p:txBody>
@@ -17482,7 +17484,7 @@
                 <a:ea typeface="微软雅黑"/>
                 <a:cs typeface="微软雅黑"/>
               </a:rPr>
-              <a:t>Tool Contract</a:t>
+              <a:t>ApprovalGrant v1</a:t>
             </a:r>
           </a:p>
           <a:p xmlns:a="http://schemas.openxmlformats.org/drawingml/2006/main">
@@ -17506,7 +17508,7 @@
                 <a:ea typeface="微软雅黑"/>
                 <a:cs typeface="微软雅黑"/>
               </a:rPr>
-              <a:t>身份 / 任务 / 审批</a:t>
+              <a:t>范围 / 副作用</a:t>
             </a:r>
           </a:p>
           <a:p xmlns:a="http://schemas.openxmlformats.org/drawingml/2006/main">
@@ -17530,7 +17532,7 @@
                 <a:ea typeface="微软雅黑"/>
                 <a:cs typeface="微软雅黑"/>
               </a:rPr>
-              <a:t>副作用 / 保护对象</a:t>
+              <a:t>保护对象 / 预算</a:t>
             </a:r>
           </a:p>
           <a:p xmlns:a="http://schemas.openxmlformats.org/drawingml/2006/main">
@@ -17554,7 +17556,7 @@
                 <a:ea typeface="微软雅黑"/>
                 <a:cs typeface="微软雅黑"/>
               </a:rPr>
-              <a:t>预算 / 幂等键</a:t>
+              <a:t>时效 / nonce</a:t>
             </a:r>
           </a:p>
         </p:txBody>
@@ -17952,7 +17954,7 @@
                 <a:ea typeface="微软雅黑"/>
                 <a:cs typeface="微软雅黑"/>
               </a:rPr>
-              <a:t>无审批或契约不一致 → Runner 不启动 / BLOCKED</a:t>
+              <a:t>任一绑定不一致或重放 → Runner 不启动</a:t>
             </a:r>
           </a:p>
         </p:txBody>

--- a/submission/LabOps-Guard-GOAI-复赛方案-v1.0-rc1.pptx
+++ b/submission/LabOps-Guard-GOAI-复赛方案-v1.0-rc1.pptx
@@ -2,31 +2,31 @@
 <file path=ppt/presentation.xml><?xml version="1.0" encoding="utf-8"?>
 <p:presentation xmlns:p="http://schemas.openxmlformats.org/presentationml/2006/main">
   <p:sldMasterIdLst>
-    <p:sldMasterId xmlns:r="http://schemas.openxmlformats.org/officeDocument/2006/relationships" id="2147483648" r:id="R6aaefbe5bb1b4341"/>
-    <p:sldMasterId xmlns:r="http://schemas.openxmlformats.org/officeDocument/2006/relationships" id="2147483650" r:id="R830847ee9e404772"/>
+    <p:sldMasterId xmlns:r="http://schemas.openxmlformats.org/officeDocument/2006/relationships" id="2147483648" r:id="R984fbbd78c80469b"/>
+    <p:sldMasterId xmlns:r="http://schemas.openxmlformats.org/officeDocument/2006/relationships" id="2147483650" r:id="R70b028422ce049dd"/>
   </p:sldMasterIdLst>
   <p:notesMasterIdLst>
-    <p:notesMasterId xmlns:r="http://schemas.openxmlformats.org/officeDocument/2006/relationships" r:id="Rce7c93aeeabd4d78"/>
+    <p:notesMasterId xmlns:r="http://schemas.openxmlformats.org/officeDocument/2006/relationships" r:id="Rf14a0821b0ac48c0"/>
   </p:notesMasterIdLst>
   <p:sldIdLst>
-    <p:sldId xmlns:r="http://schemas.openxmlformats.org/officeDocument/2006/relationships" id="256" r:id="Rb42e70698db74d27"/>
-    <p:sldId xmlns:r="http://schemas.openxmlformats.org/officeDocument/2006/relationships" id="257" r:id="Rec87320b7d47492e"/>
-    <p:sldId xmlns:r="http://schemas.openxmlformats.org/officeDocument/2006/relationships" id="258" r:id="R09501167e352495d"/>
-    <p:sldId xmlns:r="http://schemas.openxmlformats.org/officeDocument/2006/relationships" id="259" r:id="Rbf46fd0bca074a96"/>
-    <p:sldId xmlns:r="http://schemas.openxmlformats.org/officeDocument/2006/relationships" id="260" r:id="Rb9f058ff619d45a3"/>
-    <p:sldId xmlns:r="http://schemas.openxmlformats.org/officeDocument/2006/relationships" id="261" r:id="R90304ee631d34a27"/>
-    <p:sldId xmlns:r="http://schemas.openxmlformats.org/officeDocument/2006/relationships" id="262" r:id="R6a1d08e935ad426b"/>
-    <p:sldId xmlns:r="http://schemas.openxmlformats.org/officeDocument/2006/relationships" id="263" r:id="R4cecb2347c3e41ae"/>
-    <p:sldId xmlns:r="http://schemas.openxmlformats.org/officeDocument/2006/relationships" id="264" r:id="Rb1a248d174904f61"/>
-    <p:sldId xmlns:r="http://schemas.openxmlformats.org/officeDocument/2006/relationships" id="265" r:id="R3b3fca69618444a7"/>
-    <p:sldId xmlns:r="http://schemas.openxmlformats.org/officeDocument/2006/relationships" id="266" r:id="R530dcbeb49134b14"/>
-    <p:sldId xmlns:r="http://schemas.openxmlformats.org/officeDocument/2006/relationships" id="267" r:id="R9cd20e558d054ce4"/>
-    <p:sldId xmlns:r="http://schemas.openxmlformats.org/officeDocument/2006/relationships" id="268" r:id="Rc2f796370e3f46dd"/>
-    <p:sldId xmlns:r="http://schemas.openxmlformats.org/officeDocument/2006/relationships" id="269" r:id="Rfa292f24c241426d"/>
-    <p:sldId xmlns:r="http://schemas.openxmlformats.org/officeDocument/2006/relationships" id="270" r:id="R8e063013d0c14448"/>
-    <p:sldId xmlns:r="http://schemas.openxmlformats.org/officeDocument/2006/relationships" id="271" r:id="R7bc3df798ae24f82"/>
-    <p:sldId xmlns:r="http://schemas.openxmlformats.org/officeDocument/2006/relationships" id="272" r:id="R506cb708fc534605"/>
-    <p:sldId xmlns:r="http://schemas.openxmlformats.org/officeDocument/2006/relationships" id="273" r:id="R794d114c70b24f51"/>
+    <p:sldId xmlns:r="http://schemas.openxmlformats.org/officeDocument/2006/relationships" id="256" r:id="R15cd43eec3414085"/>
+    <p:sldId xmlns:r="http://schemas.openxmlformats.org/officeDocument/2006/relationships" id="257" r:id="R494033fcc2ff47a6"/>
+    <p:sldId xmlns:r="http://schemas.openxmlformats.org/officeDocument/2006/relationships" id="258" r:id="R7aa64cf1e5e94215"/>
+    <p:sldId xmlns:r="http://schemas.openxmlformats.org/officeDocument/2006/relationships" id="259" r:id="R1fbeb763a7154106"/>
+    <p:sldId xmlns:r="http://schemas.openxmlformats.org/officeDocument/2006/relationships" id="260" r:id="Rc7df1c0efd1f4dc3"/>
+    <p:sldId xmlns:r="http://schemas.openxmlformats.org/officeDocument/2006/relationships" id="261" r:id="Re9af0b94472b417b"/>
+    <p:sldId xmlns:r="http://schemas.openxmlformats.org/officeDocument/2006/relationships" id="262" r:id="R438629570ca54ae5"/>
+    <p:sldId xmlns:r="http://schemas.openxmlformats.org/officeDocument/2006/relationships" id="263" r:id="R5d39490a3b3b4fd2"/>
+    <p:sldId xmlns:r="http://schemas.openxmlformats.org/officeDocument/2006/relationships" id="264" r:id="R8cf94c7ef3174a67"/>
+    <p:sldId xmlns:r="http://schemas.openxmlformats.org/officeDocument/2006/relationships" id="265" r:id="Rff525c14aede40c3"/>
+    <p:sldId xmlns:r="http://schemas.openxmlformats.org/officeDocument/2006/relationships" id="266" r:id="Re7451563f02445b9"/>
+    <p:sldId xmlns:r="http://schemas.openxmlformats.org/officeDocument/2006/relationships" id="267" r:id="R3aaf4ef7e1bf4e9c"/>
+    <p:sldId xmlns:r="http://schemas.openxmlformats.org/officeDocument/2006/relationships" id="268" r:id="Rcccedb4ad6c54214"/>
+    <p:sldId xmlns:r="http://schemas.openxmlformats.org/officeDocument/2006/relationships" id="269" r:id="Rde76f990d03c44c1"/>
+    <p:sldId xmlns:r="http://schemas.openxmlformats.org/officeDocument/2006/relationships" id="270" r:id="R03779b94db57450b"/>
+    <p:sldId xmlns:r="http://schemas.openxmlformats.org/officeDocument/2006/relationships" id="271" r:id="Ra9d7112e22a2411e"/>
+    <p:sldId xmlns:r="http://schemas.openxmlformats.org/officeDocument/2006/relationships" id="272" r:id="R855ef800246b482e"/>
+    <p:sldId xmlns:r="http://schemas.openxmlformats.org/officeDocument/2006/relationships" id="273" r:id="Rcd00fd1ab7014f07"/>
   </p:sldIdLst>
   <p:sldSz cx="12192000" cy="6858000"/>
   <p:notesSz cx="6858000" cy="9144000"/>
@@ -1087,6 +1087,14 @@
             </a:r>
             <a:endParaRPr/>
           </a:p>
+          <a:p xmlns:a="http://schemas.openxmlformats.org/drawingml/2006/main">
+            <a:r>
+              <a:t>
+[Sources]
+- GOAI 2026 Agent Infra 赛道官方说明，复赛章节 09–12（用户提供 PDF）
+- LabOps-Guard docs/observability.md</a:t>
+            </a:r>
+          </a:p>
         </p:txBody>
       </p:sp>
       <p:sp>
@@ -1182,6 +1190,15 @@
               <a:t>- docs/compliance/runner-license-review.md</a:t>
             </a:r>
           </a:p>
+          <a:p xmlns:a="http://schemas.openxmlformats.org/drawingml/2006/main">
+            <a:r>
+              <a:t>
+[Sources]
+- GOAI 2026 Agent Infra 赛道官方说明，复赛章节 09–12（用户提供 PDF）
+- LabOps-Guard docs/tool-and-context-equivalence.md
+- LabOps-Guard docs/toolchain-compatibility-matrix.md</a:t>
+            </a:r>
+          </a:p>
         </p:txBody>
       </p:sp>
       <p:sp>
@@ -1711,6 +1728,14 @@
               <a:t>- seven skills/*/SKILL.md</a:t>
             </a:r>
             <a:endParaRPr/>
+          </a:p>
+          <a:p xmlns:a="http://schemas.openxmlformats.org/drawingml/2006/main">
+            <a:r>
+              <a:t>
+[Sources]
+- GOAI 2026 Agent Infra 赛道官方说明，复赛章节 09–12（用户提供 PDF）
+- LabOps-Guard docs/skill-framework.md</a:t>
+            </a:r>
           </a:p>
         </p:txBody>
       </p:sp>
@@ -2065,7 +2090,7 @@
   </p:cSld>
   <p:clrMap bg1="lt1" tx1="dk1" bg2="lt2" tx2="dk2" accent1="accent1" accent2="accent2" accent3="accent3" accent4="accent4" accent5="accent5" accent6="accent6" hlink="hlink" folHlink="folHlink"/>
   <p:sldLayoutIdLst>
-    <p:sldLayoutId xmlns:r="http://schemas.openxmlformats.org/officeDocument/2006/relationships" id="2147483649" r:id="R34753fee4c7d4a2b"/>
+    <p:sldLayoutId xmlns:r="http://schemas.openxmlformats.org/officeDocument/2006/relationships" id="2147483649" r:id="Re90b552e4a84478c"/>
   </p:sldLayoutIdLst>
   <p:hf sldNum="0" hdr="0" ftr="0" dt="0"/>
   <p:txStyles>
@@ -2348,7 +2373,7 @@
   </p:cSld>
   <p:clrMap bg1="lt1" tx1="dk1" bg2="lt2" tx2="dk2" accent1="accent1" accent2="accent2" accent3="accent3" accent4="accent4" accent5="accent5" accent6="accent6" hlink="hlink" folHlink="folHlink"/>
   <p:sldLayoutIdLst>
-    <p:sldLayoutId xmlns:r="http://schemas.openxmlformats.org/officeDocument/2006/relationships" id="2147483651" r:id="R97aff0d3c34546e7"/>
+    <p:sldLayoutId xmlns:r="http://schemas.openxmlformats.org/officeDocument/2006/relationships" id="2147483651" r:id="R5c6d6cd3daea4fb6"/>
   </p:sldLayoutIdLst>
   <p:hf sldNum="0" hdr="0" ftr="0" dt="0"/>
   <p:txStyles>
@@ -4632,7 +4657,7 @@
           <p:nvPr/>
         </p:nvPicPr>
         <p:blipFill>
-          <a:blip xmlns:r="http://schemas.openxmlformats.org/officeDocument/2006/relationships" xmlns:a="http://schemas.openxmlformats.org/drawingml/2006/main" r:embed="R356634331864487a"/>
+          <a:blip xmlns:r="http://schemas.openxmlformats.org/officeDocument/2006/relationships" xmlns:a="http://schemas.openxmlformats.org/drawingml/2006/main" r:embed="Ra4eb4dd88d454eb8"/>
           <a:srcRect xmlns:a="http://schemas.openxmlformats.org/drawingml/2006/main" l="0" t="11709" r="0" b="11709"/>
           <a:stretch xmlns:a="http://schemas.openxmlformats.org/drawingml/2006/main">
             <a:fillRect l="0" t="0" r="0" b="0"/>
@@ -6679,7 +6704,7 @@
           <p:nvPr/>
         </p:nvPicPr>
         <p:blipFill>
-          <a:blip xmlns:r="http://schemas.openxmlformats.org/officeDocument/2006/relationships" xmlns:a="http://schemas.openxmlformats.org/drawingml/2006/main" r:embed="Rcd920ab25f8a4c1f"/>
+          <a:blip xmlns:r="http://schemas.openxmlformats.org/officeDocument/2006/relationships" xmlns:a="http://schemas.openxmlformats.org/drawingml/2006/main" r:embed="Rb0842852ee6248d1"/>
           <a:stretch xmlns:a="http://schemas.openxmlformats.org/drawingml/2006/main"/>
         </p:blipFill>
         <p:spPr>
@@ -9282,7 +9307,7 @@
                 <a:ea typeface="微软雅黑"/>
                 <a:cs typeface="微软雅黑"/>
               </a:rPr>
-              <a:t>append-only attempts · retry budget · real-worker proof · human accept/resume · Auditor final</a:t>
+              <a:t>structured failure signal · retry budget · reassign proof · escalation / takeover · Auditor final</a:t>
             </a:r>
           </a:p>
         </p:txBody>
@@ -9844,7 +9869,7 @@
                 <a:ea typeface="微软雅黑"/>
                 <a:cs typeface="微软雅黑"/>
               </a:rPr>
-              <a:t>策略身份、固定 allowlist 与文件型 observability；已支持 recovery / takeover，不宣称 HA 或多租户。</a:t>
+              <a:t>MCP 等价契约；无 RAG：Shared State + Trace；本地五信号，不宣称 OTel backend、HA 或多租户。</a:t>
             </a:r>
           </a:p>
         </p:txBody>
@@ -9881,7 +9906,7 @@
         </p:spPr>
         <p:txBody>
           <a:bodyPr xmlns:a="http://schemas.openxmlformats.org/drawingml/2006/main" lIns="133350" tIns="76200" rIns="133350" bIns="76200" anchor="ctr">
-            <a:normAutofit fontScale="73447"/>
+            <a:normAutofit fontScale="93958"/>
           </a:bodyPr>
           <a:lstStyle xmlns:a="http://schemas.openxmlformats.org/drawingml/2006/main"/>
           <a:p xmlns:a="http://schemas.openxmlformats.org/drawingml/2006/main">
@@ -9905,7 +9930,7 @@
                 <a:ea typeface="微软雅黑"/>
                 <a:cs typeface="微软雅黑"/>
               </a:rPr>
-              <a:t>路线：IAM/KMS · immutable storage · alerting · release rollback · OTel adapter · 本轮不堆叠组件</a:t>
+              <a:t>工具链：版本/权限/迁移已披露 · MCP/OTel 仅适配器路线 · 官方工具不按数量堆叠</a:t>
             </a:r>
           </a:p>
         </p:txBody>
@@ -10591,7 +10616,7 @@
           <p:nvPr/>
         </p:nvPicPr>
         <p:blipFill>
-          <a:blip xmlns:r="http://schemas.openxmlformats.org/officeDocument/2006/relationships" xmlns:a="http://schemas.openxmlformats.org/drawingml/2006/main" r:embed="R593df4d159a643cf"/>
+          <a:blip xmlns:r="http://schemas.openxmlformats.org/officeDocument/2006/relationships" xmlns:a="http://schemas.openxmlformats.org/drawingml/2006/main" r:embed="R98f3b124137b4fbf"/>
           <a:stretch xmlns:a="http://schemas.openxmlformats.org/drawingml/2006/main"/>
         </p:blipFill>
         <p:spPr>
@@ -10613,7 +10638,7 @@
           <p:nvPr/>
         </p:nvPicPr>
         <p:blipFill>
-          <a:blip xmlns:r="http://schemas.openxmlformats.org/officeDocument/2006/relationships" xmlns:a="http://schemas.openxmlformats.org/drawingml/2006/main" r:embed="R1aa701da4e6f494f"/>
+          <a:blip xmlns:r="http://schemas.openxmlformats.org/officeDocument/2006/relationships" xmlns:a="http://schemas.openxmlformats.org/drawingml/2006/main" r:embed="R7056a280c4b54fe3"/>
           <a:stretch xmlns:a="http://schemas.openxmlformats.org/drawingml/2006/main"/>
         </p:blipFill>
         <p:spPr>
@@ -15440,7 +15465,7 @@
         </p:spPr>
         <p:txBody>
           <a:bodyPr xmlns:a="http://schemas.openxmlformats.org/drawingml/2006/main" lIns="133350" tIns="76200" rIns="133350" bIns="76200" anchor="ctr">
-            <a:normAutofit fontScale="98332"/>
+            <a:normAutofit fontScale="96344"/>
           </a:bodyPr>
           <a:lstStyle xmlns:a="http://schemas.openxmlformats.org/drawingml/2006/main"/>
           <a:p xmlns:a="http://schemas.openxmlformats.org/drawingml/2006/main">
@@ -15464,7 +15489,7 @@
                 <a:ea typeface="微软雅黑"/>
                 <a:cs typeface="微软雅黑"/>
               </a:rPr>
-              <a:t>Registry · Version · Owner · I/O · Invocation · Tool Permission · Failure · Security · Validation · Reuse</a:t>
+              <a:t>Registry · Version · Owner · I/O · Invocation · Tool · Failure · Security · Release · Rollback · Quality Eval</a:t>
             </a:r>
           </a:p>
         </p:txBody>
